--- a/slides/강화학습_ch1_벤디트문제.pptx
+++ b/slides/강화학습_ch1_벤디트문제.pptx
@@ -5,7 +5,7 @@
     <p:sldMasterId id="2147483660" r:id="rId1"/>
   </p:sldMasterIdLst>
   <p:notesMasterIdLst>
-    <p:notesMasterId r:id="rId17"/>
+    <p:notesMasterId r:id="rId20"/>
   </p:notesMasterIdLst>
   <p:sldIdLst>
     <p:sldId id="256" r:id="rId2"/>
@@ -23,6 +23,9 @@
     <p:sldId id="270" r:id="rId14"/>
     <p:sldId id="271" r:id="rId15"/>
     <p:sldId id="272" r:id="rId16"/>
+    <p:sldId id="273" r:id="rId17"/>
+    <p:sldId id="274" r:id="rId18"/>
+    <p:sldId id="275" r:id="rId19"/>
   </p:sldIdLst>
   <p:sldSz cx="9144000" cy="6858000" type="screen4x3"/>
   <p:notesSz cx="6797675" cy="9928225"/>
@@ -211,7 +214,7 @@
           <a:p>
             <a:fld id="{A6504E4A-07F7-4F02-B3E2-C3B5C1401BF2}" type="datetimeFigureOut">
               <a:rPr lang="ko-KR" altLang="en-US" smtClean="0"/>
-              <a:t>2026-07-01</a:t>
+              <a:t>2026-07-02</a:t>
             </a:fld>
             <a:endParaRPr lang="ko-KR" altLang="en-US"/>
           </a:p>
@@ -699,7 +702,7 @@
           <a:p>
             <a:fld id="{B5CCC200-B011-41AA-8609-A1BE0DC489D1}" type="datetime1">
               <a:rPr lang="ko-KR" altLang="en-US" smtClean="0"/>
-              <a:t>2026-07-01</a:t>
+              <a:t>2026-07-02</a:t>
             </a:fld>
             <a:endParaRPr lang="ko-KR" altLang="en-US"/>
           </a:p>
@@ -869,7 +872,7 @@
           <a:p>
             <a:fld id="{70533AB8-7B4B-4A83-AC2D-18EB2EAEBAEA}" type="datetime1">
               <a:rPr lang="ko-KR" altLang="en-US" smtClean="0"/>
-              <a:t>2026-07-01</a:t>
+              <a:t>2026-07-02</a:t>
             </a:fld>
             <a:endParaRPr lang="ko-KR" altLang="en-US"/>
           </a:p>
@@ -1049,7 +1052,7 @@
           <a:p>
             <a:fld id="{D1414FA1-1AC8-464F-A480-C32AB9B6D9F7}" type="datetime1">
               <a:rPr lang="ko-KR" altLang="en-US" smtClean="0"/>
-              <a:t>2026-07-01</a:t>
+              <a:t>2026-07-02</a:t>
             </a:fld>
             <a:endParaRPr lang="ko-KR" altLang="en-US"/>
           </a:p>
@@ -1289,7 +1292,7 @@
           <a:p>
             <a:fld id="{9A0CFC9C-E75B-4167-B19D-C5A0B621165E}" type="datetime1">
               <a:rPr lang="ko-KR" altLang="en-US" smtClean="0"/>
-              <a:t>2026-07-01</a:t>
+              <a:t>2026-07-02</a:t>
             </a:fld>
             <a:endParaRPr lang="en-US" altLang="ko-KR"/>
           </a:p>
@@ -1549,7 +1552,7 @@
           <a:p>
             <a:fld id="{13A7C3BF-458C-486B-8804-42E7E044747B}" type="datetime1">
               <a:rPr lang="ko-KR" altLang="en-US" smtClean="0"/>
-              <a:t>2026-07-01</a:t>
+              <a:t>2026-07-02</a:t>
             </a:fld>
             <a:endParaRPr lang="en-US" altLang="ko-KR"/>
           </a:p>
@@ -1778,7 +1781,7 @@
           <a:p>
             <a:fld id="{BC05BF06-6246-4B11-913D-5CE98FB3E67E}" type="datetime1">
               <a:rPr lang="ko-KR" altLang="en-US" smtClean="0"/>
-              <a:t>2026-07-01</a:t>
+              <a:t>2026-07-02</a:t>
             </a:fld>
             <a:endParaRPr lang="en-US" altLang="ko-KR"/>
           </a:p>
@@ -2038,7 +2041,7 @@
           <a:p>
             <a:fld id="{74251AAC-9B5B-4BD2-A98C-397B8326CAB5}" type="datetime1">
               <a:rPr lang="ko-KR" altLang="en-US" smtClean="0"/>
-              <a:t>2026-07-01</a:t>
+              <a:t>2026-07-02</a:t>
             </a:fld>
             <a:endParaRPr lang="en-US" altLang="ko-KR"/>
           </a:p>
@@ -2281,7 +2284,7 @@
           <a:p>
             <a:fld id="{3E2E4D9B-1EBE-44A6-8992-2EC634462286}" type="datetime1">
               <a:rPr lang="ko-KR" altLang="en-US" smtClean="0"/>
-              <a:t>2026-07-01</a:t>
+              <a:t>2026-07-02</a:t>
             </a:fld>
             <a:endParaRPr lang="ko-KR" altLang="en-US"/>
           </a:p>
@@ -2507,7 +2510,7 @@
           <a:p>
             <a:fld id="{00DE3D2B-089C-4252-874C-854C5B64B5CF}" type="datetime1">
               <a:rPr lang="ko-KR" altLang="en-US" smtClean="0"/>
-              <a:t>2026-07-01</a:t>
+              <a:t>2026-07-02</a:t>
             </a:fld>
             <a:endParaRPr lang="ko-KR" altLang="en-US"/>
           </a:p>
@@ -2739,7 +2742,7 @@
           <a:p>
             <a:fld id="{E3A7D4F9-217A-4FDE-AD58-802607839E65}" type="datetime1">
               <a:rPr lang="ko-KR" altLang="en-US" smtClean="0"/>
-              <a:t>2026-07-01</a:t>
+              <a:t>2026-07-02</a:t>
             </a:fld>
             <a:endParaRPr lang="ko-KR" altLang="en-US"/>
           </a:p>
@@ -3106,7 +3109,7 @@
           <a:p>
             <a:fld id="{A96F6215-B618-4E68-93B7-F5656B0437FE}" type="datetime1">
               <a:rPr lang="ko-KR" altLang="en-US" smtClean="0"/>
-              <a:t>2026-07-01</a:t>
+              <a:t>2026-07-02</a:t>
             </a:fld>
             <a:endParaRPr lang="ko-KR" altLang="en-US"/>
           </a:p>
@@ -3224,7 +3227,7 @@
           <a:p>
             <a:fld id="{F0340499-000A-4C22-9173-0D5E83708981}" type="datetime1">
               <a:rPr lang="ko-KR" altLang="en-US" smtClean="0"/>
-              <a:t>2026-07-01</a:t>
+              <a:t>2026-07-02</a:t>
             </a:fld>
             <a:endParaRPr lang="ko-KR" altLang="en-US"/>
           </a:p>
@@ -3319,7 +3322,7 @@
           <a:p>
             <a:fld id="{75080874-9225-4E21-AFFA-846381F6A863}" type="datetime1">
               <a:rPr lang="ko-KR" altLang="en-US" smtClean="0"/>
-              <a:t>2026-07-01</a:t>
+              <a:t>2026-07-02</a:t>
             </a:fld>
             <a:endParaRPr lang="ko-KR" altLang="en-US"/>
           </a:p>
@@ -3596,7 +3599,7 @@
           <a:p>
             <a:fld id="{4F956FD5-9875-4123-989D-C96BD5584C93}" type="datetime1">
               <a:rPr lang="ko-KR" altLang="en-US" smtClean="0"/>
-              <a:t>2026-07-01</a:t>
+              <a:t>2026-07-02</a:t>
             </a:fld>
             <a:endParaRPr lang="ko-KR" altLang="en-US"/>
           </a:p>
@@ -3853,7 +3856,7 @@
           <a:p>
             <a:fld id="{624C6549-AC26-4CBD-A75A-4E70E46C8017}" type="datetime1">
               <a:rPr lang="ko-KR" altLang="en-US" smtClean="0"/>
-              <a:t>2026-07-01</a:t>
+              <a:t>2026-07-02</a:t>
             </a:fld>
             <a:endParaRPr lang="ko-KR" altLang="en-US"/>
           </a:p>
@@ -4066,7 +4069,7 @@
           <a:p>
             <a:fld id="{112CA087-878C-4D54-9921-D4B1B159EE37}" type="datetime1">
               <a:rPr lang="ko-KR" altLang="en-US" smtClean="0"/>
-              <a:t>2026-07-01</a:t>
+              <a:t>2026-07-02</a:t>
             </a:fld>
             <a:endParaRPr lang="ko-KR" altLang="en-US"/>
           </a:p>
@@ -4609,8 +4612,8 @@
           </a:p>
         </p:txBody>
       </p:sp>
-      <mc:AlternateContent xmlns:mc="http://schemas.openxmlformats.org/markup-compatibility/2006">
-        <mc:Choice xmlns:a14="http://schemas.microsoft.com/office/drawing/2010/main" Requires="a14">
+      <mc:AlternateContent xmlns:mc="http://schemas.openxmlformats.org/markup-compatibility/2006" xmlns:a14="http://schemas.microsoft.com/office/drawing/2010/main">
+        <mc:Choice Requires="a14">
           <p:sp>
             <p:nvSpPr>
               <p:cNvPr id="3" name="내용 개체 틀 2">
@@ -4844,7 +4847,7 @@
             </p:txBody>
           </p:sp>
         </mc:Choice>
-        <mc:Fallback>
+        <mc:Fallback xmlns="">
           <p:sp>
             <p:nvSpPr>
               <p:cNvPr id="3" name="내용 개체 틀 2">
@@ -4884,8 +4887,8 @@
           </p:sp>
         </mc:Fallback>
       </mc:AlternateContent>
-      <mc:AlternateContent xmlns:mc="http://schemas.openxmlformats.org/markup-compatibility/2006">
-        <mc:Choice xmlns:a14="http://schemas.microsoft.com/office/drawing/2010/main" Requires="a14">
+      <mc:AlternateContent xmlns:mc="http://schemas.openxmlformats.org/markup-compatibility/2006" xmlns:a14="http://schemas.microsoft.com/office/drawing/2010/main">
+        <mc:Choice Requires="a14">
           <p:sp>
             <p:nvSpPr>
               <p:cNvPr id="4" name="TextBox 3">
@@ -5090,7 +5093,7 @@
             </p:txBody>
           </p:sp>
         </mc:Choice>
-        <mc:Fallback>
+        <mc:Fallback xmlns="">
           <p:sp>
             <p:nvSpPr>
               <p:cNvPr id="4" name="TextBox 3">
@@ -5135,8 +5138,8 @@
           </p:sp>
         </mc:Fallback>
       </mc:AlternateContent>
-      <mc:AlternateContent xmlns:mc="http://schemas.openxmlformats.org/markup-compatibility/2006">
-        <mc:Choice xmlns:a14="http://schemas.microsoft.com/office/drawing/2010/main" Requires="a14">
+      <mc:AlternateContent xmlns:mc="http://schemas.openxmlformats.org/markup-compatibility/2006" xmlns:a14="http://schemas.microsoft.com/office/drawing/2010/main">
+        <mc:Choice Requires="a14">
           <p:sp>
             <p:nvSpPr>
               <p:cNvPr id="5" name="TextBox 4">
@@ -5241,13 +5244,7 @@
                             <a:rPr lang="en-US" altLang="ko-KR" i="1">
                               <a:latin typeface="Cambria Math" panose="02040503050406030204" pitchFamily="18" charset="0"/>
                             </a:rPr>
-                            <m:t>+</m:t>
-                          </m:r>
-                          <m:r>
-                            <a:rPr lang="en-US" altLang="ko-KR" i="1">
-                              <a:latin typeface="Cambria Math" panose="02040503050406030204" pitchFamily="18" charset="0"/>
-                            </a:rPr>
-                            <m:t>…+</m:t>
+                            <m:t>+…+</m:t>
                           </m:r>
                           <m:sSub>
                             <m:sSubPr>
@@ -5328,7 +5325,7 @@
             </p:txBody>
           </p:sp>
         </mc:Choice>
-        <mc:Fallback>
+        <mc:Fallback xmlns="">
           <p:sp>
             <p:nvSpPr>
               <p:cNvPr id="5" name="TextBox 4">
@@ -5660,8 +5657,8 @@
           </a:p>
         </p:txBody>
       </p:sp>
-      <mc:AlternateContent xmlns:mc="http://schemas.openxmlformats.org/markup-compatibility/2006">
-        <mc:Choice xmlns:a14="http://schemas.microsoft.com/office/drawing/2010/main" Requires="a14">
+      <mc:AlternateContent xmlns:mc="http://schemas.openxmlformats.org/markup-compatibility/2006" xmlns:a14="http://schemas.microsoft.com/office/drawing/2010/main">
+        <mc:Choice Requires="a14">
           <p:sp>
             <p:nvSpPr>
               <p:cNvPr id="3" name="내용 개체 틀 2">
@@ -6072,7 +6069,7 @@
             </p:txBody>
           </p:sp>
         </mc:Choice>
-        <mc:Fallback>
+        <mc:Fallback xmlns="">
           <p:sp>
             <p:nvSpPr>
               <p:cNvPr id="3" name="내용 개체 틀 2">
@@ -6321,8 +6318,8 @@
           </a:p>
         </p:txBody>
       </p:sp>
-      <mc:AlternateContent xmlns:mc="http://schemas.openxmlformats.org/markup-compatibility/2006">
-        <mc:Choice xmlns:a14="http://schemas.microsoft.com/office/drawing/2010/main" Requires="a14">
+      <mc:AlternateContent xmlns:mc="http://schemas.openxmlformats.org/markup-compatibility/2006" xmlns:a14="http://schemas.microsoft.com/office/drawing/2010/main">
+        <mc:Choice Requires="a14">
           <p:sp>
             <p:nvSpPr>
               <p:cNvPr id="3" name="내용 개체 틀 2">
@@ -6580,7 +6577,7 @@
             </p:txBody>
           </p:sp>
         </mc:Choice>
-        <mc:Fallback>
+        <mc:Fallback xmlns="">
           <p:sp>
             <p:nvSpPr>
               <p:cNvPr id="3" name="내용 개체 틀 2">
@@ -6999,10 +6996,949 @@
           </a:p>
         </p:txBody>
       </p:sp>
+      <p:pic>
+        <p:nvPicPr>
+          <p:cNvPr id="5" name="그림 4">
+            <a:extLst>
+              <a:ext uri="{FF2B5EF4-FFF2-40B4-BE49-F238E27FC236}">
+                <a16:creationId xmlns:a16="http://schemas.microsoft.com/office/drawing/2014/main" id="{9951F363-2AE9-B081-D1B4-CF7A14D7C45E}"/>
+              </a:ext>
+            </a:extLst>
+          </p:cNvPr>
+          <p:cNvPicPr>
+            <a:picLocks noChangeAspect="1"/>
+          </p:cNvPicPr>
+          <p:nvPr/>
+        </p:nvPicPr>
+        <p:blipFill>
+          <a:blip r:embed="rId2"/>
+          <a:stretch>
+            <a:fillRect/>
+          </a:stretch>
+        </p:blipFill>
+        <p:spPr>
+          <a:xfrm>
+            <a:off x="341469" y="1523459"/>
+            <a:ext cx="8392696" cy="4563112"/>
+          </a:xfrm>
+          <a:prstGeom prst="rect">
+            <a:avLst/>
+          </a:prstGeom>
+        </p:spPr>
+      </p:pic>
     </p:spTree>
     <p:extLst>
       <p:ext uri="{BB962C8B-B14F-4D97-AF65-F5344CB8AC3E}">
         <p14:creationId xmlns:p14="http://schemas.microsoft.com/office/powerpoint/2010/main" val="2622720120"/>
+      </p:ext>
+    </p:extLst>
+  </p:cSld>
+  <p:clrMapOvr>
+    <a:masterClrMapping/>
+  </p:clrMapOvr>
+</p:sld>
+</file>
+
+<file path=ppt/slides/slide16.xml><?xml version="1.0" encoding="utf-8"?>
+<p:sld xmlns:a="http://schemas.openxmlformats.org/drawingml/2006/main" xmlns:r="http://schemas.openxmlformats.org/officeDocument/2006/relationships" xmlns:p="http://schemas.openxmlformats.org/presentationml/2006/main">
+  <p:cSld>
+    <p:spTree>
+      <p:nvGrpSpPr>
+        <p:cNvPr id="1" name=""/>
+        <p:cNvGrpSpPr/>
+        <p:nvPr/>
+      </p:nvGrpSpPr>
+      <p:grpSpPr>
+        <a:xfrm>
+          <a:off x="0" y="0"/>
+          <a:ext cx="0" cy="0"/>
+          <a:chOff x="0" y="0"/>
+          <a:chExt cx="0" cy="0"/>
+        </a:xfrm>
+      </p:grpSpPr>
+      <p:sp>
+        <p:nvSpPr>
+          <p:cNvPr id="2" name="제목 1">
+            <a:extLst>
+              <a:ext uri="{FF2B5EF4-FFF2-40B4-BE49-F238E27FC236}">
+                <a16:creationId xmlns:a16="http://schemas.microsoft.com/office/drawing/2014/main" id="{36716D46-FBAE-D154-AC5C-635549254582}"/>
+              </a:ext>
+            </a:extLst>
+          </p:cNvPr>
+          <p:cNvSpPr>
+            <a:spLocks noGrp="1"/>
+          </p:cNvSpPr>
+          <p:nvPr>
+            <p:ph type="title"/>
+          </p:nvPr>
+        </p:nvSpPr>
+        <p:spPr/>
+        <p:txBody>
+          <a:bodyPr/>
+          <a:lstStyle/>
+          <a:p>
+            <a:r>
+              <a:rPr lang="ko-KR" altLang="en-US" dirty="0"/>
+              <a:t>행동 실행</a:t>
+            </a:r>
+          </a:p>
+        </p:txBody>
+      </p:sp>
+      <p:sp>
+        <p:nvSpPr>
+          <p:cNvPr id="3" name="내용 개체 틀 2">
+            <a:extLst>
+              <a:ext uri="{FF2B5EF4-FFF2-40B4-BE49-F238E27FC236}">
+                <a16:creationId xmlns:a16="http://schemas.microsoft.com/office/drawing/2014/main" id="{3192617F-2989-FFB1-FC2E-3859DA41A2EB}"/>
+              </a:ext>
+            </a:extLst>
+          </p:cNvPr>
+          <p:cNvSpPr>
+            <a:spLocks noGrp="1"/>
+          </p:cNvSpPr>
+          <p:nvPr>
+            <p:ph idx="1"/>
+          </p:nvPr>
+        </p:nvSpPr>
+        <p:spPr/>
+        <p:txBody>
+          <a:bodyPr/>
+          <a:lstStyle/>
+          <a:p>
+            <a:endParaRPr lang="ko-KR" altLang="en-US" dirty="0"/>
+          </a:p>
+        </p:txBody>
+      </p:sp>
+      <p:pic>
+        <p:nvPicPr>
+          <p:cNvPr id="5" name="그림 4">
+            <a:extLst>
+              <a:ext uri="{FF2B5EF4-FFF2-40B4-BE49-F238E27FC236}">
+                <a16:creationId xmlns:a16="http://schemas.microsoft.com/office/drawing/2014/main" id="{57DF38BB-F540-9F92-B77F-8C8F089D289E}"/>
+              </a:ext>
+            </a:extLst>
+          </p:cNvPr>
+          <p:cNvPicPr>
+            <a:picLocks noChangeAspect="1"/>
+          </p:cNvPicPr>
+          <p:nvPr/>
+        </p:nvPicPr>
+        <p:blipFill>
+          <a:blip r:embed="rId2"/>
+          <a:stretch>
+            <a:fillRect/>
+          </a:stretch>
+        </p:blipFill>
+        <p:spPr>
+          <a:xfrm>
+            <a:off x="89364" y="1510082"/>
+            <a:ext cx="5303903" cy="3331110"/>
+          </a:xfrm>
+          <a:prstGeom prst="rect">
+            <a:avLst/>
+          </a:prstGeom>
+        </p:spPr>
+      </p:pic>
+      <p:pic>
+        <p:nvPicPr>
+          <p:cNvPr id="7" name="그림 6">
+            <a:extLst>
+              <a:ext uri="{FF2B5EF4-FFF2-40B4-BE49-F238E27FC236}">
+                <a16:creationId xmlns:a16="http://schemas.microsoft.com/office/drawing/2014/main" id="{E5346D4C-05CB-E456-EC7E-69C3A6619CBA}"/>
+              </a:ext>
+            </a:extLst>
+          </p:cNvPr>
+          <p:cNvPicPr>
+            <a:picLocks noChangeAspect="1"/>
+          </p:cNvPicPr>
+          <p:nvPr/>
+        </p:nvPicPr>
+        <p:blipFill>
+          <a:blip r:embed="rId3"/>
+          <a:stretch>
+            <a:fillRect/>
+          </a:stretch>
+        </p:blipFill>
+        <p:spPr>
+          <a:xfrm>
+            <a:off x="5238032" y="458614"/>
+            <a:ext cx="3600000" cy="2723643"/>
+          </a:xfrm>
+          <a:prstGeom prst="rect">
+            <a:avLst/>
+          </a:prstGeom>
+        </p:spPr>
+      </p:pic>
+      <p:pic>
+        <p:nvPicPr>
+          <p:cNvPr id="9" name="그림 8">
+            <a:extLst>
+              <a:ext uri="{FF2B5EF4-FFF2-40B4-BE49-F238E27FC236}">
+                <a16:creationId xmlns:a16="http://schemas.microsoft.com/office/drawing/2014/main" id="{AC7CF44A-046C-B8CE-0495-6C831F521E45}"/>
+              </a:ext>
+            </a:extLst>
+          </p:cNvPr>
+          <p:cNvPicPr>
+            <a:picLocks noChangeAspect="1"/>
+          </p:cNvPicPr>
+          <p:nvPr/>
+        </p:nvPicPr>
+        <p:blipFill>
+          <a:blip r:embed="rId4"/>
+          <a:stretch>
+            <a:fillRect/>
+          </a:stretch>
+        </p:blipFill>
+        <p:spPr>
+          <a:xfrm>
+            <a:off x="5238032" y="3387903"/>
+            <a:ext cx="3600000" cy="2742857"/>
+          </a:xfrm>
+          <a:prstGeom prst="rect">
+            <a:avLst/>
+          </a:prstGeom>
+        </p:spPr>
+      </p:pic>
+      <mc:AlternateContent xmlns:mc="http://schemas.openxmlformats.org/markup-compatibility/2006">
+        <mc:Choice xmlns:a14="http://schemas.microsoft.com/office/drawing/2010/main" Requires="a14">
+          <p:sp>
+            <p:nvSpPr>
+              <p:cNvPr id="10" name="TextBox 9">
+                <a:extLst>
+                  <a:ext uri="{FF2B5EF4-FFF2-40B4-BE49-F238E27FC236}">
+                    <a16:creationId xmlns:a16="http://schemas.microsoft.com/office/drawing/2014/main" id="{92B8FB8E-5192-C6C2-9AAE-AA28619ACD6B}"/>
+                  </a:ext>
+                </a:extLst>
+              </p:cNvPr>
+              <p:cNvSpPr txBox="1"/>
+              <p:nvPr/>
+            </p:nvSpPr>
+            <p:spPr>
+              <a:xfrm>
+                <a:off x="1521151" y="5385359"/>
+                <a:ext cx="3627916" cy="646331"/>
+              </a:xfrm>
+              <a:prstGeom prst="rect">
+                <a:avLst/>
+              </a:prstGeom>
+              <a:noFill/>
+            </p:spPr>
+            <p:txBody>
+              <a:bodyPr wrap="none" rtlCol="0">
+                <a:spAutoFit/>
+              </a:bodyPr>
+              <a:lstStyle/>
+              <a:p>
+                <a:pPr algn="just"/>
+                <a:r>
+                  <a:rPr lang="ko-KR" altLang="en-US" dirty="0"/>
+                  <a:t>단계를 거듭할 수록 승률이 높아짐</a:t>
+                </a:r>
+                <a:endParaRPr lang="en-US" altLang="ko-KR" dirty="0"/>
+              </a:p>
+              <a:p>
+                <a:pPr algn="just"/>
+                <a14:m>
+                  <m:oMath xmlns:m="http://schemas.openxmlformats.org/officeDocument/2006/math">
+                    <m:r>
+                      <a:rPr lang="ko-KR" altLang="en-US" i="1" dirty="0" smtClean="0">
+                        <a:latin typeface="Cambria Math" panose="02040503050406030204" pitchFamily="18" charset="0"/>
+                      </a:rPr>
+                      <m:t>𝜖</m:t>
+                    </m:r>
+                  </m:oMath>
+                </a14:m>
+                <a:r>
+                  <a:rPr lang="en-US" altLang="ko-KR" dirty="0"/>
+                  <a:t>-</a:t>
+                </a:r>
+                <a:r>
+                  <a:rPr lang="ko-KR" altLang="en-US" dirty="0"/>
+                  <a:t>탐욕 정책의 학습의 효과</a:t>
+                </a:r>
+              </a:p>
+            </p:txBody>
+          </p:sp>
+        </mc:Choice>
+        <mc:Fallback>
+          <p:sp>
+            <p:nvSpPr>
+              <p:cNvPr id="10" name="TextBox 9">
+                <a:extLst>
+                  <a:ext uri="{FF2B5EF4-FFF2-40B4-BE49-F238E27FC236}">
+                    <a16:creationId xmlns:a16="http://schemas.microsoft.com/office/drawing/2014/main" id="{92B8FB8E-5192-C6C2-9AAE-AA28619ACD6B}"/>
+                  </a:ext>
+                </a:extLst>
+              </p:cNvPr>
+              <p:cNvSpPr txBox="1">
+                <a:spLocks noRot="1" noChangeAspect="1" noMove="1" noResize="1" noEditPoints="1" noAdjustHandles="1" noChangeArrowheads="1" noChangeShapeType="1" noTextEdit="1"/>
+              </p:cNvSpPr>
+              <p:nvPr/>
+            </p:nvSpPr>
+            <p:spPr>
+              <a:xfrm>
+                <a:off x="1521151" y="5385359"/>
+                <a:ext cx="3627916" cy="646331"/>
+              </a:xfrm>
+              <a:prstGeom prst="rect">
+                <a:avLst/>
+              </a:prstGeom>
+              <a:blipFill>
+                <a:blip r:embed="rId5"/>
+                <a:stretch>
+                  <a:fillRect l="-1513" t="-6604" r="-672" b="-14151"/>
+                </a:stretch>
+              </a:blipFill>
+            </p:spPr>
+            <p:txBody>
+              <a:bodyPr/>
+              <a:lstStyle/>
+              <a:p>
+                <a:r>
+                  <a:rPr lang="ko-KR" altLang="en-US">
+                    <a:noFill/>
+                  </a:rPr>
+                  <a:t> </a:t>
+                </a:r>
+              </a:p>
+            </p:txBody>
+          </p:sp>
+        </mc:Fallback>
+      </mc:AlternateContent>
+    </p:spTree>
+    <p:extLst>
+      <p:ext uri="{BB962C8B-B14F-4D97-AF65-F5344CB8AC3E}">
+        <p14:creationId xmlns:p14="http://schemas.microsoft.com/office/powerpoint/2010/main" val="312304973"/>
+      </p:ext>
+    </p:extLst>
+  </p:cSld>
+  <p:clrMapOvr>
+    <a:masterClrMapping/>
+  </p:clrMapOvr>
+</p:sld>
+</file>
+
+<file path=ppt/slides/slide17.xml><?xml version="1.0" encoding="utf-8"?>
+<p:sld xmlns:a="http://schemas.openxmlformats.org/drawingml/2006/main" xmlns:r="http://schemas.openxmlformats.org/officeDocument/2006/relationships" xmlns:p="http://schemas.openxmlformats.org/presentationml/2006/main">
+  <p:cSld>
+    <p:spTree>
+      <p:nvGrpSpPr>
+        <p:cNvPr id="1" name=""/>
+        <p:cNvGrpSpPr/>
+        <p:nvPr/>
+      </p:nvGrpSpPr>
+      <p:grpSpPr>
+        <a:xfrm>
+          <a:off x="0" y="0"/>
+          <a:ext cx="0" cy="0"/>
+          <a:chOff x="0" y="0"/>
+          <a:chExt cx="0" cy="0"/>
+        </a:xfrm>
+      </p:grpSpPr>
+      <p:sp>
+        <p:nvSpPr>
+          <p:cNvPr id="2" name="제목 1">
+            <a:extLst>
+              <a:ext uri="{FF2B5EF4-FFF2-40B4-BE49-F238E27FC236}">
+                <a16:creationId xmlns:a16="http://schemas.microsoft.com/office/drawing/2014/main" id="{F0C4FD31-8B19-6556-B32A-9F975BDACFF8}"/>
+              </a:ext>
+            </a:extLst>
+          </p:cNvPr>
+          <p:cNvSpPr>
+            <a:spLocks noGrp="1"/>
+          </p:cNvSpPr>
+          <p:nvPr>
+            <p:ph type="title"/>
+          </p:nvPr>
+        </p:nvSpPr>
+        <p:spPr/>
+        <p:txBody>
+          <a:bodyPr>
+            <a:normAutofit/>
+          </a:bodyPr>
+          <a:lstStyle/>
+          <a:p>
+            <a:r>
+              <a:rPr lang="ko-KR" altLang="en-US" dirty="0"/>
+              <a:t>실험할 때마다 결과가 다름</a:t>
+            </a:r>
+          </a:p>
+        </p:txBody>
+      </p:sp>
+      <p:sp>
+        <p:nvSpPr>
+          <p:cNvPr id="3" name="내용 개체 틀 2">
+            <a:extLst>
+              <a:ext uri="{FF2B5EF4-FFF2-40B4-BE49-F238E27FC236}">
+                <a16:creationId xmlns:a16="http://schemas.microsoft.com/office/drawing/2014/main" id="{270D378D-0CDF-5844-3E03-2128F62C664E}"/>
+              </a:ext>
+            </a:extLst>
+          </p:cNvPr>
+          <p:cNvSpPr>
+            <a:spLocks noGrp="1"/>
+          </p:cNvSpPr>
+          <p:nvPr>
+            <p:ph idx="1"/>
+          </p:nvPr>
+        </p:nvSpPr>
+        <p:spPr/>
+        <p:txBody>
+          <a:bodyPr/>
+          <a:lstStyle/>
+          <a:p>
+            <a:pPr algn="just">
+              <a:lnSpc>
+                <a:spcPct val="100000"/>
+              </a:lnSpc>
+            </a:pPr>
+            <a:r>
+              <a:rPr lang="ko-KR" altLang="en-US" dirty="0"/>
+              <a:t>무작위성</a:t>
+            </a:r>
+            <a:endParaRPr lang="en-US" altLang="ko-KR" dirty="0"/>
+          </a:p>
+          <a:p>
+            <a:pPr algn="just">
+              <a:lnSpc>
+                <a:spcPct val="100000"/>
+              </a:lnSpc>
+            </a:pPr>
+            <a:r>
+              <a:rPr lang="ko-KR" altLang="en-US" dirty="0"/>
+              <a:t>한번의 실험만으로 판단하는 것은 의미가 없고 알고리즘의 </a:t>
+            </a:r>
+            <a:r>
+              <a:rPr lang="en-US" altLang="ko-KR" dirty="0"/>
+              <a:t>‘</a:t>
+            </a:r>
+            <a:r>
+              <a:rPr lang="ko-KR" altLang="en-US" dirty="0"/>
+              <a:t>평균적인 우수성</a:t>
+            </a:r>
+            <a:r>
+              <a:rPr lang="en-US" altLang="ko-KR" dirty="0"/>
+              <a:t>＇</a:t>
+            </a:r>
+            <a:r>
+              <a:rPr lang="ko-KR" altLang="en-US" dirty="0"/>
+              <a:t>을 평가해야 함</a:t>
+            </a:r>
+          </a:p>
+        </p:txBody>
+      </p:sp>
+      <p:pic>
+        <p:nvPicPr>
+          <p:cNvPr id="7" name="그림 6">
+            <a:extLst>
+              <a:ext uri="{FF2B5EF4-FFF2-40B4-BE49-F238E27FC236}">
+                <a16:creationId xmlns:a16="http://schemas.microsoft.com/office/drawing/2014/main" id="{162C9429-BE30-F744-A00B-CE1A885C7AE1}"/>
+              </a:ext>
+            </a:extLst>
+          </p:cNvPr>
+          <p:cNvPicPr>
+            <a:picLocks noChangeAspect="1"/>
+          </p:cNvPicPr>
+          <p:nvPr/>
+        </p:nvPicPr>
+        <p:blipFill>
+          <a:blip r:embed="rId2"/>
+          <a:stretch>
+            <a:fillRect/>
+          </a:stretch>
+        </p:blipFill>
+        <p:spPr>
+          <a:xfrm>
+            <a:off x="4730561" y="3067940"/>
+            <a:ext cx="3600000" cy="2767260"/>
+          </a:xfrm>
+          <a:prstGeom prst="rect">
+            <a:avLst/>
+          </a:prstGeom>
+        </p:spPr>
+      </p:pic>
+      <p:sp>
+        <p:nvSpPr>
+          <p:cNvPr id="8" name="TextBox 7">
+            <a:extLst>
+              <a:ext uri="{FF2B5EF4-FFF2-40B4-BE49-F238E27FC236}">
+                <a16:creationId xmlns:a16="http://schemas.microsoft.com/office/drawing/2014/main" id="{9EAD9661-30BD-4F09-2332-F03333993EA3}"/>
+              </a:ext>
+            </a:extLst>
+          </p:cNvPr>
+          <p:cNvSpPr txBox="1"/>
+          <p:nvPr/>
+        </p:nvSpPr>
+        <p:spPr>
+          <a:xfrm>
+            <a:off x="1379439" y="5947303"/>
+            <a:ext cx="2175596" cy="276999"/>
+          </a:xfrm>
+          <a:prstGeom prst="rect">
+            <a:avLst/>
+          </a:prstGeom>
+          <a:noFill/>
+        </p:spPr>
+        <p:txBody>
+          <a:bodyPr wrap="none" rtlCol="0">
+            <a:spAutoFit/>
+          </a:bodyPr>
+          <a:lstStyle/>
+          <a:p>
+            <a:r>
+              <a:rPr lang="en-US" altLang="ko-KR" sz="1200" dirty="0"/>
+              <a:t>10</a:t>
+            </a:r>
+            <a:r>
+              <a:rPr lang="ko-KR" altLang="en-US" sz="1200" dirty="0"/>
+              <a:t>번 실험의 결과를 모두 표현</a:t>
+            </a:r>
+          </a:p>
+        </p:txBody>
+      </p:sp>
+      <p:sp>
+        <p:nvSpPr>
+          <p:cNvPr id="9" name="TextBox 8">
+            <a:extLst>
+              <a:ext uri="{FF2B5EF4-FFF2-40B4-BE49-F238E27FC236}">
+                <a16:creationId xmlns:a16="http://schemas.microsoft.com/office/drawing/2014/main" id="{BADD1CE9-21A5-9EA5-A61F-D8538806A0C4}"/>
+              </a:ext>
+            </a:extLst>
+          </p:cNvPr>
+          <p:cNvSpPr txBox="1"/>
+          <p:nvPr/>
+        </p:nvSpPr>
+        <p:spPr>
+          <a:xfrm>
+            <a:off x="6075355" y="5941135"/>
+            <a:ext cx="1832553" cy="276999"/>
+          </a:xfrm>
+          <a:prstGeom prst="rect">
+            <a:avLst/>
+          </a:prstGeom>
+          <a:noFill/>
+        </p:spPr>
+        <p:txBody>
+          <a:bodyPr wrap="none" rtlCol="0">
+            <a:spAutoFit/>
+          </a:bodyPr>
+          <a:lstStyle/>
+          <a:p>
+            <a:r>
+              <a:rPr lang="en-US" altLang="ko-KR" sz="1200" dirty="0"/>
+              <a:t>10</a:t>
+            </a:r>
+            <a:r>
+              <a:rPr lang="ko-KR" altLang="en-US" sz="1200" dirty="0"/>
+              <a:t>번 실험의 결과의 평균</a:t>
+            </a:r>
+          </a:p>
+        </p:txBody>
+      </p:sp>
+      <p:pic>
+        <p:nvPicPr>
+          <p:cNvPr id="11" name="그림 10">
+            <a:extLst>
+              <a:ext uri="{FF2B5EF4-FFF2-40B4-BE49-F238E27FC236}">
+                <a16:creationId xmlns:a16="http://schemas.microsoft.com/office/drawing/2014/main" id="{FA776E78-23CE-6625-CC71-5C3E7DC1CF10}"/>
+              </a:ext>
+            </a:extLst>
+          </p:cNvPr>
+          <p:cNvPicPr>
+            <a:picLocks noChangeAspect="1"/>
+          </p:cNvPicPr>
+          <p:nvPr/>
+        </p:nvPicPr>
+        <p:blipFill>
+          <a:blip r:embed="rId3"/>
+          <a:stretch>
+            <a:fillRect/>
+          </a:stretch>
+        </p:blipFill>
+        <p:spPr>
+          <a:xfrm>
+            <a:off x="641345" y="3034672"/>
+            <a:ext cx="3600000" cy="2767260"/>
+          </a:xfrm>
+          <a:prstGeom prst="rect">
+            <a:avLst/>
+          </a:prstGeom>
+        </p:spPr>
+      </p:pic>
+    </p:spTree>
+    <p:extLst>
+      <p:ext uri="{BB962C8B-B14F-4D97-AF65-F5344CB8AC3E}">
+        <p14:creationId xmlns:p14="http://schemas.microsoft.com/office/powerpoint/2010/main" val="187959754"/>
+      </p:ext>
+    </p:extLst>
+  </p:cSld>
+  <p:clrMapOvr>
+    <a:masterClrMapping/>
+  </p:clrMapOvr>
+</p:sld>
+</file>
+
+<file path=ppt/slides/slide18.xml><?xml version="1.0" encoding="utf-8"?>
+<p:sld xmlns:a="http://schemas.openxmlformats.org/drawingml/2006/main" xmlns:r="http://schemas.openxmlformats.org/officeDocument/2006/relationships" xmlns:p="http://schemas.openxmlformats.org/presentationml/2006/main">
+  <p:cSld>
+    <p:spTree>
+      <p:nvGrpSpPr>
+        <p:cNvPr id="1" name=""/>
+        <p:cNvGrpSpPr/>
+        <p:nvPr/>
+      </p:nvGrpSpPr>
+      <p:grpSpPr>
+        <a:xfrm>
+          <a:off x="0" y="0"/>
+          <a:ext cx="0" cy="0"/>
+          <a:chOff x="0" y="0"/>
+          <a:chExt cx="0" cy="0"/>
+        </a:xfrm>
+      </p:grpSpPr>
+      <mc:AlternateContent xmlns:mc="http://schemas.openxmlformats.org/markup-compatibility/2006">
+        <mc:Choice xmlns:a14="http://schemas.microsoft.com/office/drawing/2010/main" Requires="a14">
+          <p:sp>
+            <p:nvSpPr>
+              <p:cNvPr id="2" name="제목 1">
+                <a:extLst>
+                  <a:ext uri="{FF2B5EF4-FFF2-40B4-BE49-F238E27FC236}">
+                    <a16:creationId xmlns:a16="http://schemas.microsoft.com/office/drawing/2014/main" id="{D6515BCB-FD9E-A6A4-BE48-177AC36E934C}"/>
+                  </a:ext>
+                </a:extLst>
+              </p:cNvPr>
+              <p:cNvSpPr>
+                <a:spLocks noGrp="1"/>
+              </p:cNvSpPr>
+              <p:nvPr>
+                <p:ph type="title"/>
+              </p:nvPr>
+            </p:nvSpPr>
+            <p:spPr/>
+            <p:txBody>
+              <a:bodyPr/>
+              <a:lstStyle/>
+              <a:p>
+                <a14:m>
+                  <m:oMath xmlns:m="http://schemas.openxmlformats.org/officeDocument/2006/math">
+                    <m:r>
+                      <a:rPr lang="ko-KR" altLang="en-US" i="1" dirty="0">
+                        <a:latin typeface="Cambria Math" panose="02040503050406030204" pitchFamily="18" charset="0"/>
+                      </a:rPr>
+                      <m:t>𝜀</m:t>
+                    </m:r>
+                  </m:oMath>
+                </a14:m>
+                <a:r>
+                  <a:rPr lang="en-US" altLang="ko-KR" dirty="0"/>
+                  <a:t> </a:t>
+                </a:r>
+                <a:r>
+                  <a:rPr lang="ko-KR" altLang="en-US" dirty="0"/>
+                  <a:t>값에 대한 실험</a:t>
+                </a:r>
+              </a:p>
+            </p:txBody>
+          </p:sp>
+        </mc:Choice>
+        <mc:Fallback>
+          <p:sp>
+            <p:nvSpPr>
+              <p:cNvPr id="2" name="제목 1">
+                <a:extLst>
+                  <a:ext uri="{FF2B5EF4-FFF2-40B4-BE49-F238E27FC236}">
+                    <a16:creationId xmlns:a16="http://schemas.microsoft.com/office/drawing/2014/main" id="{D6515BCB-FD9E-A6A4-BE48-177AC36E934C}"/>
+                  </a:ext>
+                </a:extLst>
+              </p:cNvPr>
+              <p:cNvSpPr>
+                <a:spLocks noGrp="1" noRot="1" noChangeAspect="1" noMove="1" noResize="1" noEditPoints="1" noAdjustHandles="1" noChangeArrowheads="1" noChangeShapeType="1" noTextEdit="1"/>
+              </p:cNvSpPr>
+              <p:nvPr>
+                <p:ph type="title"/>
+              </p:nvPr>
+            </p:nvSpPr>
+            <p:spPr>
+              <a:blipFill>
+                <a:blip r:embed="rId2"/>
+                <a:stretch>
+                  <a:fillRect t="-13571" b="-24286"/>
+                </a:stretch>
+              </a:blipFill>
+            </p:spPr>
+            <p:txBody>
+              <a:bodyPr/>
+              <a:lstStyle/>
+              <a:p>
+                <a:r>
+                  <a:rPr lang="ko-KR" altLang="en-US">
+                    <a:noFill/>
+                  </a:rPr>
+                  <a:t> </a:t>
+                </a:r>
+              </a:p>
+            </p:txBody>
+          </p:sp>
+        </mc:Fallback>
+      </mc:AlternateContent>
+      <mc:AlternateContent xmlns:mc="http://schemas.openxmlformats.org/markup-compatibility/2006">
+        <mc:Choice xmlns:a14="http://schemas.microsoft.com/office/drawing/2010/main" Requires="a14">
+          <p:sp>
+            <p:nvSpPr>
+              <p:cNvPr id="3" name="내용 개체 틀 2">
+                <a:extLst>
+                  <a:ext uri="{FF2B5EF4-FFF2-40B4-BE49-F238E27FC236}">
+                    <a16:creationId xmlns:a16="http://schemas.microsoft.com/office/drawing/2014/main" id="{5E4B6386-C7DA-5C57-35A3-A030186832D6}"/>
+                  </a:ext>
+                </a:extLst>
+              </p:cNvPr>
+              <p:cNvSpPr>
+                <a:spLocks noGrp="1"/>
+              </p:cNvSpPr>
+              <p:nvPr>
+                <p:ph idx="1"/>
+              </p:nvPr>
+            </p:nvSpPr>
+            <p:spPr>
+              <a:xfrm>
+                <a:off x="5259937" y="1056068"/>
+                <a:ext cx="3742394" cy="5280338"/>
+              </a:xfrm>
+            </p:spPr>
+            <p:txBody>
+              <a:bodyPr>
+                <a:normAutofit/>
+              </a:bodyPr>
+              <a:lstStyle/>
+              <a:p>
+                <a:pPr algn="just">
+                  <a:lnSpc>
+                    <a:spcPct val="100000"/>
+                  </a:lnSpc>
+                </a:pPr>
+                <a14:m>
+                  <m:oMath xmlns:m="http://schemas.openxmlformats.org/officeDocument/2006/math">
+                    <m:r>
+                      <a:rPr lang="ko-KR" altLang="en-US" sz="1800" i="1" dirty="0">
+                        <a:latin typeface="Cambria Math" panose="02040503050406030204" pitchFamily="18" charset="0"/>
+                      </a:rPr>
+                      <m:t>𝜀</m:t>
+                    </m:r>
+                  </m:oMath>
+                </a14:m>
+                <a:r>
+                  <a:rPr lang="en-US" altLang="ko-KR" sz="1800" dirty="0"/>
+                  <a:t> = 0.01 : </a:t>
+                </a:r>
+                <a:r>
+                  <a:rPr lang="ko-KR" altLang="en-US" sz="1800" dirty="0"/>
+                  <a:t>상승 속도는 가장 느림</a:t>
+                </a:r>
+                <a:r>
+                  <a:rPr lang="en-US" altLang="ko-KR" sz="1800" dirty="0"/>
+                  <a:t>. </a:t>
+                </a:r>
+                <a:r>
+                  <a:rPr lang="ko-KR" altLang="en-US" sz="1800" dirty="0"/>
+                  <a:t>탐색 비율이 너무 작아서 최적의 </a:t>
+                </a:r>
+                <a:r>
+                  <a:rPr lang="ko-KR" altLang="en-US" sz="1800" dirty="0" err="1"/>
+                  <a:t>머신을</a:t>
+                </a:r>
+                <a:r>
+                  <a:rPr lang="ko-KR" altLang="en-US" sz="1800" dirty="0"/>
+                  <a:t> 찾을 확률이 낮음</a:t>
+                </a:r>
+                <a:endParaRPr lang="en-US" altLang="ko-KR" sz="1800" dirty="0"/>
+              </a:p>
+              <a:p>
+                <a:pPr algn="just">
+                  <a:lnSpc>
+                    <a:spcPct val="100000"/>
+                  </a:lnSpc>
+                </a:pPr>
+                <a:endParaRPr lang="en-US" altLang="ko-KR" sz="1800" dirty="0"/>
+              </a:p>
+              <a:p>
+                <a:pPr algn="just">
+                  <a:lnSpc>
+                    <a:spcPct val="100000"/>
+                  </a:lnSpc>
+                </a:pPr>
+                <a14:m>
+                  <m:oMath xmlns:m="http://schemas.openxmlformats.org/officeDocument/2006/math">
+                    <m:r>
+                      <a:rPr lang="ko-KR" altLang="en-US" sz="1800" i="1" dirty="0" smtClean="0">
+                        <a:latin typeface="Cambria Math" panose="02040503050406030204" pitchFamily="18" charset="0"/>
+                      </a:rPr>
+                      <m:t>𝜀</m:t>
+                    </m:r>
+                  </m:oMath>
+                </a14:m>
+                <a:r>
+                  <a:rPr lang="en-US" altLang="ko-KR" sz="1800" dirty="0"/>
+                  <a:t> = 0.03: </a:t>
+                </a:r>
+                <a:r>
+                  <a:rPr lang="ko-KR" altLang="en-US" sz="1800" dirty="0"/>
+                  <a:t>승률이 빠르게 상승하지만 상승세가 급격히 꺾임</a:t>
+                </a:r>
+                <a:r>
+                  <a:rPr lang="en-US" altLang="ko-KR" sz="1800" dirty="0"/>
+                  <a:t>. 30%</a:t>
+                </a:r>
+                <a:r>
+                  <a:rPr lang="ko-KR" altLang="en-US" sz="1800" dirty="0"/>
+                  <a:t>라는 높은 확률로 탐색을 시도하기 때문에 최적의 </a:t>
+                </a:r>
+                <a:r>
+                  <a:rPr lang="ko-KR" altLang="en-US" sz="1800" dirty="0" err="1"/>
+                  <a:t>머신을</a:t>
+                </a:r>
+                <a:r>
+                  <a:rPr lang="ko-KR" altLang="en-US" sz="1800" dirty="0"/>
+                  <a:t> 선택하는 </a:t>
+                </a:r>
+                <a:r>
+                  <a:rPr lang="en-US" altLang="ko-KR" sz="1800" dirty="0"/>
+                  <a:t>‘</a:t>
+                </a:r>
+                <a:r>
+                  <a:rPr lang="ko-KR" altLang="en-US" sz="1800" dirty="0"/>
+                  <a:t>활용의 비율이 너무 낮기 때문</a:t>
+                </a:r>
+                <a:r>
+                  <a:rPr lang="en-US" altLang="ko-KR" sz="1800" dirty="0"/>
+                  <a:t>‘</a:t>
+                </a:r>
+              </a:p>
+              <a:p>
+                <a:pPr algn="just">
+                  <a:lnSpc>
+                    <a:spcPct val="100000"/>
+                  </a:lnSpc>
+                </a:pPr>
+                <a:endParaRPr lang="ko-KR" altLang="en-US" sz="1800" dirty="0"/>
+              </a:p>
+            </p:txBody>
+          </p:sp>
+        </mc:Choice>
+        <mc:Fallback>
+          <p:sp>
+            <p:nvSpPr>
+              <p:cNvPr id="3" name="내용 개체 틀 2">
+                <a:extLst>
+                  <a:ext uri="{FF2B5EF4-FFF2-40B4-BE49-F238E27FC236}">
+                    <a16:creationId xmlns:a16="http://schemas.microsoft.com/office/drawing/2014/main" id="{5E4B6386-C7DA-5C57-35A3-A030186832D6}"/>
+                  </a:ext>
+                </a:extLst>
+              </p:cNvPr>
+              <p:cNvSpPr>
+                <a:spLocks noGrp="1" noRot="1" noChangeAspect="1" noMove="1" noResize="1" noEditPoints="1" noAdjustHandles="1" noChangeArrowheads="1" noChangeShapeType="1" noTextEdit="1"/>
+              </p:cNvSpPr>
+              <p:nvPr>
+                <p:ph idx="1"/>
+              </p:nvPr>
+            </p:nvSpPr>
+            <p:spPr>
+              <a:xfrm>
+                <a:off x="5259937" y="1056068"/>
+                <a:ext cx="3742394" cy="5280338"/>
+              </a:xfrm>
+              <a:blipFill>
+                <a:blip r:embed="rId3"/>
+                <a:stretch>
+                  <a:fillRect l="-1140" t="-577" r="-1303"/>
+                </a:stretch>
+              </a:blipFill>
+            </p:spPr>
+            <p:txBody>
+              <a:bodyPr/>
+              <a:lstStyle/>
+              <a:p>
+                <a:r>
+                  <a:rPr lang="ko-KR" altLang="en-US">
+                    <a:noFill/>
+                  </a:rPr>
+                  <a:t> </a:t>
+                </a:r>
+              </a:p>
+            </p:txBody>
+          </p:sp>
+        </mc:Fallback>
+      </mc:AlternateContent>
+      <p:pic>
+        <p:nvPicPr>
+          <p:cNvPr id="7" name="그림 6">
+            <a:extLst>
+              <a:ext uri="{FF2B5EF4-FFF2-40B4-BE49-F238E27FC236}">
+                <a16:creationId xmlns:a16="http://schemas.microsoft.com/office/drawing/2014/main" id="{1A3A8B72-38D2-1F16-B427-7C8D7CC1C154}"/>
+              </a:ext>
+            </a:extLst>
+          </p:cNvPr>
+          <p:cNvPicPr>
+            <a:picLocks noChangeAspect="1"/>
+          </p:cNvPicPr>
+          <p:nvPr/>
+        </p:nvPicPr>
+        <p:blipFill>
+          <a:blip r:embed="rId4"/>
+          <a:stretch>
+            <a:fillRect/>
+          </a:stretch>
+        </p:blipFill>
+        <p:spPr>
+          <a:xfrm>
+            <a:off x="38988" y="1535893"/>
+            <a:ext cx="5179319" cy="3981256"/>
+          </a:xfrm>
+          <a:prstGeom prst="rect">
+            <a:avLst/>
+          </a:prstGeom>
+        </p:spPr>
+      </p:pic>
+      <p:sp>
+        <p:nvSpPr>
+          <p:cNvPr id="8" name="TextBox 7">
+            <a:extLst>
+              <a:ext uri="{FF2B5EF4-FFF2-40B4-BE49-F238E27FC236}">
+                <a16:creationId xmlns:a16="http://schemas.microsoft.com/office/drawing/2014/main" id="{3C380630-CF83-76F2-CCD1-769DEF004DDA}"/>
+              </a:ext>
+            </a:extLst>
+          </p:cNvPr>
+          <p:cNvSpPr txBox="1"/>
+          <p:nvPr/>
+        </p:nvSpPr>
+        <p:spPr>
+          <a:xfrm>
+            <a:off x="1615388" y="5665200"/>
+            <a:ext cx="2026517" cy="369332"/>
+          </a:xfrm>
+          <a:prstGeom prst="rect">
+            <a:avLst/>
+          </a:prstGeom>
+          <a:noFill/>
+        </p:spPr>
+        <p:txBody>
+          <a:bodyPr wrap="none" rtlCol="0">
+            <a:spAutoFit/>
+          </a:bodyPr>
+          <a:lstStyle/>
+          <a:p>
+            <a:r>
+              <a:rPr lang="en-US" altLang="ko-KR" dirty="0"/>
+              <a:t>100</a:t>
+            </a:r>
+            <a:r>
+              <a:rPr lang="ko-KR" altLang="en-US" dirty="0"/>
+              <a:t>회 반복의 평균</a:t>
+            </a:r>
+          </a:p>
+        </p:txBody>
+      </p:sp>
+    </p:spTree>
+    <p:extLst>
+      <p:ext uri="{BB962C8B-B14F-4D97-AF65-F5344CB8AC3E}">
+        <p14:creationId xmlns:p14="http://schemas.microsoft.com/office/powerpoint/2010/main" val="628235242"/>
       </p:ext>
     </p:extLst>
   </p:cSld>
@@ -7841,8 +8777,8 @@
           </a:p>
         </p:txBody>
       </p:sp>
-      <mc:AlternateContent xmlns:mc="http://schemas.openxmlformats.org/markup-compatibility/2006">
-        <mc:Choice xmlns:a14="http://schemas.microsoft.com/office/drawing/2010/main" Requires="a14">
+      <mc:AlternateContent xmlns:mc="http://schemas.openxmlformats.org/markup-compatibility/2006" xmlns:a14="http://schemas.microsoft.com/office/drawing/2010/main">
+        <mc:Choice Requires="a14">
           <p:sp>
             <p:nvSpPr>
               <p:cNvPr id="3" name="내용 개체 틀 2">
@@ -8074,14 +9010,7 @@
                             <a:latin typeface="Cambria Math" panose="02040503050406030204" pitchFamily="18" charset="0"/>
                             <a:ea typeface="Cambria Math" panose="02040503050406030204" pitchFamily="18" charset="0"/>
                           </a:rPr>
-                          <m:t>×</m:t>
-                        </m:r>
-                        <m:r>
-                          <a:rPr lang="en-US" altLang="ko-KR" sz="1800" i="1">
-                            <a:latin typeface="Cambria Math" panose="02040503050406030204" pitchFamily="18" charset="0"/>
-                            <a:ea typeface="Cambria Math" panose="02040503050406030204" pitchFamily="18" charset="0"/>
-                          </a:rPr>
-                          <m:t>0.1</m:t>
+                          <m:t>×0.1</m:t>
                         </m:r>
                         <m:r>
                           <a:rPr lang="en-US" altLang="ko-KR" sz="1800" b="0" i="1" smtClean="0">
@@ -8128,14 +9057,7 @@
                             <a:latin typeface="Cambria Math" panose="02040503050406030204" pitchFamily="18" charset="0"/>
                             <a:ea typeface="Cambria Math" panose="02040503050406030204" pitchFamily="18" charset="0"/>
                           </a:rPr>
-                          <m:t>×</m:t>
-                        </m:r>
-                        <m:r>
-                          <a:rPr lang="en-US" altLang="ko-KR" sz="1800" i="1">
-                            <a:latin typeface="Cambria Math" panose="02040503050406030204" pitchFamily="18" charset="0"/>
-                            <a:ea typeface="Cambria Math" panose="02040503050406030204" pitchFamily="18" charset="0"/>
-                          </a:rPr>
-                          <m:t>0.</m:t>
+                          <m:t>×0.</m:t>
                         </m:r>
                         <m:r>
                           <a:rPr lang="en-US" altLang="ko-KR" sz="1800" b="0" i="1" smtClean="0">
@@ -8254,21 +9176,7 @@
                             <a:latin typeface="Cambria Math" panose="02040503050406030204" pitchFamily="18" charset="0"/>
                             <a:ea typeface="Cambria Math" panose="02040503050406030204" pitchFamily="18" charset="0"/>
                           </a:rPr>
-                          <m:t>1</m:t>
-                        </m:r>
-                        <m:r>
-                          <a:rPr lang="en-US" altLang="ko-KR" sz="1800" i="1">
-                            <a:latin typeface="Cambria Math" panose="02040503050406030204" pitchFamily="18" charset="0"/>
-                            <a:ea typeface="Cambria Math" panose="02040503050406030204" pitchFamily="18" charset="0"/>
-                          </a:rPr>
-                          <m:t>×</m:t>
-                        </m:r>
-                        <m:r>
-                          <a:rPr lang="en-US" altLang="ko-KR" sz="1800" i="1">
-                            <a:latin typeface="Cambria Math" panose="02040503050406030204" pitchFamily="18" charset="0"/>
-                            <a:ea typeface="Cambria Math" panose="02040503050406030204" pitchFamily="18" charset="0"/>
-                          </a:rPr>
-                          <m:t>0.</m:t>
+                          <m:t>1×0.</m:t>
                         </m:r>
                         <m:r>
                           <a:rPr lang="en-US" altLang="ko-KR" sz="1800" b="0" i="1" smtClean="0">
@@ -8301,14 +9209,7 @@
                             <a:latin typeface="Cambria Math" panose="02040503050406030204" pitchFamily="18" charset="0"/>
                             <a:ea typeface="Cambria Math" panose="02040503050406030204" pitchFamily="18" charset="0"/>
                           </a:rPr>
-                          <m:t>5</m:t>
-                        </m:r>
-                        <m:r>
-                          <a:rPr lang="en-US" altLang="ko-KR" sz="1800" i="1">
-                            <a:latin typeface="Cambria Math" panose="02040503050406030204" pitchFamily="18" charset="0"/>
-                            <a:ea typeface="Cambria Math" panose="02040503050406030204" pitchFamily="18" charset="0"/>
-                          </a:rPr>
-                          <m:t>×0.</m:t>
+                          <m:t>5×0.</m:t>
                         </m:r>
                         <m:r>
                           <a:rPr lang="en-US" altLang="ko-KR" sz="1800" b="0" i="1" smtClean="0">
@@ -8341,21 +9242,7 @@
                             <a:latin typeface="Cambria Math" panose="02040503050406030204" pitchFamily="18" charset="0"/>
                             <a:ea typeface="Cambria Math" panose="02040503050406030204" pitchFamily="18" charset="0"/>
                           </a:rPr>
-                          <m:t>1</m:t>
-                        </m:r>
-                        <m:r>
-                          <a:rPr lang="en-US" altLang="ko-KR" sz="1800" i="1">
-                            <a:latin typeface="Cambria Math" panose="02040503050406030204" pitchFamily="18" charset="0"/>
-                            <a:ea typeface="Cambria Math" panose="02040503050406030204" pitchFamily="18" charset="0"/>
-                          </a:rPr>
-                          <m:t>0</m:t>
-                        </m:r>
-                        <m:r>
-                          <a:rPr lang="en-US" altLang="ko-KR" sz="1800" i="1">
-                            <a:latin typeface="Cambria Math" panose="02040503050406030204" pitchFamily="18" charset="0"/>
-                            <a:ea typeface="Cambria Math" panose="02040503050406030204" pitchFamily="18" charset="0"/>
-                          </a:rPr>
-                          <m:t>×0.</m:t>
+                          <m:t>10×0.</m:t>
                         </m:r>
                         <m:r>
                           <a:rPr lang="en-US" altLang="ko-KR" sz="1800" b="0" i="1" smtClean="0">
@@ -8409,7 +9296,7 @@
             </p:txBody>
           </p:sp>
         </mc:Choice>
-        <mc:Fallback>
+        <mc:Fallback xmlns="">
           <p:sp>
             <p:nvSpPr>
               <p:cNvPr id="3" name="내용 개체 틀 2">
@@ -8543,8 +9430,8 @@
           </a:p>
         </p:txBody>
       </p:sp>
-      <mc:AlternateContent xmlns:mc="http://schemas.openxmlformats.org/markup-compatibility/2006">
-        <mc:Choice xmlns:a14="http://schemas.microsoft.com/office/drawing/2010/main" Requires="a14">
+      <mc:AlternateContent xmlns:mc="http://schemas.openxmlformats.org/markup-compatibility/2006" xmlns:a14="http://schemas.microsoft.com/office/drawing/2010/main">
+        <mc:Choice Requires="a14">
           <p:sp>
             <p:nvSpPr>
               <p:cNvPr id="3" name="내용 개체 틀 2">
@@ -8909,7 +9796,7 @@
             </p:txBody>
           </p:sp>
         </mc:Choice>
-        <mc:Fallback>
+        <mc:Fallback xmlns="">
           <p:sp>
             <p:nvSpPr>
               <p:cNvPr id="3" name="내용 개체 틀 2">
@@ -9221,8 +10108,8 @@
           </a:p>
         </p:txBody>
       </p:sp>
-      <mc:AlternateContent xmlns:mc="http://schemas.openxmlformats.org/markup-compatibility/2006">
-        <mc:Choice xmlns:a14="http://schemas.microsoft.com/office/drawing/2010/main" Requires="a14">
+      <mc:AlternateContent xmlns:mc="http://schemas.openxmlformats.org/markup-compatibility/2006" xmlns:a14="http://schemas.microsoft.com/office/drawing/2010/main">
+        <mc:Choice Requires="a14">
           <p:sp>
             <p:nvSpPr>
               <p:cNvPr id="3" name="내용 개체 틀 2">
@@ -9424,19 +10311,7 @@
                       <a:rPr lang="ko-KR" altLang="en-US" i="1" dirty="0">
                         <a:latin typeface="Cambria Math" panose="02040503050406030204" pitchFamily="18" charset="0"/>
                       </a:rPr>
-                      <m:t>추</m:t>
-                    </m:r>
-                    <m:r>
-                      <a:rPr lang="ko-KR" altLang="en-US" i="1" dirty="0">
-                        <a:latin typeface="Cambria Math" panose="02040503050406030204" pitchFamily="18" charset="0"/>
-                      </a:rPr>
-                      <m:t>정</m:t>
-                    </m:r>
-                    <m:r>
-                      <a:rPr lang="ko-KR" altLang="en-US" i="1" dirty="0">
-                        <a:latin typeface="Cambria Math" panose="02040503050406030204" pitchFamily="18" charset="0"/>
-                      </a:rPr>
-                      <m:t>치</m:t>
+                      <m:t>추정치</m:t>
                     </m:r>
                     <m:r>
                       <a:rPr lang="en-US" altLang="ko-KR" dirty="0">
@@ -9631,7 +10506,7 @@
             </p:txBody>
           </p:sp>
         </mc:Choice>
-        <mc:Fallback>
+        <mc:Fallback xmlns="">
           <p:sp>
             <p:nvSpPr>
               <p:cNvPr id="3" name="내용 개체 틀 2">
@@ -9769,8 +10644,8 @@
           </a:p>
         </p:txBody>
       </p:sp>
-      <mc:AlternateContent xmlns:mc="http://schemas.openxmlformats.org/markup-compatibility/2006">
-        <mc:Choice xmlns:a14="http://schemas.microsoft.com/office/drawing/2010/main" Requires="a14">
+      <mc:AlternateContent xmlns:mc="http://schemas.openxmlformats.org/markup-compatibility/2006" xmlns:a14="http://schemas.microsoft.com/office/drawing/2010/main">
+        <mc:Choice Requires="a14">
           <p:sp>
             <p:nvSpPr>
               <p:cNvPr id="3" name="내용 개체 틀 2">
@@ -9871,7 +10746,7 @@
             </p:txBody>
           </p:sp>
         </mc:Choice>
-        <mc:Fallback>
+        <mc:Fallback xmlns="">
           <p:sp>
             <p:nvSpPr>
               <p:cNvPr id="3" name="내용 개체 틀 2">
@@ -9911,8 +10786,8 @@
           </p:sp>
         </mc:Fallback>
       </mc:AlternateContent>
-      <mc:AlternateContent xmlns:mc="http://schemas.openxmlformats.org/markup-compatibility/2006">
-        <mc:Choice xmlns:a14="http://schemas.microsoft.com/office/drawing/2010/main" Requires="a14">
+      <mc:AlternateContent xmlns:mc="http://schemas.openxmlformats.org/markup-compatibility/2006" xmlns:a14="http://schemas.microsoft.com/office/drawing/2010/main">
+        <mc:Choice Requires="a14">
           <p:sp>
             <p:nvSpPr>
               <p:cNvPr id="5" name="TextBox 4">
@@ -10099,7 +10974,7 @@
             </p:txBody>
           </p:sp>
         </mc:Choice>
-        <mc:Fallback>
+        <mc:Fallback xmlns="">
           <p:sp>
             <p:nvSpPr>
               <p:cNvPr id="5" name="TextBox 4">
@@ -10236,8 +11111,8 @@
           </a:p>
         </p:txBody>
       </p:sp>
-      <mc:AlternateContent xmlns:mc="http://schemas.openxmlformats.org/markup-compatibility/2006">
-        <mc:Choice xmlns:a14="http://schemas.microsoft.com/office/drawing/2010/main" Requires="a14">
+      <mc:AlternateContent xmlns:mc="http://schemas.openxmlformats.org/markup-compatibility/2006" xmlns:a14="http://schemas.microsoft.com/office/drawing/2010/main">
+        <mc:Choice Requires="a14">
           <p:sp>
             <p:nvSpPr>
               <p:cNvPr id="11" name="TextBox 10">
@@ -10266,7 +11141,6 @@
               </a:bodyPr>
               <a:lstStyle/>
               <a:p>
-                <a:pPr/>
                 <a14:m>
                   <m:oMath xmlns:m="http://schemas.openxmlformats.org/officeDocument/2006/math">
                     <m:sSub>
@@ -10312,7 +11186,7 @@
             </p:txBody>
           </p:sp>
         </mc:Choice>
-        <mc:Fallback>
+        <mc:Fallback xmlns="">
           <p:sp>
             <p:nvSpPr>
               <p:cNvPr id="11" name="TextBox 10">

--- a/slides/강화학습_ch1_벤디트문제.pptx
+++ b/slides/강화학습_ch1_벤디트문제.pptx
@@ -5,7 +5,7 @@
     <p:sldMasterId id="2147483660" r:id="rId1"/>
   </p:sldMasterIdLst>
   <p:notesMasterIdLst>
-    <p:notesMasterId r:id="rId20"/>
+    <p:notesMasterId r:id="rId28"/>
   </p:notesMasterIdLst>
   <p:sldIdLst>
     <p:sldId id="256" r:id="rId2"/>
@@ -26,6 +26,14 @@
     <p:sldId id="273" r:id="rId17"/>
     <p:sldId id="274" r:id="rId18"/>
     <p:sldId id="275" r:id="rId19"/>
+    <p:sldId id="276" r:id="rId20"/>
+    <p:sldId id="277" r:id="rId21"/>
+    <p:sldId id="278" r:id="rId22"/>
+    <p:sldId id="279" r:id="rId23"/>
+    <p:sldId id="280" r:id="rId24"/>
+    <p:sldId id="281" r:id="rId25"/>
+    <p:sldId id="282" r:id="rId26"/>
+    <p:sldId id="283" r:id="rId27"/>
   </p:sldIdLst>
   <p:sldSz cx="9144000" cy="6858000" type="screen4x3"/>
   <p:notesSz cx="6797675" cy="9928225"/>
@@ -214,7 +222,7 @@
           <a:p>
             <a:fld id="{A6504E4A-07F7-4F02-B3E2-C3B5C1401BF2}" type="datetimeFigureOut">
               <a:rPr lang="ko-KR" altLang="en-US" smtClean="0"/>
-              <a:t>2026-07-02</a:t>
+              <a:t>2026-08-31</a:t>
             </a:fld>
             <a:endParaRPr lang="ko-KR" altLang="en-US"/>
           </a:p>
@@ -565,6 +573,201 @@
 </p:notes>
 </file>
 
+<file path=ppt/notesSlides/notesSlide2.xml><?xml version="1.0" encoding="utf-8"?>
+<p:notes xmlns:a="http://schemas.openxmlformats.org/drawingml/2006/main" xmlns:r="http://schemas.openxmlformats.org/officeDocument/2006/relationships" xmlns:p="http://schemas.openxmlformats.org/presentationml/2006/main">
+  <p:cSld>
+    <p:spTree>
+      <p:nvGrpSpPr>
+        <p:cNvPr id="1" name=""/>
+        <p:cNvGrpSpPr/>
+        <p:nvPr/>
+      </p:nvGrpSpPr>
+      <p:grpSpPr>
+        <a:xfrm>
+          <a:off x="0" y="0"/>
+          <a:ext cx="0" cy="0"/>
+          <a:chOff x="0" y="0"/>
+          <a:chExt cx="0" cy="0"/>
+        </a:xfrm>
+      </p:grpSpPr>
+      <p:sp>
+        <p:nvSpPr>
+          <p:cNvPr id="2" name="슬라이드 이미지 개체 틀 1"/>
+          <p:cNvSpPr>
+            <a:spLocks noGrp="1" noRot="1" noChangeAspect="1"/>
+          </p:cNvSpPr>
+          <p:nvPr>
+            <p:ph type="sldImg"/>
+          </p:nvPr>
+        </p:nvSpPr>
+        <p:spPr/>
+      </p:sp>
+      <p:sp>
+        <p:nvSpPr>
+          <p:cNvPr id="3" name="슬라이드 노트 개체 틀 2"/>
+          <p:cNvSpPr>
+            <a:spLocks noGrp="1"/>
+          </p:cNvSpPr>
+          <p:nvPr>
+            <p:ph type="body" idx="1"/>
+          </p:nvPr>
+        </p:nvSpPr>
+        <p:spPr/>
+        <p:txBody>
+          <a:bodyPr/>
+          <a:lstStyle/>
+          <a:p>
+            <a:r>
+              <a:rPr lang="ko-KR" altLang="en-US" dirty="0"/>
+              <a:t>지도학습과의 차이</a:t>
+            </a:r>
+            <a:r>
+              <a:rPr lang="en-US" altLang="ko-KR" dirty="0"/>
+              <a:t>?</a:t>
+            </a:r>
+            <a:endParaRPr lang="ko-KR" altLang="en-US" dirty="0"/>
+          </a:p>
+        </p:txBody>
+      </p:sp>
+      <p:sp>
+        <p:nvSpPr>
+          <p:cNvPr id="4" name="슬라이드 번호 개체 틀 3"/>
+          <p:cNvSpPr>
+            <a:spLocks noGrp="1"/>
+          </p:cNvSpPr>
+          <p:nvPr>
+            <p:ph type="sldNum" sz="quarter" idx="5"/>
+          </p:nvPr>
+        </p:nvSpPr>
+        <p:spPr/>
+        <p:txBody>
+          <a:bodyPr/>
+          <a:lstStyle/>
+          <a:p>
+            <a:fld id="{06BA09A4-BA45-48FF-8C1A-293E531665F8}" type="slidenum">
+              <a:rPr lang="ko-KR" altLang="en-US" smtClean="0"/>
+              <a:t>7</a:t>
+            </a:fld>
+            <a:endParaRPr lang="ko-KR" altLang="en-US"/>
+          </a:p>
+        </p:txBody>
+      </p:sp>
+    </p:spTree>
+    <p:extLst>
+      <p:ext uri="{BB962C8B-B14F-4D97-AF65-F5344CB8AC3E}">
+        <p14:creationId xmlns:p14="http://schemas.microsoft.com/office/powerpoint/2010/main" val="3776312750"/>
+      </p:ext>
+    </p:extLst>
+  </p:cSld>
+  <p:clrMapOvr>
+    <a:masterClrMapping/>
+  </p:clrMapOvr>
+</p:notes>
+</file>
+
+<file path=ppt/notesSlides/notesSlide3.xml><?xml version="1.0" encoding="utf-8"?>
+<p:notes xmlns:a="http://schemas.openxmlformats.org/drawingml/2006/main" xmlns:r="http://schemas.openxmlformats.org/officeDocument/2006/relationships" xmlns:p="http://schemas.openxmlformats.org/presentationml/2006/main">
+  <p:cSld>
+    <p:spTree>
+      <p:nvGrpSpPr>
+        <p:cNvPr id="1" name=""/>
+        <p:cNvGrpSpPr/>
+        <p:nvPr/>
+      </p:nvGrpSpPr>
+      <p:grpSpPr>
+        <a:xfrm>
+          <a:off x="0" y="0"/>
+          <a:ext cx="0" cy="0"/>
+          <a:chOff x="0" y="0"/>
+          <a:chExt cx="0" cy="0"/>
+        </a:xfrm>
+      </p:grpSpPr>
+      <p:sp>
+        <p:nvSpPr>
+          <p:cNvPr id="2" name="슬라이드 이미지 개체 틀 1"/>
+          <p:cNvSpPr>
+            <a:spLocks noGrp="1" noRot="1" noChangeAspect="1"/>
+          </p:cNvSpPr>
+          <p:nvPr>
+            <p:ph type="sldImg"/>
+          </p:nvPr>
+        </p:nvSpPr>
+        <p:spPr/>
+      </p:sp>
+      <p:sp>
+        <p:nvSpPr>
+          <p:cNvPr id="3" name="슬라이드 노트 개체 틀 2"/>
+          <p:cNvSpPr>
+            <a:spLocks noGrp="1"/>
+          </p:cNvSpPr>
+          <p:nvPr>
+            <p:ph type="body" idx="1"/>
+          </p:nvPr>
+        </p:nvSpPr>
+        <p:spPr/>
+        <p:txBody>
+          <a:bodyPr/>
+          <a:lstStyle/>
+          <a:p>
+            <a:r>
+              <a:rPr lang="ko-KR" altLang="en-US" dirty="0"/>
+              <a:t>첫 번째 플레이만 했을 때는 </a:t>
+            </a:r>
+            <a:r>
+              <a:rPr lang="en-US" altLang="ko-KR" dirty="0"/>
+              <a:t>b</a:t>
+            </a:r>
+            <a:r>
+              <a:rPr lang="ko-KR" altLang="en-US" dirty="0"/>
+              <a:t>가</a:t>
+            </a:r>
+            <a:r>
+              <a:rPr lang="en-US" altLang="ko-KR" dirty="0"/>
+              <a:t> </a:t>
+            </a:r>
+            <a:r>
+              <a:rPr lang="ko-KR" altLang="en-US" dirty="0"/>
+              <a:t>더 좋을 것이라고 추정</a:t>
+            </a:r>
+          </a:p>
+        </p:txBody>
+      </p:sp>
+      <p:sp>
+        <p:nvSpPr>
+          <p:cNvPr id="4" name="슬라이드 번호 개체 틀 3"/>
+          <p:cNvSpPr>
+            <a:spLocks noGrp="1"/>
+          </p:cNvSpPr>
+          <p:nvPr>
+            <p:ph type="sldNum" sz="quarter" idx="5"/>
+          </p:nvPr>
+        </p:nvSpPr>
+        <p:spPr/>
+        <p:txBody>
+          <a:bodyPr/>
+          <a:lstStyle/>
+          <a:p>
+            <a:fld id="{06BA09A4-BA45-48FF-8C1A-293E531665F8}" type="slidenum">
+              <a:rPr lang="ko-KR" altLang="en-US" smtClean="0"/>
+              <a:t>8</a:t>
+            </a:fld>
+            <a:endParaRPr lang="ko-KR" altLang="en-US"/>
+          </a:p>
+        </p:txBody>
+      </p:sp>
+    </p:spTree>
+    <p:extLst>
+      <p:ext uri="{BB962C8B-B14F-4D97-AF65-F5344CB8AC3E}">
+        <p14:creationId xmlns:p14="http://schemas.microsoft.com/office/powerpoint/2010/main" val="2811461064"/>
+      </p:ext>
+    </p:extLst>
+  </p:cSld>
+  <p:clrMapOvr>
+    <a:masterClrMapping/>
+  </p:clrMapOvr>
+</p:notes>
+</file>
+
 <file path=ppt/slideLayouts/slideLayout1.xml><?xml version="1.0" encoding="utf-8"?>
 <p:sldLayout xmlns:a="http://schemas.openxmlformats.org/drawingml/2006/main" xmlns:r="http://schemas.openxmlformats.org/officeDocument/2006/relationships" xmlns:p="http://schemas.openxmlformats.org/presentationml/2006/main" type="title" preserve="1">
   <p:cSld name="제목 슬라이드">
@@ -700,9 +903,9 @@
           <a:bodyPr/>
           <a:lstStyle/>
           <a:p>
-            <a:fld id="{B5CCC200-B011-41AA-8609-A1BE0DC489D1}" type="datetime1">
+            <a:fld id="{6FFC52B8-7F35-474C-84E9-53F8FF3197BA}" type="datetime1">
               <a:rPr lang="ko-KR" altLang="en-US" smtClean="0"/>
-              <a:t>2026-07-02</a:t>
+              <a:t>2026-08-31</a:t>
             </a:fld>
             <a:endParaRPr lang="ko-KR" altLang="en-US"/>
           </a:p>
@@ -870,9 +1073,9 @@
           <a:bodyPr/>
           <a:lstStyle/>
           <a:p>
-            <a:fld id="{70533AB8-7B4B-4A83-AC2D-18EB2EAEBAEA}" type="datetime1">
+            <a:fld id="{16CD45D1-34F0-40BF-8F53-7948A1A188B7}" type="datetime1">
               <a:rPr lang="ko-KR" altLang="en-US" smtClean="0"/>
-              <a:t>2026-07-02</a:t>
+              <a:t>2026-08-31</a:t>
             </a:fld>
             <a:endParaRPr lang="ko-KR" altLang="en-US"/>
           </a:p>
@@ -1050,9 +1253,9 @@
           <a:bodyPr/>
           <a:lstStyle/>
           <a:p>
-            <a:fld id="{D1414FA1-1AC8-464F-A480-C32AB9B6D9F7}" type="datetime1">
+            <a:fld id="{EEF72575-9C60-45F5-B34E-AC321E4EFEC1}" type="datetime1">
               <a:rPr lang="ko-KR" altLang="en-US" smtClean="0"/>
-              <a:t>2026-07-02</a:t>
+              <a:t>2026-08-31</a:t>
             </a:fld>
             <a:endParaRPr lang="ko-KR" altLang="en-US"/>
           </a:p>
@@ -1290,9 +1493,9 @@
             </a:lvl1pPr>
           </a:lstStyle>
           <a:p>
-            <a:fld id="{9A0CFC9C-E75B-4167-B19D-C5A0B621165E}" type="datetime1">
+            <a:fld id="{2F814AE1-3117-4EE0-A069-AF58D79E97B0}" type="datetime1">
               <a:rPr lang="ko-KR" altLang="en-US" smtClean="0"/>
-              <a:t>2026-07-02</a:t>
+              <a:t>2026-08-31</a:t>
             </a:fld>
             <a:endParaRPr lang="en-US" altLang="ko-KR"/>
           </a:p>
@@ -1550,9 +1753,9 @@
             </a:lvl1pPr>
           </a:lstStyle>
           <a:p>
-            <a:fld id="{13A7C3BF-458C-486B-8804-42E7E044747B}" type="datetime1">
+            <a:fld id="{4841A3A7-1844-4861-8A25-948A63554618}" type="datetime1">
               <a:rPr lang="ko-KR" altLang="en-US" smtClean="0"/>
-              <a:t>2026-07-02</a:t>
+              <a:t>2026-08-31</a:t>
             </a:fld>
             <a:endParaRPr lang="en-US" altLang="ko-KR"/>
           </a:p>
@@ -1779,9 +1982,9 @@
             </a:lvl1pPr>
           </a:lstStyle>
           <a:p>
-            <a:fld id="{BC05BF06-6246-4B11-913D-5CE98FB3E67E}" type="datetime1">
+            <a:fld id="{5F7E93FD-76F7-4014-9EF6-7780B36380F8}" type="datetime1">
               <a:rPr lang="ko-KR" altLang="en-US" smtClean="0"/>
-              <a:t>2026-07-02</a:t>
+              <a:t>2026-08-31</a:t>
             </a:fld>
             <a:endParaRPr lang="en-US" altLang="ko-KR"/>
           </a:p>
@@ -2039,9 +2242,9 @@
             </a:lvl1pPr>
           </a:lstStyle>
           <a:p>
-            <a:fld id="{74251AAC-9B5B-4BD2-A98C-397B8326CAB5}" type="datetime1">
+            <a:fld id="{7363D1D4-B057-4AAA-9672-CCE53A692238}" type="datetime1">
               <a:rPr lang="ko-KR" altLang="en-US" smtClean="0"/>
-              <a:t>2026-07-02</a:t>
+              <a:t>2026-08-31</a:t>
             </a:fld>
             <a:endParaRPr lang="en-US" altLang="ko-KR"/>
           </a:p>
@@ -2282,9 +2485,9 @@
           <a:bodyPr/>
           <a:lstStyle/>
           <a:p>
-            <a:fld id="{3E2E4D9B-1EBE-44A6-8992-2EC634462286}" type="datetime1">
+            <a:fld id="{1A785F0D-20DD-4273-B9CA-041260E6C442}" type="datetime1">
               <a:rPr lang="ko-KR" altLang="en-US" smtClean="0"/>
-              <a:t>2026-07-02</a:t>
+              <a:t>2026-08-31</a:t>
             </a:fld>
             <a:endParaRPr lang="ko-KR" altLang="en-US"/>
           </a:p>
@@ -2310,6 +2513,40 @@
           <a:bodyPr/>
           <a:lstStyle/>
           <a:p>
+            <a:endParaRPr lang="ko-KR" altLang="en-US"/>
+          </a:p>
+        </p:txBody>
+      </p:sp>
+      <p:sp>
+        <p:nvSpPr>
+          <p:cNvPr id="6" name="Slide Number Placeholder 5">
+            <a:extLst>
+              <a:ext uri="{FF2B5EF4-FFF2-40B4-BE49-F238E27FC236}">
+                <a16:creationId xmlns:a16="http://schemas.microsoft.com/office/drawing/2014/main" id="{C4E96739-B45B-5233-56A7-143CB0102063}"/>
+              </a:ext>
+            </a:extLst>
+          </p:cNvPr>
+          <p:cNvSpPr>
+            <a:spLocks noGrp="1"/>
+          </p:cNvSpPr>
+          <p:nvPr>
+            <p:ph type="sldNum" sz="quarter" idx="12"/>
+          </p:nvPr>
+        </p:nvSpPr>
+        <p:spPr>
+          <a:xfrm>
+            <a:off x="6944930" y="6446503"/>
+            <a:ext cx="2057400" cy="365125"/>
+          </a:xfrm>
+        </p:spPr>
+        <p:txBody>
+          <a:bodyPr/>
+          <a:lstStyle/>
+          <a:p>
+            <a:fld id="{B4844BEB-34CB-469D-8313-83BA6B52212E}" type="slidenum">
+              <a:rPr lang="ko-KR" altLang="en-US" smtClean="0"/>
+              <a:t>‹#›</a:t>
+            </a:fld>
             <a:endParaRPr lang="ko-KR" altLang="en-US"/>
           </a:p>
         </p:txBody>
@@ -2508,9 +2745,9 @@
           <a:bodyPr/>
           <a:lstStyle/>
           <a:p>
-            <a:fld id="{00DE3D2B-089C-4252-874C-854C5B64B5CF}" type="datetime1">
+            <a:fld id="{1012B87E-A7EF-4ACA-9BDB-5D9094BF3EFF}" type="datetime1">
               <a:rPr lang="ko-KR" altLang="en-US" smtClean="0"/>
-              <a:t>2026-07-02</a:t>
+              <a:t>2026-08-31</a:t>
             </a:fld>
             <a:endParaRPr lang="ko-KR" altLang="en-US"/>
           </a:p>
@@ -2740,9 +2977,9 @@
           <a:bodyPr/>
           <a:lstStyle/>
           <a:p>
-            <a:fld id="{E3A7D4F9-217A-4FDE-AD58-802607839E65}" type="datetime1">
+            <a:fld id="{680A5EAE-8CF8-47D1-8180-E1B5000A314B}" type="datetime1">
               <a:rPr lang="ko-KR" altLang="en-US" smtClean="0"/>
-              <a:t>2026-07-02</a:t>
+              <a:t>2026-08-31</a:t>
             </a:fld>
             <a:endParaRPr lang="ko-KR" altLang="en-US"/>
           </a:p>
@@ -3107,9 +3344,9 @@
           <a:bodyPr/>
           <a:lstStyle/>
           <a:p>
-            <a:fld id="{A96F6215-B618-4E68-93B7-F5656B0437FE}" type="datetime1">
+            <a:fld id="{CD8F8A37-152F-4C96-9DE6-4708DE41A156}" type="datetime1">
               <a:rPr lang="ko-KR" altLang="en-US" smtClean="0"/>
-              <a:t>2026-07-02</a:t>
+              <a:t>2026-08-31</a:t>
             </a:fld>
             <a:endParaRPr lang="ko-KR" altLang="en-US"/>
           </a:p>
@@ -3225,9 +3462,9 @@
           <a:bodyPr/>
           <a:lstStyle/>
           <a:p>
-            <a:fld id="{F0340499-000A-4C22-9173-0D5E83708981}" type="datetime1">
+            <a:fld id="{E2941E15-0549-493B-9DD1-CC25D7B85CDA}" type="datetime1">
               <a:rPr lang="ko-KR" altLang="en-US" smtClean="0"/>
-              <a:t>2026-07-02</a:t>
+              <a:t>2026-08-31</a:t>
             </a:fld>
             <a:endParaRPr lang="ko-KR" altLang="en-US"/>
           </a:p>
@@ -3320,9 +3557,9 @@
           <a:bodyPr/>
           <a:lstStyle/>
           <a:p>
-            <a:fld id="{75080874-9225-4E21-AFFA-846381F6A863}" type="datetime1">
+            <a:fld id="{7F61D7B3-1556-4E73-A55D-61EE568CD906}" type="datetime1">
               <a:rPr lang="ko-KR" altLang="en-US" smtClean="0"/>
-              <a:t>2026-07-02</a:t>
+              <a:t>2026-08-31</a:t>
             </a:fld>
             <a:endParaRPr lang="ko-KR" altLang="en-US"/>
           </a:p>
@@ -3597,9 +3834,9 @@
           <a:bodyPr/>
           <a:lstStyle/>
           <a:p>
-            <a:fld id="{4F956FD5-9875-4123-989D-C96BD5584C93}" type="datetime1">
+            <a:fld id="{DFA10A5E-E5EA-48C2-B8E9-7C3EB5E6F552}" type="datetime1">
               <a:rPr lang="ko-KR" altLang="en-US" smtClean="0"/>
-              <a:t>2026-07-02</a:t>
+              <a:t>2026-08-31</a:t>
             </a:fld>
             <a:endParaRPr lang="ko-KR" altLang="en-US"/>
           </a:p>
@@ -3854,9 +4091,9 @@
           <a:bodyPr/>
           <a:lstStyle/>
           <a:p>
-            <a:fld id="{624C6549-AC26-4CBD-A75A-4E70E46C8017}" type="datetime1">
+            <a:fld id="{69C2F73C-E35C-485D-8DBB-9E618EDD052C}" type="datetime1">
               <a:rPr lang="ko-KR" altLang="en-US" smtClean="0"/>
-              <a:t>2026-07-02</a:t>
+              <a:t>2026-08-31</a:t>
             </a:fld>
             <a:endParaRPr lang="ko-KR" altLang="en-US"/>
           </a:p>
@@ -4067,9 +4304,9 @@
             </a:lvl1pPr>
           </a:lstStyle>
           <a:p>
-            <a:fld id="{112CA087-878C-4D54-9921-D4B1B159EE37}" type="datetime1">
+            <a:fld id="{71F3065C-782C-4112-9CED-1FE7AAC3A4D5}" type="datetime1">
               <a:rPr lang="ko-KR" altLang="en-US" smtClean="0"/>
-              <a:t>2026-07-02</a:t>
+              <a:t>2026-08-31</a:t>
             </a:fld>
             <a:endParaRPr lang="ko-KR" altLang="en-US"/>
           </a:p>
@@ -4723,7 +4960,7 @@
                     <m:sSub>
                       <m:sSubPr>
                         <m:ctrlPr>
-                          <a:rPr lang="ko-KR" altLang="en-US" sz="2000" i="1" smtClean="0">
+                          <a:rPr lang="en-US" altLang="ko-KR" sz="2000" b="0" i="1" smtClean="0">
                             <a:latin typeface="Cambria Math" panose="02040503050406030204" pitchFamily="18" charset="0"/>
                           </a:rPr>
                         </m:ctrlPr>
@@ -4756,7 +4993,7 @@
                     <m:sSub>
                       <m:sSubPr>
                         <m:ctrlPr>
-                          <a:rPr lang="ko-KR" altLang="en-US" sz="2000" i="1">
+                          <a:rPr lang="en-US" altLang="ko-KR" sz="2000" i="1">
                             <a:latin typeface="Cambria Math" panose="02040503050406030204" pitchFamily="18" charset="0"/>
                           </a:rPr>
                         </m:ctrlPr>
@@ -4795,7 +5032,7 @@
                     <m:sSub>
                       <m:sSubPr>
                         <m:ctrlPr>
-                          <a:rPr lang="ko-KR" altLang="en-US" sz="2000" i="1">
+                          <a:rPr lang="en-US" altLang="ko-KR" sz="2000" i="1">
                             <a:latin typeface="Cambria Math" panose="02040503050406030204" pitchFamily="18" charset="0"/>
                           </a:rPr>
                         </m:ctrlPr>
@@ -4920,14 +5157,11 @@
                 <a:pPr/>
                 <a14:m>
                   <m:oMathPara xmlns:m="http://schemas.openxmlformats.org/officeDocument/2006/math">
-                    <m:oMathParaPr>
-                      <m:jc m:val="centerGroup"/>
-                    </m:oMathParaPr>
-                    <m:oMath xmlns:m="http://schemas.openxmlformats.org/officeDocument/2006/math">
+                    <m:oMath>
                       <m:sSub>
                         <m:sSubPr>
                           <m:ctrlPr>
-                            <a:rPr lang="en-US" altLang="ko-KR" i="1" smtClean="0">
+                            <a:rPr lang="en-US" altLang="ko-KR" b="0" i="1" smtClean="0">
                               <a:latin typeface="Cambria Math" panose="02040503050406030204" pitchFamily="18" charset="0"/>
                             </a:rPr>
                           </m:ctrlPr>
@@ -4964,7 +5198,7 @@
                       <m:f>
                         <m:fPr>
                           <m:ctrlPr>
-                            <a:rPr lang="ko-KR" altLang="en-US" i="1">
+                            <a:rPr lang="en-US" altLang="ko-KR" i="1" smtClean="0">
                               <a:latin typeface="Cambria Math" panose="02040503050406030204" pitchFamily="18" charset="0"/>
                             </a:rPr>
                           </m:ctrlPr>
@@ -4973,7 +5207,7 @@
                           <m:sSub>
                             <m:sSubPr>
                               <m:ctrlPr>
-                                <a:rPr lang="en-US" altLang="ko-KR" i="1" smtClean="0">
+                                <a:rPr lang="en-US" altLang="ko-KR" b="0" i="1" smtClean="0">
                                   <a:latin typeface="Cambria Math" panose="02040503050406030204" pitchFamily="18" charset="0"/>
                                 </a:rPr>
                               </m:ctrlPr>
@@ -5171,14 +5405,11 @@
                 <a:pPr/>
                 <a14:m>
                   <m:oMathPara xmlns:m="http://schemas.openxmlformats.org/officeDocument/2006/math">
-                    <m:oMathParaPr>
-                      <m:jc m:val="centerGroup"/>
-                    </m:oMathParaPr>
-                    <m:oMath xmlns:m="http://schemas.openxmlformats.org/officeDocument/2006/math">
+                    <m:oMath>
                       <m:sSub>
                         <m:sSubPr>
                           <m:ctrlPr>
-                            <a:rPr lang="en-US" altLang="ko-KR" i="1" smtClean="0">
+                            <a:rPr lang="en-US" altLang="ko-KR" i="1">
                               <a:latin typeface="Cambria Math" panose="02040503050406030204" pitchFamily="18" charset="0"/>
                             </a:rPr>
                           </m:ctrlPr>
@@ -5555,6 +5786,35 @@
           </a:p>
         </p:txBody>
       </p:sp>
+      <p:sp>
+        <p:nvSpPr>
+          <p:cNvPr id="6" name="슬라이드 번호 개체 틀 5">
+            <a:extLst>
+              <a:ext uri="{FF2B5EF4-FFF2-40B4-BE49-F238E27FC236}">
+                <a16:creationId xmlns:a16="http://schemas.microsoft.com/office/drawing/2014/main" id="{E0A1C705-5CDA-B88F-80E6-ABCC23C57EBE}"/>
+              </a:ext>
+            </a:extLst>
+          </p:cNvPr>
+          <p:cNvSpPr>
+            <a:spLocks noGrp="1"/>
+          </p:cNvSpPr>
+          <p:nvPr>
+            <p:ph type="sldNum" sz="quarter" idx="12"/>
+          </p:nvPr>
+        </p:nvSpPr>
+        <p:spPr/>
+        <p:txBody>
+          <a:bodyPr/>
+          <a:lstStyle/>
+          <a:p>
+            <a:fld id="{B4844BEB-34CB-469D-8313-83BA6B52212E}" type="slidenum">
+              <a:rPr lang="ko-KR" altLang="en-US" smtClean="0"/>
+              <a:t>10</a:t>
+            </a:fld>
+            <a:endParaRPr lang="ko-KR" altLang="en-US"/>
+          </a:p>
+        </p:txBody>
+      </p:sp>
     </p:spTree>
     <p:extLst>
       <p:ext uri="{BB962C8B-B14F-4D97-AF65-F5344CB8AC3E}">
@@ -5657,8 +5917,8 @@
           </a:p>
         </p:txBody>
       </p:sp>
-      <mc:AlternateContent xmlns:mc="http://schemas.openxmlformats.org/markup-compatibility/2006" xmlns:a14="http://schemas.microsoft.com/office/drawing/2010/main">
-        <mc:Choice Requires="a14">
+      <mc:AlternateContent xmlns:mc="http://schemas.openxmlformats.org/markup-compatibility/2006">
+        <mc:Choice xmlns:a14="http://schemas.microsoft.com/office/drawing/2010/main" Requires="a14">
           <p:sp>
             <p:nvSpPr>
               <p:cNvPr id="3" name="내용 개체 틀 2">
@@ -5677,13 +5937,13 @@
             </p:nvSpPr>
             <p:spPr>
               <a:xfrm>
-                <a:off x="3499503" y="1056068"/>
-                <a:ext cx="5502827" cy="1695678"/>
+                <a:off x="2735943" y="756940"/>
+                <a:ext cx="6266388" cy="1695678"/>
               </a:xfrm>
             </p:spPr>
             <p:txBody>
               <a:bodyPr>
-                <a:normAutofit fontScale="85000" lnSpcReduction="20000"/>
+                <a:noAutofit/>
               </a:bodyPr>
               <a:lstStyle/>
               <a:p>
@@ -5697,14 +5957,14 @@
                     <m:sSub>
                       <m:sSubPr>
                         <m:ctrlPr>
-                          <a:rPr lang="en-US" altLang="ko-KR" sz="1200" i="1" smtClean="0">
+                          <a:rPr lang="en-US" altLang="ko-KR" sz="1100" i="1">
                             <a:latin typeface="Cambria Math" panose="02040503050406030204" pitchFamily="18" charset="0"/>
                           </a:rPr>
                         </m:ctrlPr>
                       </m:sSubPr>
                       <m:e>
                         <m:r>
-                          <a:rPr lang="en-US" altLang="ko-KR" sz="1200" i="1">
+                          <a:rPr lang="en-US" altLang="ko-KR" sz="1100" i="1">
                             <a:latin typeface="Cambria Math" panose="02040503050406030204" pitchFamily="18" charset="0"/>
                           </a:rPr>
                           <m:t>𝑄</m:t>
@@ -5712,13 +5972,13 @@
                       </m:e>
                       <m:sub>
                         <m:r>
-                          <a:rPr lang="en-US" altLang="ko-KR" sz="1200" i="1">
+                          <a:rPr lang="en-US" altLang="ko-KR" sz="1100" i="1">
                             <a:latin typeface="Cambria Math" panose="02040503050406030204" pitchFamily="18" charset="0"/>
                           </a:rPr>
                           <m:t>𝑛</m:t>
                         </m:r>
                         <m:r>
-                          <a:rPr lang="en-US" altLang="ko-KR" sz="1200" i="1">
+                          <a:rPr lang="en-US" altLang="ko-KR" sz="1100" i="1">
                             <a:latin typeface="Cambria Math" panose="02040503050406030204" pitchFamily="18" charset="0"/>
                           </a:rPr>
                           <m:t>−1</m:t>
@@ -5728,25 +5988,25 @@
                   </m:oMath>
                 </a14:m>
                 <a:r>
-                  <a:rPr lang="en-US" altLang="ko-KR" sz="1200" i="1" dirty="0">
+                  <a:rPr lang="en-US" altLang="ko-KR" sz="1100" i="1" dirty="0">
                     <a:latin typeface="Cambria Math" panose="02040503050406030204" pitchFamily="18" charset="0"/>
                   </a:rPr>
                   <a:t> </a:t>
                 </a:r>
                 <a:r>
-                  <a:rPr lang="en-US" altLang="ko-KR" sz="1200" dirty="0">
+                  <a:rPr lang="en-US" altLang="ko-KR" sz="1100" dirty="0">
                     <a:latin typeface="Cambria Math" panose="02040503050406030204" pitchFamily="18" charset="0"/>
                   </a:rPr>
                   <a:t>: </a:t>
                 </a:r>
                 <a:r>
-                  <a:rPr lang="ko-KR" altLang="en-US" sz="1200" dirty="0">
+                  <a:rPr lang="ko-KR" altLang="en-US" sz="1100" dirty="0">
                     <a:latin typeface="Cambria Math" panose="02040503050406030204" pitchFamily="18" charset="0"/>
                   </a:rPr>
                   <a:t>기존의 추정치</a:t>
                 </a:r>
                 <a:r>
-                  <a:rPr lang="en-US" altLang="ko-KR" sz="1200" i="1" dirty="0">
+                  <a:rPr lang="en-US" altLang="ko-KR" sz="1100" i="1" dirty="0">
                     <a:latin typeface="Cambria Math" panose="02040503050406030204" pitchFamily="18" charset="0"/>
                   </a:rPr>
                   <a:t> </a:t>
@@ -5763,14 +6023,14 @@
                     <m:sSub>
                       <m:sSubPr>
                         <m:ctrlPr>
-                          <a:rPr lang="en-US" altLang="ko-KR" sz="1200" i="1" smtClean="0">
+                          <a:rPr lang="en-US" altLang="ko-KR" sz="1100" i="1">
                             <a:latin typeface="Cambria Math" panose="02040503050406030204" pitchFamily="18" charset="0"/>
                           </a:rPr>
                         </m:ctrlPr>
                       </m:sSubPr>
                       <m:e>
                         <m:r>
-                          <a:rPr lang="en-US" altLang="ko-KR" sz="1200" i="1">
+                          <a:rPr lang="en-US" altLang="ko-KR" sz="1100" i="1">
                             <a:latin typeface="Cambria Math" panose="02040503050406030204" pitchFamily="18" charset="0"/>
                           </a:rPr>
                           <m:t>𝑅</m:t>
@@ -5778,7 +6038,7 @@
                       </m:e>
                       <m:sub>
                         <m:r>
-                          <a:rPr lang="en-US" altLang="ko-KR" sz="1200" i="1">
+                          <a:rPr lang="en-US" altLang="ko-KR" sz="1100" i="1">
                             <a:latin typeface="Cambria Math" panose="02040503050406030204" pitchFamily="18" charset="0"/>
                           </a:rPr>
                           <m:t>𝑛</m:t>
@@ -5788,13 +6048,13 @@
                   </m:oMath>
                 </a14:m>
                 <a:r>
-                  <a:rPr lang="en-US" altLang="ko-KR" sz="1200" i="1" dirty="0">
+                  <a:rPr lang="en-US" altLang="ko-KR" sz="1100" i="1" dirty="0">
                     <a:latin typeface="Cambria Math" panose="02040503050406030204" pitchFamily="18" charset="0"/>
                   </a:rPr>
                   <a:t> </a:t>
                 </a:r>
                 <a:r>
-                  <a:rPr lang="en-US" altLang="ko-KR" sz="1200" dirty="0">
+                  <a:rPr lang="en-US" altLang="ko-KR" sz="1100" dirty="0">
                     <a:latin typeface="Cambria Math" panose="02040503050406030204" pitchFamily="18" charset="0"/>
                   </a:rPr>
                   <a:t>: </a:t>
@@ -5802,7 +6062,7 @@
                 <a14:m>
                   <m:oMath xmlns:m="http://schemas.openxmlformats.org/officeDocument/2006/math">
                     <m:r>
-                      <a:rPr lang="en-US" altLang="ko-KR" sz="1200" i="1" dirty="0" smtClean="0">
+                      <a:rPr lang="en-US" altLang="ko-KR" sz="1100" i="1" dirty="0" smtClean="0">
                         <a:latin typeface="Cambria Math" panose="02040503050406030204" pitchFamily="18" charset="0"/>
                       </a:rPr>
                       <m:t>𝑛</m:t>
@@ -5810,12 +6070,12 @@
                   </m:oMath>
                 </a14:m>
                 <a:r>
-                  <a:rPr lang="ko-KR" altLang="en-US" sz="1200" dirty="0">
+                  <a:rPr lang="ko-KR" altLang="en-US" sz="1100" dirty="0">
                     <a:latin typeface="Cambria Math" panose="02040503050406030204" pitchFamily="18" charset="0"/>
                   </a:rPr>
-                  <a:t>번째 행동을 취한 후 실제 받은 보상</a:t>
-                </a:r>
-                <a:endParaRPr lang="en-US" altLang="ko-KR" sz="1200" dirty="0">
+                  <a:t>번째 행동을 취했을 때 실제 받은 보상</a:t>
+                </a:r>
+                <a:endParaRPr lang="en-US" altLang="ko-KR" sz="1100" dirty="0">
                   <a:latin typeface="Cambria Math" panose="02040503050406030204" pitchFamily="18" charset="0"/>
                 </a:endParaRPr>
               </a:p>
@@ -5830,14 +6090,14 @@
                     <m:sSub>
                       <m:sSubPr>
                         <m:ctrlPr>
-                          <a:rPr lang="en-US" altLang="ko-KR" sz="1200" i="1">
+                          <a:rPr lang="en-US" altLang="ko-KR" sz="1100" i="1">
                             <a:latin typeface="Cambria Math" panose="02040503050406030204" pitchFamily="18" charset="0"/>
                           </a:rPr>
                         </m:ctrlPr>
                       </m:sSubPr>
                       <m:e>
                         <m:r>
-                          <a:rPr lang="en-US" altLang="ko-KR" sz="1200" i="1">
+                          <a:rPr lang="en-US" altLang="ko-KR" sz="1100" i="1">
                             <a:latin typeface="Cambria Math" panose="02040503050406030204" pitchFamily="18" charset="0"/>
                           </a:rPr>
                           <m:t>𝑅</m:t>
@@ -5845,7 +6105,7 @@
                       </m:e>
                       <m:sub>
                         <m:r>
-                          <a:rPr lang="en-US" altLang="ko-KR" sz="1200" i="1">
+                          <a:rPr lang="en-US" altLang="ko-KR" sz="1100" i="1">
                             <a:latin typeface="Cambria Math" panose="02040503050406030204" pitchFamily="18" charset="0"/>
                           </a:rPr>
                           <m:t>𝑛</m:t>
@@ -5853,7 +6113,7 @@
                       </m:sub>
                     </m:sSub>
                     <m:r>
-                      <a:rPr lang="en-US" altLang="ko-KR" sz="1200" i="1">
+                      <a:rPr lang="en-US" altLang="ko-KR" sz="1100" i="1">
                         <a:latin typeface="Cambria Math" panose="02040503050406030204" pitchFamily="18" charset="0"/>
                       </a:rPr>
                       <m:t>−</m:t>
@@ -5861,14 +6121,14 @@
                     <m:sSub>
                       <m:sSubPr>
                         <m:ctrlPr>
-                          <a:rPr lang="en-US" altLang="ko-KR" sz="1200" i="1">
+                          <a:rPr lang="en-US" altLang="ko-KR" sz="1100" i="1">
                             <a:latin typeface="Cambria Math" panose="02040503050406030204" pitchFamily="18" charset="0"/>
                           </a:rPr>
                         </m:ctrlPr>
                       </m:sSubPr>
                       <m:e>
                         <m:r>
-                          <a:rPr lang="en-US" altLang="ko-KR" sz="1200" i="1">
+                          <a:rPr lang="en-US" altLang="ko-KR" sz="1100" i="1">
                             <a:latin typeface="Cambria Math" panose="02040503050406030204" pitchFamily="18" charset="0"/>
                           </a:rPr>
                           <m:t>𝑄</m:t>
@@ -5876,13 +6136,13 @@
                       </m:e>
                       <m:sub>
                         <m:r>
-                          <a:rPr lang="en-US" altLang="ko-KR" sz="1200" i="1">
+                          <a:rPr lang="en-US" altLang="ko-KR" sz="1100" i="1">
                             <a:latin typeface="Cambria Math" panose="02040503050406030204" pitchFamily="18" charset="0"/>
                           </a:rPr>
                           <m:t>𝑛</m:t>
                         </m:r>
                         <m:r>
-                          <a:rPr lang="en-US" altLang="ko-KR" sz="1200" i="1">
+                          <a:rPr lang="en-US" altLang="ko-KR" sz="1100" i="1">
                             <a:latin typeface="Cambria Math" panose="02040503050406030204" pitchFamily="18" charset="0"/>
                           </a:rPr>
                           <m:t>−1</m:t>
@@ -5892,24 +6152,24 @@
                   </m:oMath>
                 </a14:m>
                 <a:r>
-                  <a:rPr lang="en-US" altLang="ko-KR" sz="1200" i="1" dirty="0">
+                  <a:rPr lang="en-US" altLang="ko-KR" sz="1100" i="1" dirty="0">
                     <a:latin typeface="Cambria Math" panose="02040503050406030204" pitchFamily="18" charset="0"/>
                   </a:rPr>
                   <a:t> </a:t>
                 </a:r>
                 <a:r>
-                  <a:rPr lang="en-US" altLang="ko-KR" sz="1200" dirty="0">
+                  <a:rPr lang="en-US" altLang="ko-KR" sz="1100" dirty="0">
                     <a:latin typeface="Cambria Math" panose="02040503050406030204" pitchFamily="18" charset="0"/>
                   </a:rPr>
                   <a:t>: </a:t>
                 </a:r>
                 <a:r>
-                  <a:rPr lang="ko-KR" altLang="en-US" sz="1200" dirty="0">
+                  <a:rPr lang="ko-KR" altLang="en-US" sz="1100" dirty="0">
                     <a:latin typeface="Cambria Math" panose="02040503050406030204" pitchFamily="18" charset="0"/>
                   </a:rPr>
                   <a:t>기존의 추정치를 어느 방향으로 얼마나 수정해야 하는지를 알려주는 오차 값</a:t>
                 </a:r>
-                <a:endParaRPr lang="en-US" altLang="ko-KR" sz="1200" dirty="0">
+                <a:endParaRPr lang="en-US" altLang="ko-KR" sz="1100" dirty="0">
                   <a:latin typeface="Cambria Math" panose="02040503050406030204" pitchFamily="18" charset="0"/>
                 </a:endParaRPr>
               </a:p>
@@ -5976,7 +6236,7 @@
                   </a:lnSpc>
                 </a:pPr>
                 <a:r>
-                  <a:rPr lang="ko-KR" altLang="en-US" sz="1200" dirty="0"/>
+                  <a:rPr lang="ko-KR" altLang="en-US" sz="1100" dirty="0"/>
                   <a:t>오차 값을 그대로 갱신할 경우 너무 급격히 변화하기 때문 오차 값에 </a:t>
                 </a:r>
                 <a14:m>
@@ -5984,14 +6244,14 @@
                     <m:f>
                       <m:fPr>
                         <m:ctrlPr>
-                          <a:rPr lang="ko-KR" altLang="en-US" sz="1200" i="1" smtClean="0">
+                          <a:rPr lang="en-US" altLang="ko-KR" sz="1100" b="0" i="1" smtClean="0">
                             <a:latin typeface="Cambria Math" panose="02040503050406030204" pitchFamily="18" charset="0"/>
                           </a:rPr>
                         </m:ctrlPr>
                       </m:fPr>
                       <m:num>
                         <m:r>
-                          <a:rPr lang="en-US" altLang="ko-KR" sz="1200" b="0" i="1" smtClean="0">
+                          <a:rPr lang="en-US" altLang="ko-KR" sz="1100" b="0" i="1" smtClean="0">
                             <a:latin typeface="Cambria Math" panose="02040503050406030204" pitchFamily="18" charset="0"/>
                           </a:rPr>
                           <m:t>1</m:t>
@@ -5999,7 +6259,7 @@
                       </m:num>
                       <m:den>
                         <m:r>
-                          <a:rPr lang="en-US" altLang="ko-KR" sz="1200" b="0" i="1" smtClean="0">
+                          <a:rPr lang="en-US" altLang="ko-KR" sz="1100" b="0" i="1" smtClean="0">
                             <a:latin typeface="Cambria Math" panose="02040503050406030204" pitchFamily="18" charset="0"/>
                           </a:rPr>
                           <m:t>𝑛</m:t>
@@ -6009,10 +6269,10 @@
                   </m:oMath>
                 </a14:m>
                 <a:r>
-                  <a:rPr lang="ko-KR" altLang="en-US" sz="1200" dirty="0"/>
+                  <a:rPr lang="ko-KR" altLang="en-US" sz="1100" dirty="0"/>
                   <a:t>를 곱한 값만큼 </a:t>
                 </a:r>
-                <a:endParaRPr lang="en-US" altLang="ko-KR" sz="1200" dirty="0"/>
+                <a:endParaRPr lang="en-US" altLang="ko-KR" sz="1100" dirty="0"/>
               </a:p>
               <a:p>
                 <a:pPr algn="just">
@@ -6021,15 +6281,15 @@
                   </a:lnSpc>
                 </a:pPr>
                 <a:r>
-                  <a:rPr lang="ko-KR" altLang="en-US" sz="1200" dirty="0" err="1"/>
+                  <a:rPr lang="ko-KR" altLang="en-US" sz="1100" dirty="0" err="1"/>
                   <a:t>학습률</a:t>
                 </a:r>
                 <a:r>
-                  <a:rPr lang="en-US" altLang="ko-KR" sz="1200" dirty="0"/>
+                  <a:rPr lang="en-US" altLang="ko-KR" sz="1100" dirty="0"/>
                   <a:t>(learning rate):</a:t>
                 </a:r>
                 <a:r>
-                  <a:rPr lang="ko-KR" altLang="en-US" sz="1200" dirty="0"/>
+                  <a:rPr lang="ko-KR" altLang="en-US" sz="1100" dirty="0"/>
                   <a:t> </a:t>
                 </a:r>
                 <a14:m>
@@ -6037,14 +6297,14 @@
                     <m:f>
                       <m:fPr>
                         <m:ctrlPr>
-                          <a:rPr lang="ko-KR" altLang="en-US" sz="1200" i="1">
+                          <a:rPr lang="en-US" altLang="ko-KR" sz="1100" i="1">
                             <a:latin typeface="Cambria Math" panose="02040503050406030204" pitchFamily="18" charset="0"/>
                           </a:rPr>
                         </m:ctrlPr>
                       </m:fPr>
                       <m:num>
                         <m:r>
-                          <a:rPr lang="en-US" altLang="ko-KR" sz="1200" i="1">
+                          <a:rPr lang="en-US" altLang="ko-KR" sz="1100" i="1">
                             <a:latin typeface="Cambria Math" panose="02040503050406030204" pitchFamily="18" charset="0"/>
                           </a:rPr>
                           <m:t>1</m:t>
@@ -6052,7 +6312,7 @@
                       </m:num>
                       <m:den>
                         <m:r>
-                          <a:rPr lang="en-US" altLang="ko-KR" sz="1200" i="1">
+                          <a:rPr lang="en-US" altLang="ko-KR" sz="1100" i="1">
                             <a:latin typeface="Cambria Math" panose="02040503050406030204" pitchFamily="18" charset="0"/>
                           </a:rPr>
                           <m:t>𝑛</m:t>
@@ -6062,14 +6322,14 @@
                   </m:oMath>
                 </a14:m>
                 <a:r>
-                  <a:rPr lang="ko-KR" altLang="en-US" sz="1200" dirty="0"/>
+                  <a:rPr lang="ko-KR" altLang="en-US" sz="1100" dirty="0"/>
                   <a:t> </a:t>
                 </a:r>
               </a:p>
             </p:txBody>
           </p:sp>
         </mc:Choice>
-        <mc:Fallback xmlns="">
+        <mc:Fallback>
           <p:sp>
             <p:nvSpPr>
               <p:cNvPr id="3" name="내용 개체 틀 2">
@@ -6088,13 +6348,13 @@
             </p:nvSpPr>
             <p:spPr>
               <a:xfrm>
-                <a:off x="3499503" y="1056068"/>
-                <a:ext cx="5502827" cy="1695678"/>
+                <a:off x="2735943" y="756940"/>
+                <a:ext cx="6266388" cy="1695678"/>
               </a:xfrm>
               <a:blipFill>
                 <a:blip r:embed="rId3"/>
                 <a:stretch>
-                  <a:fillRect t="-1799"/>
+                  <a:fillRect t="-360" b="-15108"/>
                 </a:stretch>
               </a:blipFill>
             </p:spPr>
@@ -6142,7 +6402,7 @@
         </p:blipFill>
         <p:spPr>
           <a:xfrm>
-            <a:off x="399882" y="1213503"/>
+            <a:off x="0" y="1185391"/>
             <a:ext cx="2566651" cy="1014880"/>
           </a:xfrm>
           <a:prstGeom prst="rect">
@@ -6253,6 +6513,35 @@
           </a:p>
         </p:txBody>
       </p:sp>
+      <p:sp>
+        <p:nvSpPr>
+          <p:cNvPr id="4" name="슬라이드 번호 개체 틀 3">
+            <a:extLst>
+              <a:ext uri="{FF2B5EF4-FFF2-40B4-BE49-F238E27FC236}">
+                <a16:creationId xmlns:a16="http://schemas.microsoft.com/office/drawing/2014/main" id="{02DBA3CB-1D0E-07DD-74E5-711AE090B5C3}"/>
+              </a:ext>
+            </a:extLst>
+          </p:cNvPr>
+          <p:cNvSpPr>
+            <a:spLocks noGrp="1"/>
+          </p:cNvSpPr>
+          <p:nvPr>
+            <p:ph type="sldNum" sz="quarter" idx="12"/>
+          </p:nvPr>
+        </p:nvSpPr>
+        <p:spPr/>
+        <p:txBody>
+          <a:bodyPr/>
+          <a:lstStyle/>
+          <a:p>
+            <a:fld id="{B4844BEB-34CB-469D-8313-83BA6B52212E}" type="slidenum">
+              <a:rPr lang="ko-KR" altLang="en-US" smtClean="0"/>
+              <a:t>11</a:t>
+            </a:fld>
+            <a:endParaRPr lang="ko-KR" altLang="en-US"/>
+          </a:p>
+        </p:txBody>
+      </p:sp>
     </p:spTree>
     <p:extLst>
       <p:ext uri="{BB962C8B-B14F-4D97-AF65-F5344CB8AC3E}">
@@ -6318,8 +6607,8 @@
           </a:p>
         </p:txBody>
       </p:sp>
-      <mc:AlternateContent xmlns:mc="http://schemas.openxmlformats.org/markup-compatibility/2006" xmlns:a14="http://schemas.microsoft.com/office/drawing/2010/main">
-        <mc:Choice Requires="a14">
+      <mc:AlternateContent xmlns:mc="http://schemas.openxmlformats.org/markup-compatibility/2006">
+        <mc:Choice xmlns:a14="http://schemas.microsoft.com/office/drawing/2010/main" Requires="a14">
           <p:sp>
             <p:nvSpPr>
               <p:cNvPr id="3" name="내용 개체 틀 2">
@@ -6564,7 +6853,49 @@
                   <a:rPr lang="en-US" altLang="ko-KR" sz="2000" dirty="0"/>
                   <a:t>’</a:t>
                 </a:r>
-                <a:endParaRPr lang="ko-KR" altLang="en-US" sz="2000" dirty="0"/>
+              </a:p>
+              <a:p>
+                <a:pPr algn="just">
+                  <a:lnSpc>
+                    <a:spcPct val="100000"/>
+                  </a:lnSpc>
+                </a:pPr>
+                <a:endParaRPr lang="en-US" altLang="ko-KR" sz="2000" dirty="0"/>
+              </a:p>
+              <a:p>
+                <a:pPr algn="just">
+                  <a:lnSpc>
+                    <a:spcPct val="100000"/>
+                  </a:lnSpc>
+                </a:pPr>
+                <a:r>
+                  <a:rPr lang="ko-KR" altLang="en-US" sz="2000" dirty="0"/>
+                  <a:t>강화학습 알고리즘은 결국 </a:t>
+                </a:r>
+                <a:r>
+                  <a:rPr lang="en-US" altLang="ko-KR" sz="2000" dirty="0"/>
+                  <a:t>‘</a:t>
+                </a:r>
+                <a:r>
+                  <a:rPr lang="ko-KR" altLang="en-US" sz="2000" dirty="0"/>
+                  <a:t>활용과 탐색의 균형</a:t>
+                </a:r>
+                <a:r>
+                  <a:rPr lang="en-US" altLang="ko-KR" sz="2000" dirty="0"/>
+                  <a:t>’</a:t>
+                </a:r>
+                <a:r>
+                  <a:rPr lang="ko-KR" altLang="en-US" sz="2000" dirty="0"/>
+                  <a:t>을 어떻게 </a:t>
+                </a:r>
+                <a:r>
+                  <a:rPr lang="ko-KR" altLang="en-US" sz="2000" dirty="0" err="1"/>
+                  <a:t>잡느냐의</a:t>
+                </a:r>
+                <a:r>
+                  <a:rPr lang="ko-KR" altLang="en-US" sz="2000" dirty="0"/>
+                  <a:t> 문제로 귀결됨</a:t>
+                </a:r>
               </a:p>
               <a:p>
                 <a:pPr algn="r">
@@ -6577,7 +6908,7 @@
             </p:txBody>
           </p:sp>
         </mc:Choice>
-        <mc:Fallback xmlns="">
+        <mc:Fallback>
           <p:sp>
             <p:nvSpPr>
               <p:cNvPr id="3" name="내용 개체 틀 2">
@@ -6617,6 +6948,35 @@
           </p:sp>
         </mc:Fallback>
       </mc:AlternateContent>
+      <p:sp>
+        <p:nvSpPr>
+          <p:cNvPr id="4" name="슬라이드 번호 개체 틀 3">
+            <a:extLst>
+              <a:ext uri="{FF2B5EF4-FFF2-40B4-BE49-F238E27FC236}">
+                <a16:creationId xmlns:a16="http://schemas.microsoft.com/office/drawing/2014/main" id="{48AD2740-C7B6-6611-5C8F-B3AF5ED1C38B}"/>
+              </a:ext>
+            </a:extLst>
+          </p:cNvPr>
+          <p:cNvSpPr>
+            <a:spLocks noGrp="1"/>
+          </p:cNvSpPr>
+          <p:nvPr>
+            <p:ph type="sldNum" sz="quarter" idx="12"/>
+          </p:nvPr>
+        </p:nvSpPr>
+        <p:spPr/>
+        <p:txBody>
+          <a:bodyPr/>
+          <a:lstStyle/>
+          <a:p>
+            <a:fld id="{B4844BEB-34CB-469D-8313-83BA6B52212E}" type="slidenum">
+              <a:rPr lang="ko-KR" altLang="en-US" smtClean="0"/>
+              <a:t>12</a:t>
+            </a:fld>
+            <a:endParaRPr lang="ko-KR" altLang="en-US"/>
+          </a:p>
+        </p:txBody>
+      </p:sp>
     </p:spTree>
     <p:extLst>
       <p:ext uri="{BB962C8B-B14F-4D97-AF65-F5344CB8AC3E}">
@@ -6666,12 +7026,24 @@
         <p:spPr/>
         <p:txBody>
           <a:bodyPr>
-            <a:normAutofit/>
+            <a:noAutofit/>
           </a:bodyPr>
           <a:lstStyle/>
           <a:p>
             <a:r>
-              <a:rPr lang="ko-KR" altLang="en-US" dirty="0"/>
+              <a:rPr lang="ko-KR" altLang="en-US" sz="3600" dirty="0" err="1"/>
+              <a:t>벤디트</a:t>
+            </a:r>
+            <a:r>
+              <a:rPr lang="ko-KR" altLang="en-US" sz="3600" dirty="0"/>
+              <a:t> 알고리즘 구현</a:t>
+            </a:r>
+            <a:r>
+              <a:rPr lang="en-US" altLang="ko-KR" sz="3600" dirty="0"/>
+              <a:t>: </a:t>
+            </a:r>
+            <a:r>
+              <a:rPr lang="ko-KR" altLang="en-US" sz="3600" dirty="0"/>
               <a:t>슬롯머신 클래스</a:t>
             </a:r>
           </a:p>
@@ -6699,7 +7071,7 @@
         </p:blipFill>
         <p:spPr>
           <a:xfrm>
-            <a:off x="5134364" y="3429000"/>
+            <a:off x="5286764" y="3661228"/>
             <a:ext cx="3353268" cy="2695951"/>
           </a:xfrm>
           <a:prstGeom prst="rect">
@@ -6729,7 +7101,7 @@
         </p:blipFill>
         <p:spPr>
           <a:xfrm>
-            <a:off x="249426" y="1533755"/>
+            <a:off x="234911" y="2235482"/>
             <a:ext cx="5262612" cy="2748320"/>
           </a:xfrm>
           <a:prstGeom prst="rect">
@@ -6753,11 +7125,77 @@
             <p:ph idx="1"/>
           </p:nvPr>
         </p:nvSpPr>
-        <p:spPr/>
+        <p:spPr>
+          <a:xfrm>
+            <a:off x="152129" y="1056068"/>
+            <a:ext cx="8850201" cy="1805092"/>
+          </a:xfrm>
+        </p:spPr>
         <p:txBody>
           <a:bodyPr/>
           <a:lstStyle/>
           <a:p>
+            <a:pPr>
+              <a:lnSpc>
+                <a:spcPct val="100000"/>
+              </a:lnSpc>
+            </a:pPr>
+            <a:r>
+              <a:rPr lang="ko-KR" altLang="en-US" dirty="0"/>
+              <a:t>조건 단순화</a:t>
+            </a:r>
+            <a:r>
+              <a:rPr lang="en-US" altLang="ko-KR" dirty="0"/>
+              <a:t>: </a:t>
+            </a:r>
+            <a:r>
+              <a:rPr lang="ko-KR" altLang="en-US" dirty="0"/>
+              <a:t>슬롯머신을 플레이하면 승리</a:t>
+            </a:r>
+            <a:r>
+              <a:rPr lang="en-US" altLang="ko-KR" dirty="0"/>
+              <a:t>(1)</a:t>
+            </a:r>
+            <a:r>
+              <a:rPr lang="ko-KR" altLang="en-US" dirty="0"/>
+              <a:t>와 패배</a:t>
+            </a:r>
+            <a:r>
+              <a:rPr lang="en-US" altLang="ko-KR" dirty="0"/>
+              <a:t>(0) </a:t>
+            </a:r>
+            <a:r>
+              <a:rPr lang="ko-KR" altLang="en-US" dirty="0"/>
+              <a:t>중 하나를 보상으로 얻음</a:t>
+            </a:r>
+          </a:p>
+        </p:txBody>
+      </p:sp>
+      <p:sp>
+        <p:nvSpPr>
+          <p:cNvPr id="3" name="슬라이드 번호 개체 틀 2">
+            <a:extLst>
+              <a:ext uri="{FF2B5EF4-FFF2-40B4-BE49-F238E27FC236}">
+                <a16:creationId xmlns:a16="http://schemas.microsoft.com/office/drawing/2014/main" id="{8EE49D3B-8D6C-31D7-381D-D99410121A9E}"/>
+              </a:ext>
+            </a:extLst>
+          </p:cNvPr>
+          <p:cNvSpPr>
+            <a:spLocks noGrp="1"/>
+          </p:cNvSpPr>
+          <p:nvPr>
+            <p:ph type="sldNum" sz="quarter" idx="12"/>
+          </p:nvPr>
+        </p:nvSpPr>
+        <p:spPr/>
+        <p:txBody>
+          <a:bodyPr/>
+          <a:lstStyle/>
+          <a:p>
+            <a:fld id="{B4844BEB-34CB-469D-8313-83BA6B52212E}" type="slidenum">
+              <a:rPr lang="ko-KR" altLang="en-US" smtClean="0"/>
+              <a:t>13</a:t>
+            </a:fld>
             <a:endParaRPr lang="ko-KR" altLang="en-US"/>
           </a:p>
         </p:txBody>
@@ -6913,6 +7351,35 @@
           </a:prstGeom>
         </p:spPr>
       </p:pic>
+      <p:sp>
+        <p:nvSpPr>
+          <p:cNvPr id="4" name="슬라이드 번호 개체 틀 3">
+            <a:extLst>
+              <a:ext uri="{FF2B5EF4-FFF2-40B4-BE49-F238E27FC236}">
+                <a16:creationId xmlns:a16="http://schemas.microsoft.com/office/drawing/2014/main" id="{C4EC4C08-9235-7AC3-8981-73144E51A3CC}"/>
+              </a:ext>
+            </a:extLst>
+          </p:cNvPr>
+          <p:cNvSpPr>
+            <a:spLocks noGrp="1"/>
+          </p:cNvSpPr>
+          <p:nvPr>
+            <p:ph type="sldNum" sz="quarter" idx="12"/>
+          </p:nvPr>
+        </p:nvSpPr>
+        <p:spPr/>
+        <p:txBody>
+          <a:bodyPr/>
+          <a:lstStyle/>
+          <a:p>
+            <a:fld id="{B4844BEB-34CB-469D-8313-83BA6B52212E}" type="slidenum">
+              <a:rPr lang="ko-KR" altLang="en-US" smtClean="0"/>
+              <a:t>14</a:t>
+            </a:fld>
+            <a:endParaRPr lang="ko-KR" altLang="en-US"/>
+          </a:p>
+        </p:txBody>
+      </p:sp>
     </p:spTree>
     <p:extLst>
       <p:ext uri="{BB962C8B-B14F-4D97-AF65-F5344CB8AC3E}">
@@ -7026,6 +7493,35 @@
           </a:prstGeom>
         </p:spPr>
       </p:pic>
+      <p:sp>
+        <p:nvSpPr>
+          <p:cNvPr id="4" name="슬라이드 번호 개체 틀 3">
+            <a:extLst>
+              <a:ext uri="{FF2B5EF4-FFF2-40B4-BE49-F238E27FC236}">
+                <a16:creationId xmlns:a16="http://schemas.microsoft.com/office/drawing/2014/main" id="{20539A19-381E-0F36-D10A-9DF98AB39039}"/>
+              </a:ext>
+            </a:extLst>
+          </p:cNvPr>
+          <p:cNvSpPr>
+            <a:spLocks noGrp="1"/>
+          </p:cNvSpPr>
+          <p:nvPr>
+            <p:ph type="sldNum" sz="quarter" idx="12"/>
+          </p:nvPr>
+        </p:nvSpPr>
+        <p:spPr/>
+        <p:txBody>
+          <a:bodyPr/>
+          <a:lstStyle/>
+          <a:p>
+            <a:fld id="{B4844BEB-34CB-469D-8313-83BA6B52212E}" type="slidenum">
+              <a:rPr lang="ko-KR" altLang="en-US" smtClean="0"/>
+              <a:t>15</a:t>
+            </a:fld>
+            <a:endParaRPr lang="ko-KR" altLang="en-US"/>
+          </a:p>
+        </p:txBody>
+      </p:sp>
     </p:spTree>
     <p:extLst>
       <p:ext uri="{BB962C8B-B14F-4D97-AF65-F5344CB8AC3E}">
@@ -7199,8 +7695,8 @@
           </a:prstGeom>
         </p:spPr>
       </p:pic>
-      <mc:AlternateContent xmlns:mc="http://schemas.openxmlformats.org/markup-compatibility/2006">
-        <mc:Choice xmlns:a14="http://schemas.microsoft.com/office/drawing/2010/main" Requires="a14">
+      <mc:AlternateContent xmlns:mc="http://schemas.openxmlformats.org/markup-compatibility/2006" xmlns:a14="http://schemas.microsoft.com/office/drawing/2010/main">
+        <mc:Choice Requires="a14">
           <p:sp>
             <p:nvSpPr>
               <p:cNvPr id="10" name="TextBox 9">
@@ -7260,7 +7756,7 @@
             </p:txBody>
           </p:sp>
         </mc:Choice>
-        <mc:Fallback>
+        <mc:Fallback xmlns="">
           <p:sp>
             <p:nvSpPr>
               <p:cNvPr id="10" name="TextBox 9">
@@ -7305,6 +7801,113 @@
           </p:sp>
         </mc:Fallback>
       </mc:AlternateContent>
+      <p:sp>
+        <p:nvSpPr>
+          <p:cNvPr id="4" name="TextBox 3">
+            <a:extLst>
+              <a:ext uri="{FF2B5EF4-FFF2-40B4-BE49-F238E27FC236}">
+                <a16:creationId xmlns:a16="http://schemas.microsoft.com/office/drawing/2014/main" id="{BE58C373-05E8-89D1-134F-FA09A0AE4441}"/>
+              </a:ext>
+            </a:extLst>
+          </p:cNvPr>
+          <p:cNvSpPr txBox="1"/>
+          <p:nvPr/>
+        </p:nvSpPr>
+        <p:spPr>
+          <a:xfrm>
+            <a:off x="5921828" y="511203"/>
+            <a:ext cx="2420856" cy="369332"/>
+          </a:xfrm>
+          <a:prstGeom prst="rect">
+            <a:avLst/>
+          </a:prstGeom>
+          <a:noFill/>
+        </p:spPr>
+        <p:txBody>
+          <a:bodyPr wrap="none" rtlCol="0">
+            <a:spAutoFit/>
+          </a:bodyPr>
+          <a:lstStyle/>
+          <a:p>
+            <a:r>
+              <a:rPr lang="ko-KR" altLang="en-US">
+                <a:solidFill>
+                  <a:srgbClr val="FF0000"/>
+                </a:solidFill>
+              </a:rPr>
+              <a:t>단계에 따른 보상 총합</a:t>
+            </a:r>
+          </a:p>
+        </p:txBody>
+      </p:sp>
+      <p:sp>
+        <p:nvSpPr>
+          <p:cNvPr id="6" name="TextBox 5">
+            <a:extLst>
+              <a:ext uri="{FF2B5EF4-FFF2-40B4-BE49-F238E27FC236}">
+                <a16:creationId xmlns:a16="http://schemas.microsoft.com/office/drawing/2014/main" id="{794505D6-1E6B-91DA-1E62-E55FF5311CCB}"/>
+              </a:ext>
+            </a:extLst>
+          </p:cNvPr>
+          <p:cNvSpPr txBox="1"/>
+          <p:nvPr/>
+        </p:nvSpPr>
+        <p:spPr>
+          <a:xfrm>
+            <a:off x="6299199" y="4471860"/>
+            <a:ext cx="1391728" cy="369332"/>
+          </a:xfrm>
+          <a:prstGeom prst="rect">
+            <a:avLst/>
+          </a:prstGeom>
+          <a:noFill/>
+        </p:spPr>
+        <p:txBody>
+          <a:bodyPr wrap="none" rtlCol="0">
+            <a:spAutoFit/>
+          </a:bodyPr>
+          <a:lstStyle/>
+          <a:p>
+            <a:r>
+              <a:rPr lang="ko-KR" altLang="en-US" dirty="0">
+                <a:solidFill>
+                  <a:srgbClr val="FF0000"/>
+                </a:solidFill>
+              </a:rPr>
+              <a:t>단계별 승률</a:t>
+            </a:r>
+          </a:p>
+        </p:txBody>
+      </p:sp>
+      <p:sp>
+        <p:nvSpPr>
+          <p:cNvPr id="8" name="슬라이드 번호 개체 틀 7">
+            <a:extLst>
+              <a:ext uri="{FF2B5EF4-FFF2-40B4-BE49-F238E27FC236}">
+                <a16:creationId xmlns:a16="http://schemas.microsoft.com/office/drawing/2014/main" id="{A7F546A4-F65F-9F86-BFF8-850D7D5F5612}"/>
+              </a:ext>
+            </a:extLst>
+          </p:cNvPr>
+          <p:cNvSpPr>
+            <a:spLocks noGrp="1"/>
+          </p:cNvSpPr>
+          <p:nvPr>
+            <p:ph type="sldNum" sz="quarter" idx="12"/>
+          </p:nvPr>
+        </p:nvSpPr>
+        <p:spPr/>
+        <p:txBody>
+          <a:bodyPr/>
+          <a:lstStyle/>
+          <a:p>
+            <a:fld id="{B4844BEB-34CB-469D-8313-83BA6B52212E}" type="slidenum">
+              <a:rPr lang="ko-KR" altLang="en-US" smtClean="0"/>
+              <a:t>16</a:t>
+            </a:fld>
+            <a:endParaRPr lang="ko-KR" altLang="en-US"/>
+          </a:p>
+        </p:txBody>
+      </p:sp>
     </p:spTree>
     <p:extLst>
       <p:ext uri="{BB962C8B-B14F-4D97-AF65-F5344CB8AC3E}">
@@ -7417,7 +8020,7 @@
             </a:r>
             <a:r>
               <a:rPr lang="en-US" altLang="ko-KR" dirty="0"/>
-              <a:t>＇</a:t>
+              <a:t>’</a:t>
             </a:r>
             <a:r>
               <a:rPr lang="ko-KR" altLang="en-US" dirty="0"/>
@@ -7564,6 +8167,35 @@
           </a:prstGeom>
         </p:spPr>
       </p:pic>
+      <p:sp>
+        <p:nvSpPr>
+          <p:cNvPr id="4" name="슬라이드 번호 개체 틀 3">
+            <a:extLst>
+              <a:ext uri="{FF2B5EF4-FFF2-40B4-BE49-F238E27FC236}">
+                <a16:creationId xmlns:a16="http://schemas.microsoft.com/office/drawing/2014/main" id="{6F7987EF-9BF4-417E-0109-76ECDB1A6079}"/>
+              </a:ext>
+            </a:extLst>
+          </p:cNvPr>
+          <p:cNvSpPr>
+            <a:spLocks noGrp="1"/>
+          </p:cNvSpPr>
+          <p:nvPr>
+            <p:ph type="sldNum" sz="quarter" idx="12"/>
+          </p:nvPr>
+        </p:nvSpPr>
+        <p:spPr/>
+        <p:txBody>
+          <a:bodyPr/>
+          <a:lstStyle/>
+          <a:p>
+            <a:fld id="{B4844BEB-34CB-469D-8313-83BA6B52212E}" type="slidenum">
+              <a:rPr lang="ko-KR" altLang="en-US" smtClean="0"/>
+              <a:t>17</a:t>
+            </a:fld>
+            <a:endParaRPr lang="ko-KR" altLang="en-US"/>
+          </a:p>
+        </p:txBody>
+      </p:sp>
     </p:spTree>
     <p:extLst>
       <p:ext uri="{BB962C8B-B14F-4D97-AF65-F5344CB8AC3E}">
@@ -7594,8 +8226,8 @@
           <a:chExt cx="0" cy="0"/>
         </a:xfrm>
       </p:grpSpPr>
-      <mc:AlternateContent xmlns:mc="http://schemas.openxmlformats.org/markup-compatibility/2006">
-        <mc:Choice xmlns:a14="http://schemas.microsoft.com/office/drawing/2010/main" Requires="a14">
+      <mc:AlternateContent xmlns:mc="http://schemas.openxmlformats.org/markup-compatibility/2006" xmlns:a14="http://schemas.microsoft.com/office/drawing/2010/main">
+        <mc:Choice Requires="a14">
           <p:sp>
             <p:nvSpPr>
               <p:cNvPr id="2" name="제목 1">
@@ -7639,7 +8271,7 @@
             </p:txBody>
           </p:sp>
         </mc:Choice>
-        <mc:Fallback>
+        <mc:Fallback xmlns="">
           <p:sp>
             <p:nvSpPr>
               <p:cNvPr id="2" name="제목 1">
@@ -7679,8 +8311,8 @@
           </p:sp>
         </mc:Fallback>
       </mc:AlternateContent>
-      <mc:AlternateContent xmlns:mc="http://schemas.openxmlformats.org/markup-compatibility/2006">
-        <mc:Choice xmlns:a14="http://schemas.microsoft.com/office/drawing/2010/main" Requires="a14">
+      <mc:AlternateContent xmlns:mc="http://schemas.openxmlformats.org/markup-compatibility/2006" xmlns:a14="http://schemas.microsoft.com/office/drawing/2010/main">
+        <mc:Choice Requires="a14">
           <p:sp>
             <p:nvSpPr>
               <p:cNvPr id="3" name="내용 개체 틀 2">
@@ -7822,7 +8454,7 @@
             </p:txBody>
           </p:sp>
         </mc:Choice>
-        <mc:Fallback>
+        <mc:Fallback xmlns="">
           <p:sp>
             <p:nvSpPr>
               <p:cNvPr id="3" name="내용 개체 틀 2">
@@ -7935,10 +8567,509 @@
           </a:p>
         </p:txBody>
       </p:sp>
+      <mc:AlternateContent xmlns:mc="http://schemas.openxmlformats.org/markup-compatibility/2006">
+        <mc:Choice xmlns:a14="http://schemas.microsoft.com/office/drawing/2010/main" Requires="a14">
+          <p:sp>
+            <p:nvSpPr>
+              <p:cNvPr id="5" name="TextBox 4">
+                <a:extLst>
+                  <a:ext uri="{FF2B5EF4-FFF2-40B4-BE49-F238E27FC236}">
+                    <a16:creationId xmlns:a16="http://schemas.microsoft.com/office/drawing/2014/main" id="{F6E8DC25-8EF6-6403-5940-EACEC07B8C91}"/>
+                  </a:ext>
+                </a:extLst>
+              </p:cNvPr>
+              <p:cNvSpPr txBox="1"/>
+              <p:nvPr/>
+            </p:nvSpPr>
+            <p:spPr>
+              <a:xfrm>
+                <a:off x="4572000" y="229206"/>
+                <a:ext cx="4572000" cy="584775"/>
+              </a:xfrm>
+              <a:prstGeom prst="rect">
+                <a:avLst/>
+              </a:prstGeom>
+              <a:noFill/>
+            </p:spPr>
+            <p:txBody>
+              <a:bodyPr wrap="square">
+                <a:spAutoFit/>
+              </a:bodyPr>
+              <a:lstStyle/>
+              <a:p>
+                <a:pPr algn="just">
+                  <a:lnSpc>
+                    <a:spcPct val="100000"/>
+                  </a:lnSpc>
+                </a:pPr>
+                <a14:m>
+                  <m:oMath xmlns:m="http://schemas.openxmlformats.org/officeDocument/2006/math">
+                    <m:r>
+                      <a:rPr lang="ko-KR" altLang="en-US" sz="1600" b="1" i="1" smtClean="0">
+                        <a:solidFill>
+                          <a:srgbClr val="7030A0"/>
+                        </a:solidFill>
+                        <a:latin typeface="Cambria Math" panose="02040503050406030204" pitchFamily="18" charset="0"/>
+                      </a:rPr>
+                      <m:t>𝜺</m:t>
+                    </m:r>
+                  </m:oMath>
+                </a14:m>
+                <a:r>
+                  <a:rPr lang="en-US" altLang="ko-KR" sz="1600" b="1" dirty="0">
+                    <a:solidFill>
+                      <a:srgbClr val="7030A0"/>
+                    </a:solidFill>
+                  </a:rPr>
+                  <a:t>-</a:t>
+                </a:r>
+                <a:r>
+                  <a:rPr lang="ko-KR" altLang="en-US" sz="1600" b="1" dirty="0">
+                    <a:solidFill>
+                      <a:srgbClr val="7030A0"/>
+                    </a:solidFill>
+                  </a:rPr>
+                  <a:t>탐욕 정책</a:t>
+                </a:r>
+                <a:r>
+                  <a:rPr lang="en-US" altLang="ko-KR" sz="1600" dirty="0"/>
+                  <a:t>: </a:t>
+                </a:r>
+                <a14:m>
+                  <m:oMath xmlns:m="http://schemas.openxmlformats.org/officeDocument/2006/math">
+                    <m:r>
+                      <a:rPr lang="ko-KR" altLang="en-US" sz="1600" i="1">
+                        <a:latin typeface="Cambria Math" panose="02040503050406030204" pitchFamily="18" charset="0"/>
+                      </a:rPr>
+                      <m:t>𝜀</m:t>
+                    </m:r>
+                  </m:oMath>
+                </a14:m>
+                <a:r>
+                  <a:rPr lang="ko-KR" altLang="en-US" sz="1600" dirty="0"/>
+                  <a:t>의 확률로 </a:t>
+                </a:r>
+                <a:r>
+                  <a:rPr lang="en-US" altLang="ko-KR" sz="1600" dirty="0"/>
+                  <a:t>‘</a:t>
+                </a:r>
+                <a:r>
+                  <a:rPr lang="ko-KR" altLang="en-US" sz="1600" dirty="0"/>
+                  <a:t>탐색</a:t>
+                </a:r>
+                <a:r>
+                  <a:rPr lang="en-US" altLang="ko-KR" sz="1600" dirty="0"/>
+                  <a:t>’</a:t>
+                </a:r>
+                <a:r>
+                  <a:rPr lang="ko-KR" altLang="en-US" sz="1600" dirty="0"/>
+                  <a:t>을 하고 나머지 </a:t>
+                </a:r>
+                <a14:m>
+                  <m:oMath xmlns:m="http://schemas.openxmlformats.org/officeDocument/2006/math">
+                    <m:r>
+                      <a:rPr lang="en-US" altLang="ko-KR" sz="1600" b="0" i="0" smtClean="0">
+                        <a:latin typeface="Cambria Math" panose="02040503050406030204" pitchFamily="18" charset="0"/>
+                      </a:rPr>
+                      <m:t>(1−</m:t>
+                    </m:r>
+                    <m:r>
+                      <a:rPr lang="ko-KR" altLang="en-US" sz="1600" i="1">
+                        <a:latin typeface="Cambria Math" panose="02040503050406030204" pitchFamily="18" charset="0"/>
+                      </a:rPr>
+                      <m:t>𝜀</m:t>
+                    </m:r>
+                    <m:r>
+                      <a:rPr lang="en-US" altLang="ko-KR" sz="1600" b="0" i="1" smtClean="0">
+                        <a:latin typeface="Cambria Math" panose="02040503050406030204" pitchFamily="18" charset="0"/>
+                      </a:rPr>
+                      <m:t>)</m:t>
+                    </m:r>
+                  </m:oMath>
+                </a14:m>
+                <a:r>
+                  <a:rPr lang="ko-KR" altLang="en-US" sz="1600" dirty="0"/>
+                  <a:t> 확률로 </a:t>
+                </a:r>
+                <a:r>
+                  <a:rPr lang="en-US" altLang="ko-KR" sz="1600" dirty="0"/>
+                  <a:t>‘</a:t>
+                </a:r>
+                <a:r>
+                  <a:rPr lang="ko-KR" altLang="en-US" sz="1600" dirty="0"/>
+                  <a:t>활용</a:t>
+                </a:r>
+                <a:r>
+                  <a:rPr lang="en-US" altLang="ko-KR" sz="1600" dirty="0"/>
+                  <a:t>’</a:t>
+                </a:r>
+              </a:p>
+            </p:txBody>
+          </p:sp>
+        </mc:Choice>
+        <mc:Fallback>
+          <p:sp>
+            <p:nvSpPr>
+              <p:cNvPr id="5" name="TextBox 4">
+                <a:extLst>
+                  <a:ext uri="{FF2B5EF4-FFF2-40B4-BE49-F238E27FC236}">
+                    <a16:creationId xmlns:a16="http://schemas.microsoft.com/office/drawing/2014/main" id="{F6E8DC25-8EF6-6403-5940-EACEC07B8C91}"/>
+                  </a:ext>
+                </a:extLst>
+              </p:cNvPr>
+              <p:cNvSpPr txBox="1">
+                <a:spLocks noRot="1" noChangeAspect="1" noMove="1" noResize="1" noEditPoints="1" noAdjustHandles="1" noChangeArrowheads="1" noChangeShapeType="1" noTextEdit="1"/>
+              </p:cNvSpPr>
+              <p:nvPr/>
+            </p:nvSpPr>
+            <p:spPr>
+              <a:xfrm>
+                <a:off x="4572000" y="229206"/>
+                <a:ext cx="4572000" cy="584775"/>
+              </a:xfrm>
+              <a:prstGeom prst="rect">
+                <a:avLst/>
+              </a:prstGeom>
+              <a:blipFill>
+                <a:blip r:embed="rId5"/>
+                <a:stretch>
+                  <a:fillRect t="-4167" r="-667" b="-13542"/>
+                </a:stretch>
+              </a:blipFill>
+            </p:spPr>
+            <p:txBody>
+              <a:bodyPr/>
+              <a:lstStyle/>
+              <a:p>
+                <a:r>
+                  <a:rPr lang="ko-KR" altLang="en-US">
+                    <a:noFill/>
+                  </a:rPr>
+                  <a:t> </a:t>
+                </a:r>
+              </a:p>
+            </p:txBody>
+          </p:sp>
+        </mc:Fallback>
+      </mc:AlternateContent>
+      <p:sp>
+        <p:nvSpPr>
+          <p:cNvPr id="6" name="슬라이드 번호 개체 틀 5">
+            <a:extLst>
+              <a:ext uri="{FF2B5EF4-FFF2-40B4-BE49-F238E27FC236}">
+                <a16:creationId xmlns:a16="http://schemas.microsoft.com/office/drawing/2014/main" id="{B90F41FD-E1A8-01A1-4301-3E5A0C075D86}"/>
+              </a:ext>
+            </a:extLst>
+          </p:cNvPr>
+          <p:cNvSpPr>
+            <a:spLocks noGrp="1"/>
+          </p:cNvSpPr>
+          <p:nvPr>
+            <p:ph type="sldNum" sz="quarter" idx="12"/>
+          </p:nvPr>
+        </p:nvSpPr>
+        <p:spPr/>
+        <p:txBody>
+          <a:bodyPr/>
+          <a:lstStyle/>
+          <a:p>
+            <a:fld id="{B4844BEB-34CB-469D-8313-83BA6B52212E}" type="slidenum">
+              <a:rPr lang="ko-KR" altLang="en-US" smtClean="0"/>
+              <a:t>18</a:t>
+            </a:fld>
+            <a:endParaRPr lang="ko-KR" altLang="en-US"/>
+          </a:p>
+        </p:txBody>
+      </p:sp>
     </p:spTree>
     <p:extLst>
       <p:ext uri="{BB962C8B-B14F-4D97-AF65-F5344CB8AC3E}">
         <p14:creationId xmlns:p14="http://schemas.microsoft.com/office/powerpoint/2010/main" val="628235242"/>
+      </p:ext>
+    </p:extLst>
+  </p:cSld>
+  <p:clrMapOvr>
+    <a:masterClrMapping/>
+  </p:clrMapOvr>
+</p:sld>
+</file>
+
+<file path=ppt/slides/slide19.xml><?xml version="1.0" encoding="utf-8"?>
+<p:sld xmlns:a="http://schemas.openxmlformats.org/drawingml/2006/main" xmlns:r="http://schemas.openxmlformats.org/officeDocument/2006/relationships" xmlns:p="http://schemas.openxmlformats.org/presentationml/2006/main">
+  <p:cSld>
+    <p:spTree>
+      <p:nvGrpSpPr>
+        <p:cNvPr id="1" name=""/>
+        <p:cNvGrpSpPr/>
+        <p:nvPr/>
+      </p:nvGrpSpPr>
+      <p:grpSpPr>
+        <a:xfrm>
+          <a:off x="0" y="0"/>
+          <a:ext cx="0" cy="0"/>
+          <a:chOff x="0" y="0"/>
+          <a:chExt cx="0" cy="0"/>
+        </a:xfrm>
+      </p:grpSpPr>
+      <p:sp>
+        <p:nvSpPr>
+          <p:cNvPr id="2" name="제목 1">
+            <a:extLst>
+              <a:ext uri="{FF2B5EF4-FFF2-40B4-BE49-F238E27FC236}">
+                <a16:creationId xmlns:a16="http://schemas.microsoft.com/office/drawing/2014/main" id="{4FBE7556-A0E6-8F75-6456-3DB60DB7CA4F}"/>
+              </a:ext>
+            </a:extLst>
+          </p:cNvPr>
+          <p:cNvSpPr>
+            <a:spLocks noGrp="1"/>
+          </p:cNvSpPr>
+          <p:nvPr>
+            <p:ph type="title"/>
+          </p:nvPr>
+        </p:nvSpPr>
+        <p:spPr/>
+        <p:txBody>
+          <a:bodyPr/>
+          <a:lstStyle/>
+          <a:p>
+            <a:r>
+              <a:rPr lang="ko-KR" altLang="en-US" dirty="0"/>
+              <a:t>비정상 문제</a:t>
+            </a:r>
+          </a:p>
+        </p:txBody>
+      </p:sp>
+      <p:sp>
+        <p:nvSpPr>
+          <p:cNvPr id="3" name="내용 개체 틀 2">
+            <a:extLst>
+              <a:ext uri="{FF2B5EF4-FFF2-40B4-BE49-F238E27FC236}">
+                <a16:creationId xmlns:a16="http://schemas.microsoft.com/office/drawing/2014/main" id="{5AF03B19-EA9F-3CFB-0E72-048AA562D92C}"/>
+              </a:ext>
+            </a:extLst>
+          </p:cNvPr>
+          <p:cNvSpPr>
+            <a:spLocks noGrp="1"/>
+          </p:cNvSpPr>
+          <p:nvPr>
+            <p:ph idx="1"/>
+          </p:nvPr>
+        </p:nvSpPr>
+        <p:spPr/>
+        <p:txBody>
+          <a:bodyPr/>
+          <a:lstStyle/>
+          <a:p>
+            <a:r>
+              <a:rPr lang="ko-KR" altLang="en-US" dirty="0"/>
+              <a:t>지금까지 다룬 </a:t>
+            </a:r>
+            <a:r>
+              <a:rPr lang="ko-KR" altLang="en-US" dirty="0" err="1"/>
+              <a:t>벤디트</a:t>
+            </a:r>
+            <a:r>
+              <a:rPr lang="ko-KR" altLang="en-US" dirty="0"/>
+              <a:t> 문제는 정상문제</a:t>
+            </a:r>
+            <a:r>
+              <a:rPr lang="en-US" altLang="ko-KR" dirty="0"/>
+              <a:t>(stationary problem)</a:t>
+            </a:r>
+            <a:r>
+              <a:rPr lang="ko-KR" altLang="en-US" dirty="0"/>
+              <a:t>에 속함</a:t>
+            </a:r>
+            <a:endParaRPr lang="en-US" altLang="ko-KR" dirty="0"/>
+          </a:p>
+          <a:p>
+            <a:pPr lvl="1"/>
+            <a:r>
+              <a:rPr lang="ko-KR" altLang="en-US" dirty="0"/>
+              <a:t>정상문제</a:t>
+            </a:r>
+            <a:r>
+              <a:rPr lang="en-US" altLang="ko-KR" dirty="0"/>
+              <a:t>: </a:t>
+            </a:r>
+            <a:r>
+              <a:rPr lang="ko-KR" altLang="en-US" dirty="0"/>
+              <a:t>보상의 확률분포가 변하지 않는 문제</a:t>
+            </a:r>
+            <a:endParaRPr lang="en-US" altLang="ko-KR" dirty="0"/>
+          </a:p>
+          <a:p>
+            <a:pPr lvl="1"/>
+            <a:r>
+              <a:rPr lang="ko-KR" altLang="en-US" dirty="0"/>
+              <a:t>즉</a:t>
+            </a:r>
+            <a:r>
+              <a:rPr lang="en-US" altLang="ko-KR" dirty="0"/>
+              <a:t>, </a:t>
+            </a:r>
+            <a:r>
+              <a:rPr lang="ko-KR" altLang="en-US" dirty="0"/>
+              <a:t>슬롯머신의 속성은 한번 설정되면 에이전트가 플레이하는 동안 절대 변하지 않음</a:t>
+            </a:r>
+            <a:endParaRPr lang="en-US" altLang="ko-KR" dirty="0"/>
+          </a:p>
+          <a:p>
+            <a:endParaRPr lang="en-US" altLang="ko-KR" dirty="0"/>
+          </a:p>
+          <a:p>
+            <a:endParaRPr lang="ko-KR" altLang="en-US" dirty="0"/>
+          </a:p>
+        </p:txBody>
+      </p:sp>
+      <p:pic>
+        <p:nvPicPr>
+          <p:cNvPr id="5" name="그림 4">
+            <a:extLst>
+              <a:ext uri="{FF2B5EF4-FFF2-40B4-BE49-F238E27FC236}">
+                <a16:creationId xmlns:a16="http://schemas.microsoft.com/office/drawing/2014/main" id="{A657BF9A-207A-4372-D700-AC8D42E6ABE6}"/>
+              </a:ext>
+            </a:extLst>
+          </p:cNvPr>
+          <p:cNvPicPr>
+            <a:picLocks noChangeAspect="1"/>
+          </p:cNvPicPr>
+          <p:nvPr/>
+        </p:nvPicPr>
+        <p:blipFill>
+          <a:blip r:embed="rId2"/>
+          <a:stretch>
+            <a:fillRect/>
+          </a:stretch>
+        </p:blipFill>
+        <p:spPr>
+          <a:xfrm>
+            <a:off x="648568" y="3258740"/>
+            <a:ext cx="5262612" cy="2748320"/>
+          </a:xfrm>
+          <a:prstGeom prst="rect">
+            <a:avLst/>
+          </a:prstGeom>
+        </p:spPr>
+      </p:pic>
+      <p:cxnSp>
+        <p:nvCxnSpPr>
+          <p:cNvPr id="7" name="직선 화살표 연결선 6">
+            <a:extLst>
+              <a:ext uri="{FF2B5EF4-FFF2-40B4-BE49-F238E27FC236}">
+                <a16:creationId xmlns:a16="http://schemas.microsoft.com/office/drawing/2014/main" id="{34F1BFB3-CEE0-B05A-05A6-3ECBE3E7F8FF}"/>
+              </a:ext>
+            </a:extLst>
+          </p:cNvPr>
+          <p:cNvCxnSpPr>
+            <a:cxnSpLocks/>
+          </p:cNvCxnSpPr>
+          <p:nvPr/>
+        </p:nvCxnSpPr>
+        <p:spPr>
+          <a:xfrm flipH="1">
+            <a:off x="3592286" y="2627086"/>
+            <a:ext cx="1640114" cy="1952171"/>
+          </a:xfrm>
+          <a:prstGeom prst="straightConnector1">
+            <a:avLst/>
+          </a:prstGeom>
+          <a:ln w="28575">
+            <a:solidFill>
+              <a:srgbClr val="FF0000"/>
+            </a:solidFill>
+            <a:tailEnd type="triangle"/>
+          </a:ln>
+        </p:spPr>
+        <p:style>
+          <a:lnRef idx="1">
+            <a:schemeClr val="accent1"/>
+          </a:lnRef>
+          <a:fillRef idx="0">
+            <a:schemeClr val="accent1"/>
+          </a:fillRef>
+          <a:effectRef idx="0">
+            <a:schemeClr val="accent1"/>
+          </a:effectRef>
+          <a:fontRef idx="minor">
+            <a:schemeClr val="tx1"/>
+          </a:fontRef>
+        </p:style>
+      </p:cxnSp>
+      <p:cxnSp>
+        <p:nvCxnSpPr>
+          <p:cNvPr id="10" name="직선 연결선 9">
+            <a:extLst>
+              <a:ext uri="{FF2B5EF4-FFF2-40B4-BE49-F238E27FC236}">
+                <a16:creationId xmlns:a16="http://schemas.microsoft.com/office/drawing/2014/main" id="{13C8CBEF-D167-09F8-4690-AD764F9B990C}"/>
+              </a:ext>
+            </a:extLst>
+          </p:cNvPr>
+          <p:cNvCxnSpPr/>
+          <p:nvPr/>
+        </p:nvCxnSpPr>
+        <p:spPr>
+          <a:xfrm>
+            <a:off x="1277257" y="4632900"/>
+            <a:ext cx="2307772" cy="0"/>
+          </a:xfrm>
+          <a:prstGeom prst="line">
+            <a:avLst/>
+          </a:prstGeom>
+          <a:ln w="19050">
+            <a:solidFill>
+              <a:srgbClr val="FF0000"/>
+            </a:solidFill>
+          </a:ln>
+        </p:spPr>
+        <p:style>
+          <a:lnRef idx="1">
+            <a:schemeClr val="accent1"/>
+          </a:lnRef>
+          <a:fillRef idx="0">
+            <a:schemeClr val="accent1"/>
+          </a:fillRef>
+          <a:effectRef idx="0">
+            <a:schemeClr val="accent1"/>
+          </a:effectRef>
+          <a:fontRef idx="minor">
+            <a:schemeClr val="tx1"/>
+          </a:fontRef>
+        </p:style>
+      </p:cxnSp>
+      <p:sp>
+        <p:nvSpPr>
+          <p:cNvPr id="11" name="슬라이드 번호 개체 틀 10">
+            <a:extLst>
+              <a:ext uri="{FF2B5EF4-FFF2-40B4-BE49-F238E27FC236}">
+                <a16:creationId xmlns:a16="http://schemas.microsoft.com/office/drawing/2014/main" id="{4A6DC227-52C6-10CD-99AF-6D3FCC3DD5FC}"/>
+              </a:ext>
+            </a:extLst>
+          </p:cNvPr>
+          <p:cNvSpPr>
+            <a:spLocks noGrp="1"/>
+          </p:cNvSpPr>
+          <p:nvPr>
+            <p:ph type="sldNum" sz="quarter" idx="12"/>
+          </p:nvPr>
+        </p:nvSpPr>
+        <p:spPr/>
+        <p:txBody>
+          <a:bodyPr/>
+          <a:lstStyle/>
+          <a:p>
+            <a:fld id="{B4844BEB-34CB-469D-8313-83BA6B52212E}" type="slidenum">
+              <a:rPr lang="ko-KR" altLang="en-US" smtClean="0"/>
+              <a:t>19</a:t>
+            </a:fld>
+            <a:endParaRPr lang="ko-KR" altLang="en-US"/>
+          </a:p>
+        </p:txBody>
+      </p:sp>
+    </p:spTree>
+    <p:extLst>
+      <p:ext uri="{BB962C8B-B14F-4D97-AF65-F5344CB8AC3E}">
+        <p14:creationId xmlns:p14="http://schemas.microsoft.com/office/powerpoint/2010/main" val="4100153947"/>
       </p:ext>
     </p:extLst>
   </p:cSld>
@@ -8316,10 +9447,3816 @@
           </a:prstGeom>
         </p:spPr>
       </p:pic>
+      <p:sp>
+        <p:nvSpPr>
+          <p:cNvPr id="4" name="슬라이드 번호 개체 틀 3">
+            <a:extLst>
+              <a:ext uri="{FF2B5EF4-FFF2-40B4-BE49-F238E27FC236}">
+                <a16:creationId xmlns:a16="http://schemas.microsoft.com/office/drawing/2014/main" id="{33DFEC09-9657-3A51-2383-A99C6D9AC9E8}"/>
+              </a:ext>
+            </a:extLst>
+          </p:cNvPr>
+          <p:cNvSpPr>
+            <a:spLocks noGrp="1"/>
+          </p:cNvSpPr>
+          <p:nvPr>
+            <p:ph type="sldNum" sz="quarter" idx="12"/>
+          </p:nvPr>
+        </p:nvSpPr>
+        <p:spPr/>
+        <p:txBody>
+          <a:bodyPr/>
+          <a:lstStyle/>
+          <a:p>
+            <a:fld id="{B4844BEB-34CB-469D-8313-83BA6B52212E}" type="slidenum">
+              <a:rPr lang="ko-KR" altLang="en-US" smtClean="0"/>
+              <a:t>2</a:t>
+            </a:fld>
+            <a:endParaRPr lang="ko-KR" altLang="en-US"/>
+          </a:p>
+        </p:txBody>
+      </p:sp>
     </p:spTree>
     <p:extLst>
       <p:ext uri="{BB962C8B-B14F-4D97-AF65-F5344CB8AC3E}">
         <p14:creationId xmlns:p14="http://schemas.microsoft.com/office/powerpoint/2010/main" val="1438142927"/>
+      </p:ext>
+    </p:extLst>
+  </p:cSld>
+  <p:clrMapOvr>
+    <a:masterClrMapping/>
+  </p:clrMapOvr>
+</p:sld>
+</file>
+
+<file path=ppt/slides/slide20.xml><?xml version="1.0" encoding="utf-8"?>
+<p:sld xmlns:a="http://schemas.openxmlformats.org/drawingml/2006/main" xmlns:r="http://schemas.openxmlformats.org/officeDocument/2006/relationships" xmlns:p="http://schemas.openxmlformats.org/presentationml/2006/main">
+  <p:cSld>
+    <p:spTree>
+      <p:nvGrpSpPr>
+        <p:cNvPr id="1" name=""/>
+        <p:cNvGrpSpPr/>
+        <p:nvPr/>
+      </p:nvGrpSpPr>
+      <p:grpSpPr>
+        <a:xfrm>
+          <a:off x="0" y="0"/>
+          <a:ext cx="0" cy="0"/>
+          <a:chOff x="0" y="0"/>
+          <a:chExt cx="0" cy="0"/>
+        </a:xfrm>
+      </p:grpSpPr>
+      <p:sp>
+        <p:nvSpPr>
+          <p:cNvPr id="2" name="제목 1">
+            <a:extLst>
+              <a:ext uri="{FF2B5EF4-FFF2-40B4-BE49-F238E27FC236}">
+                <a16:creationId xmlns:a16="http://schemas.microsoft.com/office/drawing/2014/main" id="{68238A35-71C3-9784-149D-617F405A9C1A}"/>
+              </a:ext>
+            </a:extLst>
+          </p:cNvPr>
+          <p:cNvSpPr>
+            <a:spLocks noGrp="1"/>
+          </p:cNvSpPr>
+          <p:nvPr>
+            <p:ph type="title"/>
+          </p:nvPr>
+        </p:nvSpPr>
+        <p:spPr/>
+        <p:txBody>
+          <a:bodyPr/>
+          <a:lstStyle/>
+          <a:p>
+            <a:r>
+              <a:rPr lang="ko-KR" altLang="en-US" dirty="0"/>
+              <a:t>비정상 문제</a:t>
+            </a:r>
+          </a:p>
+        </p:txBody>
+      </p:sp>
+      <p:sp>
+        <p:nvSpPr>
+          <p:cNvPr id="3" name="내용 개체 틀 2">
+            <a:extLst>
+              <a:ext uri="{FF2B5EF4-FFF2-40B4-BE49-F238E27FC236}">
+                <a16:creationId xmlns:a16="http://schemas.microsoft.com/office/drawing/2014/main" id="{6E1D7D49-D72C-B7CF-02B9-16925C46A684}"/>
+              </a:ext>
+            </a:extLst>
+          </p:cNvPr>
+          <p:cNvSpPr>
+            <a:spLocks noGrp="1"/>
+          </p:cNvSpPr>
+          <p:nvPr>
+            <p:ph idx="1"/>
+          </p:nvPr>
+        </p:nvSpPr>
+        <p:spPr/>
+        <p:txBody>
+          <a:bodyPr/>
+          <a:lstStyle/>
+          <a:p>
+            <a:pPr algn="just">
+              <a:lnSpc>
+                <a:spcPct val="100000"/>
+              </a:lnSpc>
+            </a:pPr>
+            <a:r>
+              <a:rPr lang="en-US" altLang="ko-KR" dirty="0"/>
+              <a:t>Bandit </a:t>
+            </a:r>
+            <a:r>
+              <a:rPr lang="ko-KR" altLang="en-US" dirty="0"/>
+              <a:t>클래스에 코드를 한 줄 추가하여 플레이할 때마다 </a:t>
+            </a:r>
+            <a:r>
+              <a:rPr lang="en-US" altLang="ko-KR" dirty="0" err="1"/>
+              <a:t>self.rates</a:t>
+            </a:r>
+            <a:r>
+              <a:rPr lang="ko-KR" altLang="en-US" dirty="0"/>
+              <a:t>에 작은 노이즈를 추가</a:t>
+            </a:r>
+          </a:p>
+        </p:txBody>
+      </p:sp>
+      <p:pic>
+        <p:nvPicPr>
+          <p:cNvPr id="5" name="그림 4">
+            <a:extLst>
+              <a:ext uri="{FF2B5EF4-FFF2-40B4-BE49-F238E27FC236}">
+                <a16:creationId xmlns:a16="http://schemas.microsoft.com/office/drawing/2014/main" id="{D6591737-801F-0141-2D9E-467AD1060C79}"/>
+              </a:ext>
+            </a:extLst>
+          </p:cNvPr>
+          <p:cNvPicPr>
+            <a:picLocks noChangeAspect="1"/>
+          </p:cNvPicPr>
+          <p:nvPr/>
+        </p:nvPicPr>
+        <p:blipFill>
+          <a:blip r:embed="rId2"/>
+          <a:stretch>
+            <a:fillRect/>
+          </a:stretch>
+        </p:blipFill>
+        <p:spPr>
+          <a:xfrm>
+            <a:off x="396749" y="2006788"/>
+            <a:ext cx="6305354" cy="2746887"/>
+          </a:xfrm>
+          <a:prstGeom prst="rect">
+            <a:avLst/>
+          </a:prstGeom>
+        </p:spPr>
+      </p:pic>
+      <p:pic>
+        <p:nvPicPr>
+          <p:cNvPr id="7" name="그림 6">
+            <a:extLst>
+              <a:ext uri="{FF2B5EF4-FFF2-40B4-BE49-F238E27FC236}">
+                <a16:creationId xmlns:a16="http://schemas.microsoft.com/office/drawing/2014/main" id="{3166ED38-DEE1-F067-B270-8DA173C784D9}"/>
+              </a:ext>
+            </a:extLst>
+          </p:cNvPr>
+          <p:cNvPicPr>
+            <a:picLocks noChangeAspect="1"/>
+          </p:cNvPicPr>
+          <p:nvPr/>
+        </p:nvPicPr>
+        <p:blipFill>
+          <a:blip r:embed="rId3"/>
+          <a:stretch>
+            <a:fillRect/>
+          </a:stretch>
+        </p:blipFill>
+        <p:spPr>
+          <a:xfrm>
+            <a:off x="3305024" y="5056661"/>
+            <a:ext cx="5391427" cy="1295467"/>
+          </a:xfrm>
+          <a:prstGeom prst="rect">
+            <a:avLst/>
+          </a:prstGeom>
+        </p:spPr>
+      </p:pic>
+      <p:sp>
+        <p:nvSpPr>
+          <p:cNvPr id="8" name="슬라이드 번호 개체 틀 7">
+            <a:extLst>
+              <a:ext uri="{FF2B5EF4-FFF2-40B4-BE49-F238E27FC236}">
+                <a16:creationId xmlns:a16="http://schemas.microsoft.com/office/drawing/2014/main" id="{5C2E8019-D610-7F13-1690-203E4FA72955}"/>
+              </a:ext>
+            </a:extLst>
+          </p:cNvPr>
+          <p:cNvSpPr>
+            <a:spLocks noGrp="1"/>
+          </p:cNvSpPr>
+          <p:nvPr>
+            <p:ph type="sldNum" sz="quarter" idx="12"/>
+          </p:nvPr>
+        </p:nvSpPr>
+        <p:spPr/>
+        <p:txBody>
+          <a:bodyPr/>
+          <a:lstStyle/>
+          <a:p>
+            <a:fld id="{B4844BEB-34CB-469D-8313-83BA6B52212E}" type="slidenum">
+              <a:rPr lang="ko-KR" altLang="en-US" smtClean="0"/>
+              <a:t>20</a:t>
+            </a:fld>
+            <a:endParaRPr lang="ko-KR" altLang="en-US"/>
+          </a:p>
+        </p:txBody>
+      </p:sp>
+    </p:spTree>
+    <p:extLst>
+      <p:ext uri="{BB962C8B-B14F-4D97-AF65-F5344CB8AC3E}">
+        <p14:creationId xmlns:p14="http://schemas.microsoft.com/office/powerpoint/2010/main" val="3505629530"/>
+      </p:ext>
+    </p:extLst>
+  </p:cSld>
+  <p:clrMapOvr>
+    <a:masterClrMapping/>
+  </p:clrMapOvr>
+</p:sld>
+</file>
+
+<file path=ppt/slides/slide21.xml><?xml version="1.0" encoding="utf-8"?>
+<p:sld xmlns:a="http://schemas.openxmlformats.org/drawingml/2006/main" xmlns:r="http://schemas.openxmlformats.org/officeDocument/2006/relationships" xmlns:p="http://schemas.openxmlformats.org/presentationml/2006/main">
+  <p:cSld>
+    <p:spTree>
+      <p:nvGrpSpPr>
+        <p:cNvPr id="1" name=""/>
+        <p:cNvGrpSpPr/>
+        <p:nvPr/>
+      </p:nvGrpSpPr>
+      <p:grpSpPr>
+        <a:xfrm>
+          <a:off x="0" y="0"/>
+          <a:ext cx="0" cy="0"/>
+          <a:chOff x="0" y="0"/>
+          <a:chExt cx="0" cy="0"/>
+        </a:xfrm>
+      </p:grpSpPr>
+      <p:sp>
+        <p:nvSpPr>
+          <p:cNvPr id="2" name="제목 1">
+            <a:extLst>
+              <a:ext uri="{FF2B5EF4-FFF2-40B4-BE49-F238E27FC236}">
+                <a16:creationId xmlns:a16="http://schemas.microsoft.com/office/drawing/2014/main" id="{11DE5F32-51FC-51D1-A1F4-7D52E14F22BE}"/>
+              </a:ext>
+            </a:extLst>
+          </p:cNvPr>
+          <p:cNvSpPr>
+            <a:spLocks noGrp="1"/>
+          </p:cNvSpPr>
+          <p:nvPr>
+            <p:ph type="title"/>
+          </p:nvPr>
+        </p:nvSpPr>
+        <p:spPr/>
+        <p:txBody>
+          <a:bodyPr/>
+          <a:lstStyle/>
+          <a:p>
+            <a:r>
+              <a:rPr lang="ko-KR" altLang="en-US" dirty="0"/>
+              <a:t>정상 문제 복습</a:t>
+            </a:r>
+          </a:p>
+        </p:txBody>
+      </p:sp>
+      <mc:AlternateContent xmlns:mc="http://schemas.openxmlformats.org/markup-compatibility/2006">
+        <mc:Choice xmlns:a14="http://schemas.microsoft.com/office/drawing/2010/main" Requires="a14">
+          <p:sp>
+            <p:nvSpPr>
+              <p:cNvPr id="3" name="내용 개체 틀 2">
+                <a:extLst>
+                  <a:ext uri="{FF2B5EF4-FFF2-40B4-BE49-F238E27FC236}">
+                    <a16:creationId xmlns:a16="http://schemas.microsoft.com/office/drawing/2014/main" id="{694670B1-0006-A491-5C91-D4A69B3943A8}"/>
+                  </a:ext>
+                </a:extLst>
+              </p:cNvPr>
+              <p:cNvSpPr>
+                <a:spLocks noGrp="1"/>
+              </p:cNvSpPr>
+              <p:nvPr>
+                <p:ph idx="1"/>
+              </p:nvPr>
+            </p:nvSpPr>
+            <p:spPr/>
+            <p:txBody>
+              <a:bodyPr>
+                <a:normAutofit/>
+              </a:bodyPr>
+              <a:lstStyle/>
+              <a:p>
+                <a:pPr algn="just">
+                  <a:lnSpc>
+                    <a:spcPct val="110000"/>
+                  </a:lnSpc>
+                </a:pPr>
+                <a:r>
+                  <a:rPr lang="ko-KR" altLang="en-US" dirty="0"/>
+                  <a:t>슬롯머신의 가치를 추정</a:t>
+                </a:r>
+                <a:r>
+                  <a:rPr lang="en-US" altLang="ko-KR" dirty="0"/>
+                  <a:t>: </a:t>
+                </a:r>
+                <a:r>
+                  <a:rPr lang="ko-KR" altLang="en-US" dirty="0"/>
+                  <a:t>보상의 평균</a:t>
+                </a:r>
+                <a:endParaRPr lang="en-US" altLang="ko-KR" dirty="0"/>
+              </a:p>
+              <a:p>
+                <a:pPr algn="just">
+                  <a:lnSpc>
+                    <a:spcPct val="110000"/>
+                  </a:lnSpc>
+                </a:pPr>
+                <a:endParaRPr lang="en-US" altLang="ko-KR" dirty="0"/>
+              </a:p>
+              <a:p>
+                <a:pPr algn="just">
+                  <a:lnSpc>
+                    <a:spcPct val="110000"/>
+                  </a:lnSpc>
+                </a:pPr>
+                <a:endParaRPr lang="en-US" altLang="ko-KR" dirty="0"/>
+              </a:p>
+              <a:p>
+                <a:pPr algn="just">
+                  <a:lnSpc>
+                    <a:spcPct val="110000"/>
+                  </a:lnSpc>
+                </a:pPr>
+                <a14:m>
+                  <m:oMath xmlns:m="http://schemas.openxmlformats.org/officeDocument/2006/math">
+                    <m:f>
+                      <m:fPr>
+                        <m:ctrlPr>
+                          <a:rPr lang="en-US" altLang="ko-KR" i="1">
+                            <a:latin typeface="Cambria Math" panose="02040503050406030204" pitchFamily="18" charset="0"/>
+                          </a:rPr>
+                        </m:ctrlPr>
+                      </m:fPr>
+                      <m:num>
+                        <m:r>
+                          <a:rPr lang="en-US" altLang="ko-KR" i="1">
+                            <a:latin typeface="Cambria Math" panose="02040503050406030204" pitchFamily="18" charset="0"/>
+                          </a:rPr>
+                          <m:t>1</m:t>
+                        </m:r>
+                      </m:num>
+                      <m:den>
+                        <m:r>
+                          <a:rPr lang="en-US" altLang="ko-KR" i="1">
+                            <a:latin typeface="Cambria Math" panose="02040503050406030204" pitchFamily="18" charset="0"/>
+                          </a:rPr>
+                          <m:t>𝑛</m:t>
+                        </m:r>
+                      </m:den>
+                    </m:f>
+                    <m:r>
+                      <a:rPr lang="en-US" altLang="ko-KR" i="1">
+                        <a:latin typeface="Cambria Math" panose="02040503050406030204" pitchFamily="18" charset="0"/>
+                      </a:rPr>
+                      <m:t> </m:t>
+                    </m:r>
+                  </m:oMath>
+                </a14:m>
+                <a:r>
+                  <a:rPr lang="ko-KR" altLang="en-US" dirty="0"/>
+                  <a:t>을 각 보상에 대한 </a:t>
+                </a:r>
+                <a:r>
+                  <a:rPr lang="en-US" altLang="ko-KR" dirty="0"/>
+                  <a:t>‘</a:t>
+                </a:r>
+                <a:r>
+                  <a:rPr lang="ko-KR" altLang="en-US" dirty="0"/>
+                  <a:t>가중치</a:t>
+                </a:r>
+                <a:r>
+                  <a:rPr lang="en-US" altLang="ko-KR" dirty="0"/>
+                  <a:t>’</a:t>
+                </a:r>
+                <a:r>
+                  <a:rPr lang="ko-KR" altLang="en-US" dirty="0"/>
+                  <a:t>로 볼 수 있음</a:t>
+                </a:r>
+                <a:endParaRPr lang="en-US" altLang="ko-KR" dirty="0"/>
+              </a:p>
+            </p:txBody>
+          </p:sp>
+        </mc:Choice>
+        <mc:Fallback>
+          <p:sp>
+            <p:nvSpPr>
+              <p:cNvPr id="3" name="내용 개체 틀 2">
+                <a:extLst>
+                  <a:ext uri="{FF2B5EF4-FFF2-40B4-BE49-F238E27FC236}">
+                    <a16:creationId xmlns:a16="http://schemas.microsoft.com/office/drawing/2014/main" id="{694670B1-0006-A491-5C91-D4A69B3943A8}"/>
+                  </a:ext>
+                </a:extLst>
+              </p:cNvPr>
+              <p:cNvSpPr>
+                <a:spLocks noGrp="1" noRot="1" noChangeAspect="1" noMove="1" noResize="1" noEditPoints="1" noAdjustHandles="1" noChangeArrowheads="1" noChangeShapeType="1" noTextEdit="1"/>
+              </p:cNvSpPr>
+              <p:nvPr>
+                <p:ph idx="1"/>
+              </p:nvPr>
+            </p:nvSpPr>
+            <p:spPr>
+              <a:blipFill>
+                <a:blip r:embed="rId2"/>
+                <a:stretch>
+                  <a:fillRect l="-1240" t="-1039"/>
+                </a:stretch>
+              </a:blipFill>
+            </p:spPr>
+            <p:txBody>
+              <a:bodyPr/>
+              <a:lstStyle/>
+              <a:p>
+                <a:r>
+                  <a:rPr lang="ko-KR" altLang="en-US">
+                    <a:noFill/>
+                  </a:rPr>
+                  <a:t> </a:t>
+                </a:r>
+              </a:p>
+            </p:txBody>
+          </p:sp>
+        </mc:Fallback>
+      </mc:AlternateContent>
+      <mc:AlternateContent xmlns:mc="http://schemas.openxmlformats.org/markup-compatibility/2006">
+        <mc:Choice xmlns:a14="http://schemas.microsoft.com/office/drawing/2010/main" Requires="a14">
+          <p:sp>
+            <p:nvSpPr>
+              <p:cNvPr id="5" name="TextBox 4">
+                <a:extLst>
+                  <a:ext uri="{FF2B5EF4-FFF2-40B4-BE49-F238E27FC236}">
+                    <a16:creationId xmlns:a16="http://schemas.microsoft.com/office/drawing/2014/main" id="{AD2A2288-990F-3B1B-5445-59540EDD767F}"/>
+                  </a:ext>
+                </a:extLst>
+              </p:cNvPr>
+              <p:cNvSpPr txBox="1"/>
+              <p:nvPr/>
+            </p:nvSpPr>
+            <p:spPr>
+              <a:xfrm>
+                <a:off x="1818117" y="1600275"/>
+                <a:ext cx="4619002" cy="1153329"/>
+              </a:xfrm>
+              <a:prstGeom prst="rect">
+                <a:avLst/>
+              </a:prstGeom>
+              <a:noFill/>
+            </p:spPr>
+            <p:txBody>
+              <a:bodyPr wrap="square">
+                <a:spAutoFit/>
+              </a:bodyPr>
+              <a:lstStyle/>
+              <a:p>
+                <a:pPr/>
+                <a14:m>
+                  <m:oMathPara xmlns:m="http://schemas.openxmlformats.org/officeDocument/2006/math">
+                    <m:oMath>
+                      <m:sSub>
+                        <m:sSubPr>
+                          <m:ctrlPr>
+                            <a:rPr lang="en-US" altLang="ko-KR" b="0" i="1" smtClean="0">
+                              <a:latin typeface="Cambria Math" panose="02040503050406030204" pitchFamily="18" charset="0"/>
+                            </a:rPr>
+                          </m:ctrlPr>
+                        </m:sSubPr>
+                        <m:e>
+                          <m:r>
+                            <a:rPr lang="en-US" altLang="ko-KR" b="0" i="1" smtClean="0">
+                              <a:latin typeface="Cambria Math" panose="02040503050406030204" pitchFamily="18" charset="0"/>
+                            </a:rPr>
+                            <m:t>𝑄</m:t>
+                          </m:r>
+                        </m:e>
+                        <m:sub>
+                          <m:r>
+                            <a:rPr lang="en-US" altLang="ko-KR" b="0" i="1" smtClean="0">
+                              <a:latin typeface="Cambria Math" panose="02040503050406030204" pitchFamily="18" charset="0"/>
+                            </a:rPr>
+                            <m:t>𝑛</m:t>
+                          </m:r>
+                        </m:sub>
+                      </m:sSub>
+                      <m:r>
+                        <a:rPr lang="en-US" altLang="ko-KR" i="1">
+                          <a:latin typeface="Cambria Math" panose="02040503050406030204" pitchFamily="18" charset="0"/>
+                        </a:rPr>
+                        <m:t>=</m:t>
+                      </m:r>
+                      <m:f>
+                        <m:fPr>
+                          <m:ctrlPr>
+                            <a:rPr lang="en-US" altLang="ko-KR" b="0" i="1" smtClean="0">
+                              <a:latin typeface="Cambria Math" panose="02040503050406030204" pitchFamily="18" charset="0"/>
+                            </a:rPr>
+                          </m:ctrlPr>
+                        </m:fPr>
+                        <m:num>
+                          <m:sSub>
+                            <m:sSubPr>
+                              <m:ctrlPr>
+                                <a:rPr lang="en-US" altLang="ko-KR" b="0" i="1" smtClean="0">
+                                  <a:latin typeface="Cambria Math" panose="02040503050406030204" pitchFamily="18" charset="0"/>
+                                </a:rPr>
+                              </m:ctrlPr>
+                            </m:sSubPr>
+                            <m:e>
+                              <m:r>
+                                <a:rPr lang="en-US" altLang="ko-KR" b="0" i="1" smtClean="0">
+                                  <a:latin typeface="Cambria Math" panose="02040503050406030204" pitchFamily="18" charset="0"/>
+                                </a:rPr>
+                                <m:t>𝑅</m:t>
+                              </m:r>
+                            </m:e>
+                            <m:sub>
+                              <m:r>
+                                <a:rPr lang="en-US" altLang="ko-KR" b="0" i="1" smtClean="0">
+                                  <a:latin typeface="Cambria Math" panose="02040503050406030204" pitchFamily="18" charset="0"/>
+                                </a:rPr>
+                                <m:t>1</m:t>
+                              </m:r>
+                            </m:sub>
+                          </m:sSub>
+                          <m:r>
+                            <a:rPr lang="en-US" altLang="ko-KR" i="1">
+                              <a:latin typeface="Cambria Math" panose="02040503050406030204" pitchFamily="18" charset="0"/>
+                            </a:rPr>
+                            <m:t>+</m:t>
+                          </m:r>
+                          <m:sSub>
+                            <m:sSubPr>
+                              <m:ctrlPr>
+                                <a:rPr lang="en-US" altLang="ko-KR" i="1">
+                                  <a:latin typeface="Cambria Math" panose="02040503050406030204" pitchFamily="18" charset="0"/>
+                                </a:rPr>
+                              </m:ctrlPr>
+                            </m:sSubPr>
+                            <m:e>
+                              <m:r>
+                                <a:rPr lang="en-US" altLang="ko-KR" i="1">
+                                  <a:latin typeface="Cambria Math" panose="02040503050406030204" pitchFamily="18" charset="0"/>
+                                </a:rPr>
+                                <m:t>𝑅</m:t>
+                              </m:r>
+                            </m:e>
+                            <m:sub>
+                              <m:r>
+                                <a:rPr lang="en-US" altLang="ko-KR" b="0" i="1" smtClean="0">
+                                  <a:latin typeface="Cambria Math" panose="02040503050406030204" pitchFamily="18" charset="0"/>
+                                </a:rPr>
+                                <m:t>2</m:t>
+                              </m:r>
+                            </m:sub>
+                          </m:sSub>
+                          <m:r>
+                            <a:rPr lang="en-US" altLang="ko-KR" i="1">
+                              <a:latin typeface="Cambria Math" panose="02040503050406030204" pitchFamily="18" charset="0"/>
+                            </a:rPr>
+                            <m:t>+</m:t>
+                          </m:r>
+                          <m:r>
+                            <a:rPr lang="en-US" altLang="ko-KR" b="0" i="1" smtClean="0">
+                              <a:latin typeface="Cambria Math" panose="02040503050406030204" pitchFamily="18" charset="0"/>
+                            </a:rPr>
+                            <m:t>…+</m:t>
+                          </m:r>
+                          <m:sSub>
+                            <m:sSubPr>
+                              <m:ctrlPr>
+                                <a:rPr lang="en-US" altLang="ko-KR" i="1">
+                                  <a:latin typeface="Cambria Math" panose="02040503050406030204" pitchFamily="18" charset="0"/>
+                                </a:rPr>
+                              </m:ctrlPr>
+                            </m:sSubPr>
+                            <m:e>
+                              <m:r>
+                                <a:rPr lang="en-US" altLang="ko-KR" i="1">
+                                  <a:latin typeface="Cambria Math" panose="02040503050406030204" pitchFamily="18" charset="0"/>
+                                </a:rPr>
+                                <m:t>𝑅</m:t>
+                              </m:r>
+                            </m:e>
+                            <m:sub>
+                              <m:r>
+                                <a:rPr lang="en-US" altLang="ko-KR" b="0" i="1" smtClean="0">
+                                  <a:latin typeface="Cambria Math" panose="02040503050406030204" pitchFamily="18" charset="0"/>
+                                </a:rPr>
+                                <m:t>𝑛</m:t>
+                              </m:r>
+                            </m:sub>
+                          </m:sSub>
+                        </m:num>
+                        <m:den>
+                          <m:r>
+                            <a:rPr lang="en-US" altLang="ko-KR" b="0" i="1" smtClean="0">
+                              <a:latin typeface="Cambria Math" panose="02040503050406030204" pitchFamily="18" charset="0"/>
+                            </a:rPr>
+                            <m:t>𝑛</m:t>
+                          </m:r>
+                        </m:den>
+                      </m:f>
+                      <m:r>
+                        <a:rPr lang="en-US" altLang="ko-KR" b="0" i="1" smtClean="0">
+                          <a:latin typeface="Cambria Math" panose="02040503050406030204" pitchFamily="18" charset="0"/>
+                        </a:rPr>
+                        <m:t>=</m:t>
+                      </m:r>
+                      <m:f>
+                        <m:fPr>
+                          <m:ctrlPr>
+                            <a:rPr lang="en-US" altLang="ko-KR" b="0" i="1" smtClean="0">
+                              <a:latin typeface="Cambria Math" panose="02040503050406030204" pitchFamily="18" charset="0"/>
+                            </a:rPr>
+                          </m:ctrlPr>
+                        </m:fPr>
+                        <m:num>
+                          <m:r>
+                            <a:rPr lang="en-US" altLang="ko-KR" b="0" i="1" smtClean="0">
+                              <a:latin typeface="Cambria Math" panose="02040503050406030204" pitchFamily="18" charset="0"/>
+                            </a:rPr>
+                            <m:t>1</m:t>
+                          </m:r>
+                        </m:num>
+                        <m:den>
+                          <m:r>
+                            <a:rPr lang="en-US" altLang="ko-KR" b="0" i="1" smtClean="0">
+                              <a:latin typeface="Cambria Math" panose="02040503050406030204" pitchFamily="18" charset="0"/>
+                            </a:rPr>
+                            <m:t>𝑛</m:t>
+                          </m:r>
+                        </m:den>
+                      </m:f>
+                      <m:sSub>
+                        <m:sSubPr>
+                          <m:ctrlPr>
+                            <a:rPr lang="en-US" altLang="ko-KR" i="1">
+                              <a:latin typeface="Cambria Math" panose="02040503050406030204" pitchFamily="18" charset="0"/>
+                            </a:rPr>
+                          </m:ctrlPr>
+                        </m:sSubPr>
+                        <m:e>
+                          <m:r>
+                            <a:rPr lang="en-US" altLang="ko-KR" i="1">
+                              <a:latin typeface="Cambria Math" panose="02040503050406030204" pitchFamily="18" charset="0"/>
+                            </a:rPr>
+                            <m:t>𝑅</m:t>
+                          </m:r>
+                        </m:e>
+                        <m:sub>
+                          <m:r>
+                            <a:rPr lang="en-US" altLang="ko-KR" i="1">
+                              <a:latin typeface="Cambria Math" panose="02040503050406030204" pitchFamily="18" charset="0"/>
+                            </a:rPr>
+                            <m:t>1</m:t>
+                          </m:r>
+                        </m:sub>
+                      </m:sSub>
+                      <m:r>
+                        <a:rPr lang="en-US" altLang="ko-KR" i="1">
+                          <a:latin typeface="Cambria Math" panose="02040503050406030204" pitchFamily="18" charset="0"/>
+                        </a:rPr>
+                        <m:t>+</m:t>
+                      </m:r>
+                      <m:f>
+                        <m:fPr>
+                          <m:ctrlPr>
+                            <a:rPr lang="en-US" altLang="ko-KR" i="1">
+                              <a:latin typeface="Cambria Math" panose="02040503050406030204" pitchFamily="18" charset="0"/>
+                            </a:rPr>
+                          </m:ctrlPr>
+                        </m:fPr>
+                        <m:num>
+                          <m:r>
+                            <a:rPr lang="en-US" altLang="ko-KR" i="1">
+                              <a:latin typeface="Cambria Math" panose="02040503050406030204" pitchFamily="18" charset="0"/>
+                            </a:rPr>
+                            <m:t>1</m:t>
+                          </m:r>
+                        </m:num>
+                        <m:den>
+                          <m:r>
+                            <a:rPr lang="en-US" altLang="ko-KR" i="1">
+                              <a:latin typeface="Cambria Math" panose="02040503050406030204" pitchFamily="18" charset="0"/>
+                            </a:rPr>
+                            <m:t>𝑛</m:t>
+                          </m:r>
+                        </m:den>
+                      </m:f>
+                      <m:sSub>
+                        <m:sSubPr>
+                          <m:ctrlPr>
+                            <a:rPr lang="en-US" altLang="ko-KR" i="1">
+                              <a:latin typeface="Cambria Math" panose="02040503050406030204" pitchFamily="18" charset="0"/>
+                            </a:rPr>
+                          </m:ctrlPr>
+                        </m:sSubPr>
+                        <m:e>
+                          <m:r>
+                            <a:rPr lang="en-US" altLang="ko-KR" i="1">
+                              <a:latin typeface="Cambria Math" panose="02040503050406030204" pitchFamily="18" charset="0"/>
+                            </a:rPr>
+                            <m:t>𝑅</m:t>
+                          </m:r>
+                        </m:e>
+                        <m:sub>
+                          <m:r>
+                            <a:rPr lang="en-US" altLang="ko-KR" i="1">
+                              <a:latin typeface="Cambria Math" panose="02040503050406030204" pitchFamily="18" charset="0"/>
+                            </a:rPr>
+                            <m:t>2</m:t>
+                          </m:r>
+                        </m:sub>
+                      </m:sSub>
+                      <m:r>
+                        <a:rPr lang="en-US" altLang="ko-KR" i="1">
+                          <a:latin typeface="Cambria Math" panose="02040503050406030204" pitchFamily="18" charset="0"/>
+                        </a:rPr>
+                        <m:t>+</m:t>
+                      </m:r>
+                      <m:r>
+                        <a:rPr lang="en-US" altLang="ko-KR" i="1">
+                          <a:latin typeface="Cambria Math" panose="02040503050406030204" pitchFamily="18" charset="0"/>
+                        </a:rPr>
+                        <m:t>…+</m:t>
+                      </m:r>
+                      <m:f>
+                        <m:fPr>
+                          <m:ctrlPr>
+                            <a:rPr lang="en-US" altLang="ko-KR" i="1">
+                              <a:latin typeface="Cambria Math" panose="02040503050406030204" pitchFamily="18" charset="0"/>
+                            </a:rPr>
+                          </m:ctrlPr>
+                        </m:fPr>
+                        <m:num>
+                          <m:r>
+                            <a:rPr lang="en-US" altLang="ko-KR" i="1">
+                              <a:latin typeface="Cambria Math" panose="02040503050406030204" pitchFamily="18" charset="0"/>
+                            </a:rPr>
+                            <m:t>1</m:t>
+                          </m:r>
+                        </m:num>
+                        <m:den>
+                          <m:r>
+                            <a:rPr lang="en-US" altLang="ko-KR" i="1">
+                              <a:latin typeface="Cambria Math" panose="02040503050406030204" pitchFamily="18" charset="0"/>
+                            </a:rPr>
+                            <m:t>𝑛</m:t>
+                          </m:r>
+                        </m:den>
+                      </m:f>
+                      <m:sSub>
+                        <m:sSubPr>
+                          <m:ctrlPr>
+                            <a:rPr lang="en-US" altLang="ko-KR" i="1">
+                              <a:latin typeface="Cambria Math" panose="02040503050406030204" pitchFamily="18" charset="0"/>
+                            </a:rPr>
+                          </m:ctrlPr>
+                        </m:sSubPr>
+                        <m:e>
+                          <m:r>
+                            <a:rPr lang="en-US" altLang="ko-KR" i="1">
+                              <a:latin typeface="Cambria Math" panose="02040503050406030204" pitchFamily="18" charset="0"/>
+                            </a:rPr>
+                            <m:t>𝑅</m:t>
+                          </m:r>
+                        </m:e>
+                        <m:sub>
+                          <m:r>
+                            <a:rPr lang="en-US" altLang="ko-KR" i="1">
+                              <a:latin typeface="Cambria Math" panose="02040503050406030204" pitchFamily="18" charset="0"/>
+                            </a:rPr>
+                            <m:t>𝑛</m:t>
+                          </m:r>
+                        </m:sub>
+                      </m:sSub>
+                    </m:oMath>
+                  </m:oMathPara>
+                </a14:m>
+                <a:endParaRPr lang="ko-KR" altLang="en-US" dirty="0"/>
+              </a:p>
+            </p:txBody>
+          </p:sp>
+        </mc:Choice>
+        <mc:Fallback>
+          <p:sp>
+            <p:nvSpPr>
+              <p:cNvPr id="5" name="TextBox 4">
+                <a:extLst>
+                  <a:ext uri="{FF2B5EF4-FFF2-40B4-BE49-F238E27FC236}">
+                    <a16:creationId xmlns:a16="http://schemas.microsoft.com/office/drawing/2014/main" id="{AD2A2288-990F-3B1B-5445-59540EDD767F}"/>
+                  </a:ext>
+                </a:extLst>
+              </p:cNvPr>
+              <p:cNvSpPr txBox="1">
+                <a:spLocks noRot="1" noChangeAspect="1" noMove="1" noResize="1" noEditPoints="1" noAdjustHandles="1" noChangeArrowheads="1" noChangeShapeType="1" noTextEdit="1"/>
+              </p:cNvSpPr>
+              <p:nvPr/>
+            </p:nvSpPr>
+            <p:spPr>
+              <a:xfrm>
+                <a:off x="1818117" y="1600275"/>
+                <a:ext cx="4619002" cy="1153329"/>
+              </a:xfrm>
+              <a:prstGeom prst="rect">
+                <a:avLst/>
+              </a:prstGeom>
+              <a:blipFill>
+                <a:blip r:embed="rId3"/>
+                <a:stretch>
+                  <a:fillRect/>
+                </a:stretch>
+              </a:blipFill>
+            </p:spPr>
+            <p:txBody>
+              <a:bodyPr/>
+              <a:lstStyle/>
+              <a:p>
+                <a:r>
+                  <a:rPr lang="ko-KR" altLang="en-US">
+                    <a:noFill/>
+                  </a:rPr>
+                  <a:t> </a:t>
+                </a:r>
+              </a:p>
+            </p:txBody>
+          </p:sp>
+        </mc:Fallback>
+      </mc:AlternateContent>
+      <p:pic>
+        <p:nvPicPr>
+          <p:cNvPr id="7" name="그림 6">
+            <a:extLst>
+              <a:ext uri="{FF2B5EF4-FFF2-40B4-BE49-F238E27FC236}">
+                <a16:creationId xmlns:a16="http://schemas.microsoft.com/office/drawing/2014/main" id="{3E470BB0-D1B3-FD3B-AA6F-76A789450C45}"/>
+              </a:ext>
+            </a:extLst>
+          </p:cNvPr>
+          <p:cNvPicPr>
+            <a:picLocks noChangeAspect="1"/>
+          </p:cNvPicPr>
+          <p:nvPr/>
+        </p:nvPicPr>
+        <p:blipFill>
+          <a:blip r:embed="rId4">
+            <a:extLst>
+              <a:ext uri="{28A0092B-C50C-407E-A947-70E740481C1C}">
+                <a14:useLocalDpi xmlns:a14="http://schemas.microsoft.com/office/drawing/2010/main" val="0"/>
+              </a:ext>
+            </a:extLst>
+          </a:blip>
+          <a:stretch>
+            <a:fillRect/>
+          </a:stretch>
+        </p:blipFill>
+        <p:spPr>
+          <a:xfrm>
+            <a:off x="870571" y="3694670"/>
+            <a:ext cx="3200564" cy="2641736"/>
+          </a:xfrm>
+          <a:prstGeom prst="rect">
+            <a:avLst/>
+          </a:prstGeom>
+        </p:spPr>
+      </p:pic>
+      <p:sp>
+        <p:nvSpPr>
+          <p:cNvPr id="9" name="TextBox 8">
+            <a:extLst>
+              <a:ext uri="{FF2B5EF4-FFF2-40B4-BE49-F238E27FC236}">
+                <a16:creationId xmlns:a16="http://schemas.microsoft.com/office/drawing/2014/main" id="{FF47DA53-79C9-EBC2-D068-FD3A5CE35568}"/>
+              </a:ext>
+            </a:extLst>
+          </p:cNvPr>
+          <p:cNvSpPr txBox="1"/>
+          <p:nvPr/>
+        </p:nvSpPr>
+        <p:spPr>
+          <a:xfrm>
+            <a:off x="4127618" y="3892153"/>
+            <a:ext cx="4619170" cy="2246769"/>
+          </a:xfrm>
+          <a:prstGeom prst="rect">
+            <a:avLst/>
+          </a:prstGeom>
+          <a:noFill/>
+        </p:spPr>
+        <p:txBody>
+          <a:bodyPr wrap="square">
+            <a:spAutoFit/>
+          </a:bodyPr>
+          <a:lstStyle/>
+          <a:p>
+            <a:pPr marL="342900" indent="-342900" algn="just">
+              <a:buFont typeface="Arial" panose="020B0604020202020204" pitchFamily="34" charset="0"/>
+              <a:buChar char="•"/>
+            </a:pPr>
+            <a:r>
+              <a:rPr lang="ko-KR" altLang="en-US" sz="2000" dirty="0"/>
+              <a:t>새로 얻은 보상이든 오래전에 얻은 보상이든 모두 동등하게 취급</a:t>
+            </a:r>
+            <a:endParaRPr lang="en-US" altLang="ko-KR" sz="2000" dirty="0"/>
+          </a:p>
+          <a:p>
+            <a:pPr marL="342900" indent="-342900" algn="just">
+              <a:buFont typeface="Arial" panose="020B0604020202020204" pitchFamily="34" charset="0"/>
+              <a:buChar char="•"/>
+            </a:pPr>
+            <a:endParaRPr lang="en-US" altLang="ko-KR" sz="2000" dirty="0"/>
+          </a:p>
+          <a:p>
+            <a:pPr marL="342900" indent="-342900" algn="just">
+              <a:buFont typeface="Arial" panose="020B0604020202020204" pitchFamily="34" charset="0"/>
+              <a:buChar char="•"/>
+            </a:pPr>
+            <a:r>
+              <a:rPr lang="ko-KR" altLang="en-US" sz="2000" dirty="0"/>
+              <a:t>비정상 문제에서는 시간이 흐르면 환경</a:t>
+            </a:r>
+            <a:r>
+              <a:rPr lang="en-US" altLang="ko-KR" sz="2000" dirty="0"/>
+              <a:t>(</a:t>
+            </a:r>
+            <a:r>
+              <a:rPr lang="ko-KR" altLang="en-US" sz="2000" dirty="0"/>
+              <a:t>슬롯머신</a:t>
+            </a:r>
+            <a:r>
+              <a:rPr lang="en-US" altLang="ko-KR" sz="2000" dirty="0"/>
+              <a:t>)</a:t>
+            </a:r>
+            <a:r>
+              <a:rPr lang="ko-KR" altLang="en-US" sz="2000" dirty="0"/>
+              <a:t>이 변하기 때문에 과거 데이터</a:t>
+            </a:r>
+            <a:r>
+              <a:rPr lang="en-US" altLang="ko-KR" sz="2000" dirty="0"/>
+              <a:t>(</a:t>
+            </a:r>
+            <a:r>
+              <a:rPr lang="ko-KR" altLang="en-US" sz="2000" dirty="0"/>
+              <a:t>보상</a:t>
+            </a:r>
+            <a:r>
+              <a:rPr lang="en-US" altLang="ko-KR" sz="2000" dirty="0"/>
+              <a:t>)</a:t>
+            </a:r>
+            <a:r>
+              <a:rPr lang="ko-KR" altLang="en-US" sz="2000" dirty="0"/>
+              <a:t>의 중요도는 점점 낮아져야 함</a:t>
+            </a:r>
+          </a:p>
+        </p:txBody>
+      </p:sp>
+      <p:sp>
+        <p:nvSpPr>
+          <p:cNvPr id="10" name="슬라이드 번호 개체 틀 9">
+            <a:extLst>
+              <a:ext uri="{FF2B5EF4-FFF2-40B4-BE49-F238E27FC236}">
+                <a16:creationId xmlns:a16="http://schemas.microsoft.com/office/drawing/2014/main" id="{387B9A61-EC59-6B6C-8A4B-A71AED496AB9}"/>
+              </a:ext>
+            </a:extLst>
+          </p:cNvPr>
+          <p:cNvSpPr>
+            <a:spLocks noGrp="1"/>
+          </p:cNvSpPr>
+          <p:nvPr>
+            <p:ph type="sldNum" sz="quarter" idx="12"/>
+          </p:nvPr>
+        </p:nvSpPr>
+        <p:spPr/>
+        <p:txBody>
+          <a:bodyPr/>
+          <a:lstStyle/>
+          <a:p>
+            <a:fld id="{B4844BEB-34CB-469D-8313-83BA6B52212E}" type="slidenum">
+              <a:rPr lang="ko-KR" altLang="en-US" smtClean="0"/>
+              <a:t>21</a:t>
+            </a:fld>
+            <a:endParaRPr lang="ko-KR" altLang="en-US"/>
+          </a:p>
+        </p:txBody>
+      </p:sp>
+    </p:spTree>
+    <p:extLst>
+      <p:ext uri="{BB962C8B-B14F-4D97-AF65-F5344CB8AC3E}">
+        <p14:creationId xmlns:p14="http://schemas.microsoft.com/office/powerpoint/2010/main" val="3601759446"/>
+      </p:ext>
+    </p:extLst>
+  </p:cSld>
+  <p:clrMapOvr>
+    <a:masterClrMapping/>
+  </p:clrMapOvr>
+</p:sld>
+</file>
+
+<file path=ppt/slides/slide22.xml><?xml version="1.0" encoding="utf-8"?>
+<p:sld xmlns:a="http://schemas.openxmlformats.org/drawingml/2006/main" xmlns:r="http://schemas.openxmlformats.org/officeDocument/2006/relationships" xmlns:p="http://schemas.openxmlformats.org/presentationml/2006/main">
+  <p:cSld>
+    <p:spTree>
+      <p:nvGrpSpPr>
+        <p:cNvPr id="1" name=""/>
+        <p:cNvGrpSpPr/>
+        <p:nvPr/>
+      </p:nvGrpSpPr>
+      <p:grpSpPr>
+        <a:xfrm>
+          <a:off x="0" y="0"/>
+          <a:ext cx="0" cy="0"/>
+          <a:chOff x="0" y="0"/>
+          <a:chExt cx="0" cy="0"/>
+        </a:xfrm>
+      </p:grpSpPr>
+      <p:sp>
+        <p:nvSpPr>
+          <p:cNvPr id="2" name="제목 1">
+            <a:extLst>
+              <a:ext uri="{FF2B5EF4-FFF2-40B4-BE49-F238E27FC236}">
+                <a16:creationId xmlns:a16="http://schemas.microsoft.com/office/drawing/2014/main" id="{E136EBC9-9AF2-CCE8-9B40-3C2282228265}"/>
+              </a:ext>
+            </a:extLst>
+          </p:cNvPr>
+          <p:cNvSpPr>
+            <a:spLocks noGrp="1"/>
+          </p:cNvSpPr>
+          <p:nvPr>
+            <p:ph type="title"/>
+          </p:nvPr>
+        </p:nvSpPr>
+        <p:spPr/>
+        <p:txBody>
+          <a:bodyPr/>
+          <a:lstStyle/>
+          <a:p>
+            <a:r>
+              <a:rPr lang="ko-KR" altLang="en-US" dirty="0"/>
+              <a:t>비정상 문제를 풀기 위해서</a:t>
+            </a:r>
+          </a:p>
+        </p:txBody>
+      </p:sp>
+      <mc:AlternateContent xmlns:mc="http://schemas.openxmlformats.org/markup-compatibility/2006">
+        <mc:Choice xmlns:a14="http://schemas.microsoft.com/office/drawing/2010/main" Requires="a14">
+          <p:sp>
+            <p:nvSpPr>
+              <p:cNvPr id="3" name="내용 개체 틀 2">
+                <a:extLst>
+                  <a:ext uri="{FF2B5EF4-FFF2-40B4-BE49-F238E27FC236}">
+                    <a16:creationId xmlns:a16="http://schemas.microsoft.com/office/drawing/2014/main" id="{E49BD9DF-9F5F-0E32-9D5C-FCBD9453F900}"/>
+                  </a:ext>
+                </a:extLst>
+              </p:cNvPr>
+              <p:cNvSpPr>
+                <a:spLocks noGrp="1"/>
+              </p:cNvSpPr>
+              <p:nvPr>
+                <p:ph idx="1"/>
+              </p:nvPr>
+            </p:nvSpPr>
+            <p:spPr/>
+            <p:txBody>
+              <a:bodyPr/>
+              <a:lstStyle/>
+              <a:p>
+                <a:pPr algn="just">
+                  <a:lnSpc>
+                    <a:spcPct val="100000"/>
+                  </a:lnSpc>
+                </a:pPr>
+                <a:r>
+                  <a:rPr lang="ko-KR" altLang="en-US" dirty="0"/>
+                  <a:t>증분방식의 행동 가치 추정치</a:t>
+                </a:r>
+                <a:endParaRPr lang="en-US" altLang="ko-KR" dirty="0"/>
+              </a:p>
+              <a:p>
+                <a:pPr algn="just">
+                  <a:lnSpc>
+                    <a:spcPct val="100000"/>
+                  </a:lnSpc>
+                </a:pPr>
+                <a:endParaRPr lang="en-US" altLang="ko-KR" dirty="0"/>
+              </a:p>
+              <a:p>
+                <a:pPr algn="just">
+                  <a:lnSpc>
+                    <a:spcPct val="100000"/>
+                  </a:lnSpc>
+                </a:pPr>
+                <a14:m>
+                  <m:oMath xmlns:m="http://schemas.openxmlformats.org/officeDocument/2006/math">
+                    <m:f>
+                      <m:fPr>
+                        <m:ctrlPr>
+                          <a:rPr lang="en-US" altLang="ko-KR" i="1">
+                            <a:latin typeface="Cambria Math" panose="02040503050406030204" pitchFamily="18" charset="0"/>
+                          </a:rPr>
+                        </m:ctrlPr>
+                      </m:fPr>
+                      <m:num>
+                        <m:r>
+                          <a:rPr lang="en-US" altLang="ko-KR" i="1">
+                            <a:latin typeface="Cambria Math" panose="02040503050406030204" pitchFamily="18" charset="0"/>
+                          </a:rPr>
+                          <m:t>1</m:t>
+                        </m:r>
+                      </m:num>
+                      <m:den>
+                        <m:r>
+                          <a:rPr lang="en-US" altLang="ko-KR" i="1">
+                            <a:latin typeface="Cambria Math" panose="02040503050406030204" pitchFamily="18" charset="0"/>
+                          </a:rPr>
+                          <m:t>𝑛</m:t>
+                        </m:r>
+                      </m:den>
+                    </m:f>
+                    <m:r>
+                      <a:rPr lang="en-US" altLang="ko-KR" i="1">
+                        <a:latin typeface="Cambria Math" panose="02040503050406030204" pitchFamily="18" charset="0"/>
+                      </a:rPr>
+                      <m:t> </m:t>
+                    </m:r>
+                  </m:oMath>
+                </a14:m>
+                <a:r>
+                  <a:rPr lang="ko-KR" altLang="en-US" dirty="0" err="1"/>
+                  <a:t>를</a:t>
+                </a:r>
+                <a:r>
+                  <a:rPr lang="en-US" altLang="ko-KR" dirty="0"/>
+                  <a:t> </a:t>
+                </a:r>
+                <a14:m>
+                  <m:oMath xmlns:m="http://schemas.openxmlformats.org/officeDocument/2006/math">
+                    <m:r>
+                      <a:rPr lang="ko-KR" altLang="en-US" i="1">
+                        <a:latin typeface="Cambria Math" panose="02040503050406030204" pitchFamily="18" charset="0"/>
+                      </a:rPr>
+                      <m:t>𝛼</m:t>
+                    </m:r>
+                  </m:oMath>
+                </a14:m>
+                <a:r>
+                  <a:rPr lang="ko-KR" altLang="en-US" dirty="0"/>
+                  <a:t>라는 </a:t>
+                </a:r>
+                <a:r>
+                  <a:rPr lang="ko-KR" altLang="en-US" dirty="0" err="1"/>
+                  <a:t>고정값으로</a:t>
+                </a:r>
+                <a:r>
+                  <a:rPr lang="ko-KR" altLang="en-US" dirty="0"/>
+                  <a:t> 바꿈 </a:t>
+                </a:r>
+                <a14:m>
+                  <m:oMath xmlns:m="http://schemas.openxmlformats.org/officeDocument/2006/math">
+                    <m:r>
+                      <a:rPr lang="en-US" altLang="ko-KR" b="0" i="0" smtClean="0">
+                        <a:latin typeface="Cambria Math" panose="02040503050406030204" pitchFamily="18" charset="0"/>
+                      </a:rPr>
+                      <m:t>(</m:t>
+                    </m:r>
+                    <m:r>
+                      <a:rPr lang="en-US" altLang="ko-KR" b="0" i="1" smtClean="0">
+                        <a:latin typeface="Cambria Math" panose="02040503050406030204" pitchFamily="18" charset="0"/>
+                      </a:rPr>
+                      <m:t>0&lt;</m:t>
+                    </m:r>
+                    <m:r>
+                      <a:rPr lang="ko-KR" altLang="en-US" i="1">
+                        <a:latin typeface="Cambria Math" panose="02040503050406030204" pitchFamily="18" charset="0"/>
+                      </a:rPr>
+                      <m:t>𝛼</m:t>
+                    </m:r>
+                    <m:r>
+                      <a:rPr lang="en-US" altLang="ko-KR" b="0" i="1" smtClean="0">
+                        <a:latin typeface="Cambria Math" panose="02040503050406030204" pitchFamily="18" charset="0"/>
+                      </a:rPr>
+                      <m:t>&lt;1)</m:t>
+                    </m:r>
+                  </m:oMath>
+                </a14:m>
+                <a:endParaRPr lang="ko-KR" altLang="en-US" dirty="0"/>
+              </a:p>
+            </p:txBody>
+          </p:sp>
+        </mc:Choice>
+        <mc:Fallback>
+          <p:sp>
+            <p:nvSpPr>
+              <p:cNvPr id="3" name="내용 개체 틀 2">
+                <a:extLst>
+                  <a:ext uri="{FF2B5EF4-FFF2-40B4-BE49-F238E27FC236}">
+                    <a16:creationId xmlns:a16="http://schemas.microsoft.com/office/drawing/2014/main" id="{E49BD9DF-9F5F-0E32-9D5C-FCBD9453F900}"/>
+                  </a:ext>
+                </a:extLst>
+              </p:cNvPr>
+              <p:cNvSpPr>
+                <a:spLocks noGrp="1" noRot="1" noChangeAspect="1" noMove="1" noResize="1" noEditPoints="1" noAdjustHandles="1" noChangeArrowheads="1" noChangeShapeType="1" noTextEdit="1"/>
+              </p:cNvSpPr>
+              <p:nvPr>
+                <p:ph idx="1"/>
+              </p:nvPr>
+            </p:nvSpPr>
+            <p:spPr>
+              <a:blipFill>
+                <a:blip r:embed="rId2"/>
+                <a:stretch>
+                  <a:fillRect l="-1240" t="-1155"/>
+                </a:stretch>
+              </a:blipFill>
+            </p:spPr>
+            <p:txBody>
+              <a:bodyPr/>
+              <a:lstStyle/>
+              <a:p>
+                <a:r>
+                  <a:rPr lang="ko-KR" altLang="en-US">
+                    <a:noFill/>
+                  </a:rPr>
+                  <a:t> </a:t>
+                </a:r>
+              </a:p>
+            </p:txBody>
+          </p:sp>
+        </mc:Fallback>
+      </mc:AlternateContent>
+      <mc:AlternateContent xmlns:mc="http://schemas.openxmlformats.org/markup-compatibility/2006">
+        <mc:Choice xmlns:a14="http://schemas.microsoft.com/office/drawing/2010/main" Requires="a14">
+          <p:sp>
+            <p:nvSpPr>
+              <p:cNvPr id="6" name="TextBox 5">
+                <a:extLst>
+                  <a:ext uri="{FF2B5EF4-FFF2-40B4-BE49-F238E27FC236}">
+                    <a16:creationId xmlns:a16="http://schemas.microsoft.com/office/drawing/2014/main" id="{435AF70F-D50B-8F19-3B68-83BD46ED8845}"/>
+                  </a:ext>
+                </a:extLst>
+              </p:cNvPr>
+              <p:cNvSpPr txBox="1"/>
+              <p:nvPr/>
+            </p:nvSpPr>
+            <p:spPr>
+              <a:xfrm>
+                <a:off x="2006599" y="1503552"/>
+                <a:ext cx="3710824" cy="693908"/>
+              </a:xfrm>
+              <a:prstGeom prst="rect">
+                <a:avLst/>
+              </a:prstGeom>
+              <a:noFill/>
+            </p:spPr>
+            <p:txBody>
+              <a:bodyPr wrap="none" lIns="0" tIns="0" rIns="0" bIns="0" rtlCol="0">
+                <a:spAutoFit/>
+              </a:bodyPr>
+              <a:lstStyle/>
+              <a:p>
+                <a14:m>
+                  <m:oMathPara xmlns:m="http://schemas.openxmlformats.org/officeDocument/2006/math">
+                    <m:oMath>
+                      <m:sSub>
+                        <m:sSubPr>
+                          <m:ctrlPr>
+                            <a:rPr lang="en-US" altLang="ko-KR" sz="2400" i="1">
+                              <a:latin typeface="Cambria Math" panose="02040503050406030204" pitchFamily="18" charset="0"/>
+                            </a:rPr>
+                          </m:ctrlPr>
+                        </m:sSubPr>
+                        <m:e>
+                          <m:r>
+                            <a:rPr lang="en-US" altLang="ko-KR" sz="2400" i="1">
+                              <a:latin typeface="Cambria Math" panose="02040503050406030204" pitchFamily="18" charset="0"/>
+                            </a:rPr>
+                            <m:t>𝑄</m:t>
+                          </m:r>
+                        </m:e>
+                        <m:sub>
+                          <m:r>
+                            <a:rPr lang="en-US" altLang="ko-KR" sz="2400" i="1">
+                              <a:latin typeface="Cambria Math" panose="02040503050406030204" pitchFamily="18" charset="0"/>
+                            </a:rPr>
+                            <m:t>𝑛</m:t>
+                          </m:r>
+                        </m:sub>
+                      </m:sSub>
+                      <m:r>
+                        <a:rPr lang="en-US" altLang="ko-KR" sz="2400" i="1" smtClean="0">
+                          <a:latin typeface="Cambria Math" panose="02040503050406030204" pitchFamily="18" charset="0"/>
+                        </a:rPr>
+                        <m:t>=</m:t>
+                      </m:r>
+                      <m:sSub>
+                        <m:sSubPr>
+                          <m:ctrlPr>
+                            <a:rPr lang="en-US" altLang="ko-KR" sz="2400" i="1">
+                              <a:latin typeface="Cambria Math" panose="02040503050406030204" pitchFamily="18" charset="0"/>
+                            </a:rPr>
+                          </m:ctrlPr>
+                        </m:sSubPr>
+                        <m:e>
+                          <m:r>
+                            <a:rPr lang="en-US" altLang="ko-KR" sz="2400" i="1">
+                              <a:latin typeface="Cambria Math" panose="02040503050406030204" pitchFamily="18" charset="0"/>
+                            </a:rPr>
+                            <m:t>𝑄</m:t>
+                          </m:r>
+                        </m:e>
+                        <m:sub>
+                          <m:r>
+                            <a:rPr lang="en-US" altLang="ko-KR" sz="2400" i="1">
+                              <a:latin typeface="Cambria Math" panose="02040503050406030204" pitchFamily="18" charset="0"/>
+                            </a:rPr>
+                            <m:t>𝑛</m:t>
+                          </m:r>
+                          <m:r>
+                            <a:rPr lang="en-US" altLang="ko-KR" sz="2400" i="1">
+                              <a:latin typeface="Cambria Math" panose="02040503050406030204" pitchFamily="18" charset="0"/>
+                            </a:rPr>
+                            <m:t>−1</m:t>
+                          </m:r>
+                        </m:sub>
+                      </m:sSub>
+                      <m:r>
+                        <a:rPr lang="en-US" altLang="ko-KR" sz="2400" i="1">
+                          <a:latin typeface="Cambria Math" panose="02040503050406030204" pitchFamily="18" charset="0"/>
+                        </a:rPr>
+                        <m:t>+</m:t>
+                      </m:r>
+                      <m:f>
+                        <m:fPr>
+                          <m:ctrlPr>
+                            <a:rPr lang="en-US" altLang="ko-KR" sz="2400" i="1">
+                              <a:latin typeface="Cambria Math" panose="02040503050406030204" pitchFamily="18" charset="0"/>
+                            </a:rPr>
+                          </m:ctrlPr>
+                        </m:fPr>
+                        <m:num>
+                          <m:r>
+                            <a:rPr lang="en-US" altLang="ko-KR" sz="2400" i="1">
+                              <a:latin typeface="Cambria Math" panose="02040503050406030204" pitchFamily="18" charset="0"/>
+                            </a:rPr>
+                            <m:t>1</m:t>
+                          </m:r>
+                        </m:num>
+                        <m:den>
+                          <m:r>
+                            <a:rPr lang="en-US" altLang="ko-KR" sz="2400" i="1">
+                              <a:latin typeface="Cambria Math" panose="02040503050406030204" pitchFamily="18" charset="0"/>
+                            </a:rPr>
+                            <m:t>𝑛</m:t>
+                          </m:r>
+                        </m:den>
+                      </m:f>
+                      <m:d>
+                        <m:dPr>
+                          <m:ctrlPr>
+                            <a:rPr lang="en-US" altLang="ko-KR" sz="2400" i="1">
+                              <a:latin typeface="Cambria Math" panose="02040503050406030204" pitchFamily="18" charset="0"/>
+                            </a:rPr>
+                          </m:ctrlPr>
+                        </m:dPr>
+                        <m:e>
+                          <m:sSub>
+                            <m:sSubPr>
+                              <m:ctrlPr>
+                                <a:rPr lang="en-US" altLang="ko-KR" sz="2400" i="1">
+                                  <a:latin typeface="Cambria Math" panose="02040503050406030204" pitchFamily="18" charset="0"/>
+                                </a:rPr>
+                              </m:ctrlPr>
+                            </m:sSubPr>
+                            <m:e>
+                              <m:r>
+                                <a:rPr lang="en-US" altLang="ko-KR" sz="2400" i="1">
+                                  <a:latin typeface="Cambria Math" panose="02040503050406030204" pitchFamily="18" charset="0"/>
+                                </a:rPr>
+                                <m:t>𝑅</m:t>
+                              </m:r>
+                            </m:e>
+                            <m:sub>
+                              <m:r>
+                                <a:rPr lang="en-US" altLang="ko-KR" sz="2400" i="1">
+                                  <a:latin typeface="Cambria Math" panose="02040503050406030204" pitchFamily="18" charset="0"/>
+                                </a:rPr>
+                                <m:t>𝑛</m:t>
+                              </m:r>
+                            </m:sub>
+                          </m:sSub>
+                          <m:r>
+                            <a:rPr lang="en-US" altLang="ko-KR" sz="2400" i="1">
+                              <a:latin typeface="Cambria Math" panose="02040503050406030204" pitchFamily="18" charset="0"/>
+                            </a:rPr>
+                            <m:t>−</m:t>
+                          </m:r>
+                          <m:sSub>
+                            <m:sSubPr>
+                              <m:ctrlPr>
+                                <a:rPr lang="en-US" altLang="ko-KR" sz="2400" i="1">
+                                  <a:latin typeface="Cambria Math" panose="02040503050406030204" pitchFamily="18" charset="0"/>
+                                </a:rPr>
+                              </m:ctrlPr>
+                            </m:sSubPr>
+                            <m:e>
+                              <m:r>
+                                <a:rPr lang="en-US" altLang="ko-KR" sz="2400" i="1">
+                                  <a:latin typeface="Cambria Math" panose="02040503050406030204" pitchFamily="18" charset="0"/>
+                                </a:rPr>
+                                <m:t>𝑄</m:t>
+                              </m:r>
+                            </m:e>
+                            <m:sub>
+                              <m:r>
+                                <a:rPr lang="en-US" altLang="ko-KR" sz="2400" i="1">
+                                  <a:latin typeface="Cambria Math" panose="02040503050406030204" pitchFamily="18" charset="0"/>
+                                </a:rPr>
+                                <m:t>𝑛</m:t>
+                              </m:r>
+                              <m:r>
+                                <a:rPr lang="en-US" altLang="ko-KR" sz="2400" i="1">
+                                  <a:latin typeface="Cambria Math" panose="02040503050406030204" pitchFamily="18" charset="0"/>
+                                </a:rPr>
+                                <m:t>−1</m:t>
+                              </m:r>
+                            </m:sub>
+                          </m:sSub>
+                        </m:e>
+                      </m:d>
+                    </m:oMath>
+                  </m:oMathPara>
+                </a14:m>
+              </a:p>
+            </p:txBody>
+          </p:sp>
+        </mc:Choice>
+        <mc:Fallback>
+          <p:sp>
+            <p:nvSpPr>
+              <p:cNvPr id="6" name="TextBox 5">
+                <a:extLst>
+                  <a:ext uri="{FF2B5EF4-FFF2-40B4-BE49-F238E27FC236}">
+                    <a16:creationId xmlns:a16="http://schemas.microsoft.com/office/drawing/2014/main" id="{435AF70F-D50B-8F19-3B68-83BD46ED8845}"/>
+                  </a:ext>
+                </a:extLst>
+              </p:cNvPr>
+              <p:cNvSpPr txBox="1">
+                <a:spLocks noRot="1" noChangeAspect="1" noMove="1" noResize="1" noEditPoints="1" noAdjustHandles="1" noChangeArrowheads="1" noChangeShapeType="1" noTextEdit="1"/>
+              </p:cNvSpPr>
+              <p:nvPr/>
+            </p:nvSpPr>
+            <p:spPr>
+              <a:xfrm>
+                <a:off x="2006599" y="1503552"/>
+                <a:ext cx="3710824" cy="693908"/>
+              </a:xfrm>
+              <a:prstGeom prst="rect">
+                <a:avLst/>
+              </a:prstGeom>
+              <a:blipFill>
+                <a:blip r:embed="rId3"/>
+                <a:stretch>
+                  <a:fillRect/>
+                </a:stretch>
+              </a:blipFill>
+            </p:spPr>
+            <p:txBody>
+              <a:bodyPr/>
+              <a:lstStyle/>
+              <a:p>
+                <a:r>
+                  <a:rPr lang="ko-KR" altLang="en-US">
+                    <a:noFill/>
+                  </a:rPr>
+                  <a:t> </a:t>
+                </a:r>
+              </a:p>
+            </p:txBody>
+          </p:sp>
+        </mc:Fallback>
+      </mc:AlternateContent>
+      <mc:AlternateContent xmlns:mc="http://schemas.openxmlformats.org/markup-compatibility/2006">
+        <mc:Choice xmlns:a14="http://schemas.microsoft.com/office/drawing/2010/main" Requires="a14">
+          <p:sp>
+            <p:nvSpPr>
+              <p:cNvPr id="7" name="TextBox 6">
+                <a:extLst>
+                  <a:ext uri="{FF2B5EF4-FFF2-40B4-BE49-F238E27FC236}">
+                    <a16:creationId xmlns:a16="http://schemas.microsoft.com/office/drawing/2014/main" id="{CF914722-AB5F-5780-68BB-527C2688C7EB}"/>
+                  </a:ext>
+                </a:extLst>
+              </p:cNvPr>
+              <p:cNvSpPr txBox="1"/>
+              <p:nvPr/>
+            </p:nvSpPr>
+            <p:spPr>
+              <a:xfrm>
+                <a:off x="2045841" y="2860008"/>
+                <a:ext cx="3671582" cy="369332"/>
+              </a:xfrm>
+              <a:prstGeom prst="rect">
+                <a:avLst/>
+              </a:prstGeom>
+              <a:noFill/>
+            </p:spPr>
+            <p:txBody>
+              <a:bodyPr wrap="none" lIns="0" tIns="0" rIns="0" bIns="0" rtlCol="0">
+                <a:spAutoFit/>
+              </a:bodyPr>
+              <a:lstStyle/>
+              <a:p>
+                <a14:m>
+                  <m:oMathPara xmlns:m="http://schemas.openxmlformats.org/officeDocument/2006/math">
+                    <m:oMath>
+                      <m:sSub>
+                        <m:sSubPr>
+                          <m:ctrlPr>
+                            <a:rPr lang="en-US" altLang="ko-KR" sz="2400" i="1">
+                              <a:latin typeface="Cambria Math" panose="02040503050406030204" pitchFamily="18" charset="0"/>
+                            </a:rPr>
+                          </m:ctrlPr>
+                        </m:sSubPr>
+                        <m:e>
+                          <m:r>
+                            <a:rPr lang="en-US" altLang="ko-KR" sz="2400" i="1">
+                              <a:latin typeface="Cambria Math" panose="02040503050406030204" pitchFamily="18" charset="0"/>
+                            </a:rPr>
+                            <m:t>𝑄</m:t>
+                          </m:r>
+                        </m:e>
+                        <m:sub>
+                          <m:r>
+                            <a:rPr lang="en-US" altLang="ko-KR" sz="2400" i="1">
+                              <a:latin typeface="Cambria Math" panose="02040503050406030204" pitchFamily="18" charset="0"/>
+                            </a:rPr>
+                            <m:t>𝑛</m:t>
+                          </m:r>
+                        </m:sub>
+                      </m:sSub>
+                      <m:r>
+                        <a:rPr lang="en-US" altLang="ko-KR" sz="2400" i="1" smtClean="0">
+                          <a:latin typeface="Cambria Math" panose="02040503050406030204" pitchFamily="18" charset="0"/>
+                        </a:rPr>
+                        <m:t>=</m:t>
+                      </m:r>
+                      <m:sSub>
+                        <m:sSubPr>
+                          <m:ctrlPr>
+                            <a:rPr lang="en-US" altLang="ko-KR" sz="2400" i="1">
+                              <a:latin typeface="Cambria Math" panose="02040503050406030204" pitchFamily="18" charset="0"/>
+                            </a:rPr>
+                          </m:ctrlPr>
+                        </m:sSubPr>
+                        <m:e>
+                          <m:r>
+                            <a:rPr lang="en-US" altLang="ko-KR" sz="2400" i="1">
+                              <a:latin typeface="Cambria Math" panose="02040503050406030204" pitchFamily="18" charset="0"/>
+                            </a:rPr>
+                            <m:t>𝑄</m:t>
+                          </m:r>
+                        </m:e>
+                        <m:sub>
+                          <m:r>
+                            <a:rPr lang="en-US" altLang="ko-KR" sz="2400" i="1">
+                              <a:latin typeface="Cambria Math" panose="02040503050406030204" pitchFamily="18" charset="0"/>
+                            </a:rPr>
+                            <m:t>𝑛</m:t>
+                          </m:r>
+                          <m:r>
+                            <a:rPr lang="en-US" altLang="ko-KR" sz="2400" i="1">
+                              <a:latin typeface="Cambria Math" panose="02040503050406030204" pitchFamily="18" charset="0"/>
+                            </a:rPr>
+                            <m:t>−1</m:t>
+                          </m:r>
+                        </m:sub>
+                      </m:sSub>
+                      <m:r>
+                        <a:rPr lang="en-US" altLang="ko-KR" sz="2400" i="1">
+                          <a:latin typeface="Cambria Math" panose="02040503050406030204" pitchFamily="18" charset="0"/>
+                        </a:rPr>
+                        <m:t>+</m:t>
+                      </m:r>
+                      <m:r>
+                        <a:rPr lang="ko-KR" altLang="en-US" sz="2400" i="1" smtClean="0">
+                          <a:solidFill>
+                            <a:srgbClr val="FF0000"/>
+                          </a:solidFill>
+                          <a:latin typeface="Cambria Math" panose="02040503050406030204" pitchFamily="18" charset="0"/>
+                        </a:rPr>
+                        <m:t>𝛼</m:t>
+                      </m:r>
+                      <m:d>
+                        <m:dPr>
+                          <m:ctrlPr>
+                            <a:rPr lang="en-US" altLang="ko-KR" sz="2400" i="1">
+                              <a:latin typeface="Cambria Math" panose="02040503050406030204" pitchFamily="18" charset="0"/>
+                            </a:rPr>
+                          </m:ctrlPr>
+                        </m:dPr>
+                        <m:e>
+                          <m:sSub>
+                            <m:sSubPr>
+                              <m:ctrlPr>
+                                <a:rPr lang="en-US" altLang="ko-KR" sz="2400" i="1">
+                                  <a:latin typeface="Cambria Math" panose="02040503050406030204" pitchFamily="18" charset="0"/>
+                                </a:rPr>
+                              </m:ctrlPr>
+                            </m:sSubPr>
+                            <m:e>
+                              <m:r>
+                                <a:rPr lang="en-US" altLang="ko-KR" sz="2400" i="1">
+                                  <a:latin typeface="Cambria Math" panose="02040503050406030204" pitchFamily="18" charset="0"/>
+                                </a:rPr>
+                                <m:t>𝑅</m:t>
+                              </m:r>
+                            </m:e>
+                            <m:sub>
+                              <m:r>
+                                <a:rPr lang="en-US" altLang="ko-KR" sz="2400" i="1">
+                                  <a:latin typeface="Cambria Math" panose="02040503050406030204" pitchFamily="18" charset="0"/>
+                                </a:rPr>
+                                <m:t>𝑛</m:t>
+                              </m:r>
+                            </m:sub>
+                          </m:sSub>
+                          <m:r>
+                            <a:rPr lang="en-US" altLang="ko-KR" sz="2400" i="1">
+                              <a:latin typeface="Cambria Math" panose="02040503050406030204" pitchFamily="18" charset="0"/>
+                            </a:rPr>
+                            <m:t>−</m:t>
+                          </m:r>
+                          <m:sSub>
+                            <m:sSubPr>
+                              <m:ctrlPr>
+                                <a:rPr lang="en-US" altLang="ko-KR" sz="2400" i="1">
+                                  <a:latin typeface="Cambria Math" panose="02040503050406030204" pitchFamily="18" charset="0"/>
+                                </a:rPr>
+                              </m:ctrlPr>
+                            </m:sSubPr>
+                            <m:e>
+                              <m:r>
+                                <a:rPr lang="en-US" altLang="ko-KR" sz="2400" i="1">
+                                  <a:latin typeface="Cambria Math" panose="02040503050406030204" pitchFamily="18" charset="0"/>
+                                </a:rPr>
+                                <m:t>𝑄</m:t>
+                              </m:r>
+                            </m:e>
+                            <m:sub>
+                              <m:r>
+                                <a:rPr lang="en-US" altLang="ko-KR" sz="2400" i="1">
+                                  <a:latin typeface="Cambria Math" panose="02040503050406030204" pitchFamily="18" charset="0"/>
+                                </a:rPr>
+                                <m:t>𝑛</m:t>
+                              </m:r>
+                              <m:r>
+                                <a:rPr lang="en-US" altLang="ko-KR" sz="2400" i="1">
+                                  <a:latin typeface="Cambria Math" panose="02040503050406030204" pitchFamily="18" charset="0"/>
+                                </a:rPr>
+                                <m:t>−1</m:t>
+                              </m:r>
+                            </m:sub>
+                          </m:sSub>
+                        </m:e>
+                      </m:d>
+                    </m:oMath>
+                  </m:oMathPara>
+                </a14:m>
+              </a:p>
+            </p:txBody>
+          </p:sp>
+        </mc:Choice>
+        <mc:Fallback>
+          <p:sp>
+            <p:nvSpPr>
+              <p:cNvPr id="7" name="TextBox 6">
+                <a:extLst>
+                  <a:ext uri="{FF2B5EF4-FFF2-40B4-BE49-F238E27FC236}">
+                    <a16:creationId xmlns:a16="http://schemas.microsoft.com/office/drawing/2014/main" id="{CF914722-AB5F-5780-68BB-527C2688C7EB}"/>
+                  </a:ext>
+                </a:extLst>
+              </p:cNvPr>
+              <p:cNvSpPr txBox="1">
+                <a:spLocks noRot="1" noChangeAspect="1" noMove="1" noResize="1" noEditPoints="1" noAdjustHandles="1" noChangeArrowheads="1" noChangeShapeType="1" noTextEdit="1"/>
+              </p:cNvSpPr>
+              <p:nvPr/>
+            </p:nvSpPr>
+            <p:spPr>
+              <a:xfrm>
+                <a:off x="2045841" y="2860008"/>
+                <a:ext cx="3671582" cy="369332"/>
+              </a:xfrm>
+              <a:prstGeom prst="rect">
+                <a:avLst/>
+              </a:prstGeom>
+              <a:blipFill>
+                <a:blip r:embed="rId4"/>
+                <a:stretch>
+                  <a:fillRect l="-2326" t="-24590" r="-5482" b="-49180"/>
+                </a:stretch>
+              </a:blipFill>
+            </p:spPr>
+            <p:txBody>
+              <a:bodyPr/>
+              <a:lstStyle/>
+              <a:p>
+                <a:r>
+                  <a:rPr lang="ko-KR" altLang="en-US">
+                    <a:noFill/>
+                  </a:rPr>
+                  <a:t> </a:t>
+                </a:r>
+              </a:p>
+            </p:txBody>
+          </p:sp>
+        </mc:Fallback>
+      </mc:AlternateContent>
+      <p:pic>
+        <p:nvPicPr>
+          <p:cNvPr id="9" name="그림 8">
+            <a:extLst>
+              <a:ext uri="{FF2B5EF4-FFF2-40B4-BE49-F238E27FC236}">
+                <a16:creationId xmlns:a16="http://schemas.microsoft.com/office/drawing/2014/main" id="{928843EE-DBF7-B996-09E3-F99AB0F2C5B1}"/>
+              </a:ext>
+            </a:extLst>
+          </p:cNvPr>
+          <p:cNvPicPr>
+            <a:picLocks noChangeAspect="1"/>
+          </p:cNvPicPr>
+          <p:nvPr/>
+        </p:nvPicPr>
+        <p:blipFill>
+          <a:blip r:embed="rId5">
+            <a:extLst>
+              <a:ext uri="{28A0092B-C50C-407E-A947-70E740481C1C}">
+                <a14:useLocalDpi xmlns:a14="http://schemas.microsoft.com/office/drawing/2010/main" val="0"/>
+              </a:ext>
+            </a:extLst>
+          </a:blip>
+          <a:stretch>
+            <a:fillRect/>
+          </a:stretch>
+        </p:blipFill>
+        <p:spPr>
+          <a:xfrm>
+            <a:off x="282356" y="3628661"/>
+            <a:ext cx="3988005" cy="2641736"/>
+          </a:xfrm>
+          <a:prstGeom prst="rect">
+            <a:avLst/>
+          </a:prstGeom>
+        </p:spPr>
+      </p:pic>
+      <p:sp>
+        <p:nvSpPr>
+          <p:cNvPr id="13" name="TextBox 12">
+            <a:extLst>
+              <a:ext uri="{FF2B5EF4-FFF2-40B4-BE49-F238E27FC236}">
+                <a16:creationId xmlns:a16="http://schemas.microsoft.com/office/drawing/2014/main" id="{5B3F9794-6966-DC1C-8E41-92DF58655EF4}"/>
+              </a:ext>
+            </a:extLst>
+          </p:cNvPr>
+          <p:cNvSpPr txBox="1"/>
+          <p:nvPr/>
+        </p:nvSpPr>
+        <p:spPr>
+          <a:xfrm>
+            <a:off x="4185559" y="3784356"/>
+            <a:ext cx="4619170" cy="707886"/>
+          </a:xfrm>
+          <a:prstGeom prst="rect">
+            <a:avLst/>
+          </a:prstGeom>
+          <a:noFill/>
+        </p:spPr>
+        <p:txBody>
+          <a:bodyPr wrap="square">
+            <a:spAutoFit/>
+          </a:bodyPr>
+          <a:lstStyle/>
+          <a:p>
+            <a:pPr marL="342900" indent="-342900" algn="just">
+              <a:buFont typeface="Arial" panose="020B0604020202020204" pitchFamily="34" charset="0"/>
+              <a:buChar char="•"/>
+            </a:pPr>
+            <a:r>
+              <a:rPr lang="ko-KR" altLang="en-US" sz="2000" dirty="0"/>
+              <a:t>오래전에 받은 보상일수록 가중치가 지수적</a:t>
+            </a:r>
+            <a:r>
+              <a:rPr lang="en-US" altLang="ko-KR" sz="2000" dirty="0"/>
+              <a:t>(exponential)</a:t>
+            </a:r>
+            <a:r>
+              <a:rPr lang="ko-KR" altLang="en-US" sz="2000" dirty="0"/>
+              <a:t>으로 </a:t>
+            </a:r>
+            <a:r>
+              <a:rPr lang="ko-KR" altLang="en-US" sz="2000" dirty="0" err="1"/>
+              <a:t>작아짐</a:t>
+            </a:r>
+            <a:endParaRPr lang="ko-KR" altLang="en-US" sz="2000" dirty="0"/>
+          </a:p>
+        </p:txBody>
+      </p:sp>
+      <p:sp>
+        <p:nvSpPr>
+          <p:cNvPr id="14" name="슬라이드 번호 개체 틀 13">
+            <a:extLst>
+              <a:ext uri="{FF2B5EF4-FFF2-40B4-BE49-F238E27FC236}">
+                <a16:creationId xmlns:a16="http://schemas.microsoft.com/office/drawing/2014/main" id="{51E1E1E5-7962-F59F-B0D9-23CDF3FC2E52}"/>
+              </a:ext>
+            </a:extLst>
+          </p:cNvPr>
+          <p:cNvSpPr>
+            <a:spLocks noGrp="1"/>
+          </p:cNvSpPr>
+          <p:nvPr>
+            <p:ph type="sldNum" sz="quarter" idx="12"/>
+          </p:nvPr>
+        </p:nvSpPr>
+        <p:spPr/>
+        <p:txBody>
+          <a:bodyPr/>
+          <a:lstStyle/>
+          <a:p>
+            <a:fld id="{B4844BEB-34CB-469D-8313-83BA6B52212E}" type="slidenum">
+              <a:rPr lang="ko-KR" altLang="en-US" smtClean="0"/>
+              <a:t>22</a:t>
+            </a:fld>
+            <a:endParaRPr lang="ko-KR" altLang="en-US"/>
+          </a:p>
+        </p:txBody>
+      </p:sp>
+    </p:spTree>
+    <p:extLst>
+      <p:ext uri="{BB962C8B-B14F-4D97-AF65-F5344CB8AC3E}">
+        <p14:creationId xmlns:p14="http://schemas.microsoft.com/office/powerpoint/2010/main" val="2620514181"/>
+      </p:ext>
+    </p:extLst>
+  </p:cSld>
+  <p:clrMapOvr>
+    <a:masterClrMapping/>
+  </p:clrMapOvr>
+</p:sld>
+</file>
+
+<file path=ppt/slides/slide23.xml><?xml version="1.0" encoding="utf-8"?>
+<p:sld xmlns:a="http://schemas.openxmlformats.org/drawingml/2006/main" xmlns:r="http://schemas.openxmlformats.org/officeDocument/2006/relationships" xmlns:p="http://schemas.openxmlformats.org/presentationml/2006/main">
+  <p:cSld>
+    <p:spTree>
+      <p:nvGrpSpPr>
+        <p:cNvPr id="1" name=""/>
+        <p:cNvGrpSpPr/>
+        <p:nvPr/>
+      </p:nvGrpSpPr>
+      <p:grpSpPr>
+        <a:xfrm>
+          <a:off x="0" y="0"/>
+          <a:ext cx="0" cy="0"/>
+          <a:chOff x="0" y="0"/>
+          <a:chExt cx="0" cy="0"/>
+        </a:xfrm>
+      </p:grpSpPr>
+      <p:sp>
+        <p:nvSpPr>
+          <p:cNvPr id="2" name="제목 1">
+            <a:extLst>
+              <a:ext uri="{FF2B5EF4-FFF2-40B4-BE49-F238E27FC236}">
+                <a16:creationId xmlns:a16="http://schemas.microsoft.com/office/drawing/2014/main" id="{B0586DF8-54AD-B88B-1948-9AE7B2856409}"/>
+              </a:ext>
+            </a:extLst>
+          </p:cNvPr>
+          <p:cNvSpPr>
+            <a:spLocks noGrp="1"/>
+          </p:cNvSpPr>
+          <p:nvPr>
+            <p:ph type="title"/>
+          </p:nvPr>
+        </p:nvSpPr>
+        <p:spPr/>
+        <p:txBody>
+          <a:bodyPr>
+            <a:noAutofit/>
+          </a:bodyPr>
+          <a:lstStyle/>
+          <a:p>
+            <a:r>
+              <a:rPr lang="ko-KR" altLang="en-US" sz="3600" dirty="0"/>
+              <a:t>기하급수적인 가중치가 만들어지는 이유</a:t>
+            </a:r>
+          </a:p>
+        </p:txBody>
+      </p:sp>
+      <p:pic>
+        <p:nvPicPr>
+          <p:cNvPr id="5" name="내용 개체 틀 4">
+            <a:extLst>
+              <a:ext uri="{FF2B5EF4-FFF2-40B4-BE49-F238E27FC236}">
+                <a16:creationId xmlns:a16="http://schemas.microsoft.com/office/drawing/2014/main" id="{F8D82A9D-8762-6341-4807-C532D96A0972}"/>
+              </a:ext>
+            </a:extLst>
+          </p:cNvPr>
+          <p:cNvPicPr>
+            <a:picLocks noGrp="1" noChangeAspect="1"/>
+          </p:cNvPicPr>
+          <p:nvPr>
+            <p:ph idx="1"/>
+          </p:nvPr>
+        </p:nvPicPr>
+        <p:blipFill>
+          <a:blip r:embed="rId2">
+            <a:extLst>
+              <a:ext uri="{28A0092B-C50C-407E-A947-70E740481C1C}">
+                <a14:useLocalDpi xmlns:a14="http://schemas.microsoft.com/office/drawing/2010/main" val="0"/>
+              </a:ext>
+            </a:extLst>
+          </a:blip>
+          <a:stretch>
+            <a:fillRect/>
+          </a:stretch>
+        </p:blipFill>
+        <p:spPr>
+          <a:xfrm>
+            <a:off x="1498442" y="1214570"/>
+            <a:ext cx="6147116" cy="1168460"/>
+          </a:xfrm>
+          <a:prstGeom prst="rect">
+            <a:avLst/>
+          </a:prstGeom>
+        </p:spPr>
+      </p:pic>
+      <p:pic>
+        <p:nvPicPr>
+          <p:cNvPr id="7" name="그림 6">
+            <a:extLst>
+              <a:ext uri="{FF2B5EF4-FFF2-40B4-BE49-F238E27FC236}">
+                <a16:creationId xmlns:a16="http://schemas.microsoft.com/office/drawing/2014/main" id="{9C3DF802-9292-58EB-AA8F-F627507D72A7}"/>
+              </a:ext>
+            </a:extLst>
+          </p:cNvPr>
+          <p:cNvPicPr>
+            <a:picLocks noChangeAspect="1"/>
+          </p:cNvPicPr>
+          <p:nvPr/>
+        </p:nvPicPr>
+        <p:blipFill>
+          <a:blip r:embed="rId3">
+            <a:extLst>
+              <a:ext uri="{28A0092B-C50C-407E-A947-70E740481C1C}">
+                <a14:useLocalDpi xmlns:a14="http://schemas.microsoft.com/office/drawing/2010/main" val="0"/>
+              </a:ext>
+            </a:extLst>
+          </a:blip>
+          <a:stretch>
+            <a:fillRect/>
+          </a:stretch>
+        </p:blipFill>
+        <p:spPr>
+          <a:xfrm>
+            <a:off x="1498442" y="3195279"/>
+            <a:ext cx="6147116" cy="342918"/>
+          </a:xfrm>
+          <a:prstGeom prst="rect">
+            <a:avLst/>
+          </a:prstGeom>
+        </p:spPr>
+      </p:pic>
+      <p:pic>
+        <p:nvPicPr>
+          <p:cNvPr id="9" name="그림 8">
+            <a:extLst>
+              <a:ext uri="{FF2B5EF4-FFF2-40B4-BE49-F238E27FC236}">
+                <a16:creationId xmlns:a16="http://schemas.microsoft.com/office/drawing/2014/main" id="{AAE13C88-E66A-3885-C568-774E3AA5495E}"/>
+              </a:ext>
+            </a:extLst>
+          </p:cNvPr>
+          <p:cNvPicPr>
+            <a:picLocks noChangeAspect="1"/>
+          </p:cNvPicPr>
+          <p:nvPr/>
+        </p:nvPicPr>
+        <p:blipFill>
+          <a:blip r:embed="rId4">
+            <a:extLst>
+              <a:ext uri="{28A0092B-C50C-407E-A947-70E740481C1C}">
+                <a14:useLocalDpi xmlns:a14="http://schemas.microsoft.com/office/drawing/2010/main" val="0"/>
+              </a:ext>
+            </a:extLst>
+          </a:blip>
+          <a:stretch>
+            <a:fillRect/>
+          </a:stretch>
+        </p:blipFill>
+        <p:spPr>
+          <a:xfrm>
+            <a:off x="1498442" y="3639209"/>
+            <a:ext cx="6147116" cy="1422473"/>
+          </a:xfrm>
+          <a:prstGeom prst="rect">
+            <a:avLst/>
+          </a:prstGeom>
+        </p:spPr>
+      </p:pic>
+      <p:pic>
+        <p:nvPicPr>
+          <p:cNvPr id="11" name="그림 10">
+            <a:extLst>
+              <a:ext uri="{FF2B5EF4-FFF2-40B4-BE49-F238E27FC236}">
+                <a16:creationId xmlns:a16="http://schemas.microsoft.com/office/drawing/2014/main" id="{80ED27A9-7BE7-9BC4-723F-CC13D5A4D563}"/>
+              </a:ext>
+            </a:extLst>
+          </p:cNvPr>
+          <p:cNvPicPr>
+            <a:picLocks noChangeAspect="1"/>
+          </p:cNvPicPr>
+          <p:nvPr/>
+        </p:nvPicPr>
+        <p:blipFill>
+          <a:blip r:embed="rId5">
+            <a:extLst>
+              <a:ext uri="{28A0092B-C50C-407E-A947-70E740481C1C}">
+                <a14:useLocalDpi xmlns:a14="http://schemas.microsoft.com/office/drawing/2010/main" val="0"/>
+              </a:ext>
+            </a:extLst>
+          </a:blip>
+          <a:stretch>
+            <a:fillRect/>
+          </a:stretch>
+        </p:blipFill>
+        <p:spPr>
+          <a:xfrm>
+            <a:off x="1331527" y="5663816"/>
+            <a:ext cx="6147116" cy="342918"/>
+          </a:xfrm>
+          <a:prstGeom prst="rect">
+            <a:avLst/>
+          </a:prstGeom>
+        </p:spPr>
+      </p:pic>
+      <p:sp>
+        <p:nvSpPr>
+          <p:cNvPr id="13" name="TextBox 12">
+            <a:extLst>
+              <a:ext uri="{FF2B5EF4-FFF2-40B4-BE49-F238E27FC236}">
+                <a16:creationId xmlns:a16="http://schemas.microsoft.com/office/drawing/2014/main" id="{6DBC43D4-9761-FB9E-F61A-E02E35DF88FF}"/>
+              </a:ext>
+            </a:extLst>
+          </p:cNvPr>
+          <p:cNvSpPr txBox="1"/>
+          <p:nvPr/>
+        </p:nvSpPr>
+        <p:spPr>
+          <a:xfrm>
+            <a:off x="3920670" y="867339"/>
+            <a:ext cx="1979387" cy="400110"/>
+          </a:xfrm>
+          <a:prstGeom prst="rect">
+            <a:avLst/>
+          </a:prstGeom>
+          <a:noFill/>
+        </p:spPr>
+        <p:txBody>
+          <a:bodyPr wrap="square">
+            <a:spAutoFit/>
+          </a:bodyPr>
+          <a:lstStyle/>
+          <a:p>
+            <a:pPr algn="just">
+              <a:lnSpc>
+                <a:spcPct val="100000"/>
+              </a:lnSpc>
+            </a:pPr>
+            <a:r>
+              <a:rPr lang="ko-KR" altLang="en-US" sz="2000" dirty="0"/>
+              <a:t>식을 변형</a:t>
+            </a:r>
+          </a:p>
+        </p:txBody>
+      </p:sp>
+      <mc:AlternateContent xmlns:mc="http://schemas.openxmlformats.org/markup-compatibility/2006">
+        <mc:Choice xmlns:a14="http://schemas.microsoft.com/office/drawing/2010/main" Requires="a14">
+          <p:sp>
+            <p:nvSpPr>
+              <p:cNvPr id="15" name="TextBox 14">
+                <a:extLst>
+                  <a:ext uri="{FF2B5EF4-FFF2-40B4-BE49-F238E27FC236}">
+                    <a16:creationId xmlns:a16="http://schemas.microsoft.com/office/drawing/2014/main" id="{AE858781-35CA-7837-CA19-B4EB02CCDE09}"/>
+                  </a:ext>
+                </a:extLst>
+              </p:cNvPr>
+              <p:cNvSpPr txBox="1"/>
+              <p:nvPr/>
+            </p:nvSpPr>
+            <p:spPr>
+              <a:xfrm>
+                <a:off x="3505200" y="2602040"/>
+                <a:ext cx="2394857" cy="400110"/>
+              </a:xfrm>
+              <a:prstGeom prst="rect">
+                <a:avLst/>
+              </a:prstGeom>
+              <a:noFill/>
+            </p:spPr>
+            <p:txBody>
+              <a:bodyPr wrap="square">
+                <a:spAutoFit/>
+              </a:bodyPr>
+              <a:lstStyle/>
+              <a:p>
+                <a:pPr algn="just">
+                  <a:lnSpc>
+                    <a:spcPct val="100000"/>
+                  </a:lnSpc>
+                </a:pPr>
+                <a14:m>
+                  <m:oMath xmlns:m="http://schemas.openxmlformats.org/officeDocument/2006/math">
+                    <m:r>
+                      <a:rPr lang="en-US" altLang="ko-KR" sz="2000" b="0" i="1" smtClean="0">
+                        <a:latin typeface="Cambria Math" panose="02040503050406030204" pitchFamily="18" charset="0"/>
+                      </a:rPr>
+                      <m:t>𝑛</m:t>
+                    </m:r>
+                  </m:oMath>
+                </a14:m>
+                <a:r>
+                  <a:rPr lang="ko-KR" altLang="en-US" sz="2000" dirty="0"/>
+                  <a:t>에 </a:t>
+                </a:r>
+                <a14:m>
+                  <m:oMath xmlns:m="http://schemas.openxmlformats.org/officeDocument/2006/math">
+                    <m:r>
+                      <a:rPr lang="en-US" altLang="ko-KR" sz="2000" i="1">
+                        <a:latin typeface="Cambria Math" panose="02040503050406030204" pitchFamily="18" charset="0"/>
+                      </a:rPr>
+                      <m:t>𝑛</m:t>
+                    </m:r>
+                    <m:r>
+                      <a:rPr lang="en-US" altLang="ko-KR" sz="2000" b="0" i="1" smtClean="0">
+                        <a:latin typeface="Cambria Math" panose="02040503050406030204" pitchFamily="18" charset="0"/>
+                      </a:rPr>
+                      <m:t>−1</m:t>
+                    </m:r>
+                  </m:oMath>
+                </a14:m>
+                <a:r>
+                  <a:rPr lang="ko-KR" altLang="en-US" sz="2000" dirty="0"/>
+                  <a:t>를 대입</a:t>
+                </a:r>
+              </a:p>
+            </p:txBody>
+          </p:sp>
+        </mc:Choice>
+        <mc:Fallback>
+          <p:sp>
+            <p:nvSpPr>
+              <p:cNvPr id="15" name="TextBox 14">
+                <a:extLst>
+                  <a:ext uri="{FF2B5EF4-FFF2-40B4-BE49-F238E27FC236}">
+                    <a16:creationId xmlns:a16="http://schemas.microsoft.com/office/drawing/2014/main" id="{AE858781-35CA-7837-CA19-B4EB02CCDE09}"/>
+                  </a:ext>
+                </a:extLst>
+              </p:cNvPr>
+              <p:cNvSpPr txBox="1">
+                <a:spLocks noRot="1" noChangeAspect="1" noMove="1" noResize="1" noEditPoints="1" noAdjustHandles="1" noChangeArrowheads="1" noChangeShapeType="1" noTextEdit="1"/>
+              </p:cNvSpPr>
+              <p:nvPr/>
+            </p:nvSpPr>
+            <p:spPr>
+              <a:xfrm>
+                <a:off x="3505200" y="2602040"/>
+                <a:ext cx="2394857" cy="400110"/>
+              </a:xfrm>
+              <a:prstGeom prst="rect">
+                <a:avLst/>
+              </a:prstGeom>
+              <a:blipFill>
+                <a:blip r:embed="rId6"/>
+                <a:stretch>
+                  <a:fillRect t="-12308" b="-24615"/>
+                </a:stretch>
+              </a:blipFill>
+            </p:spPr>
+            <p:txBody>
+              <a:bodyPr/>
+              <a:lstStyle/>
+              <a:p>
+                <a:r>
+                  <a:rPr lang="ko-KR" altLang="en-US">
+                    <a:noFill/>
+                  </a:rPr>
+                  <a:t> </a:t>
+                </a:r>
+              </a:p>
+            </p:txBody>
+          </p:sp>
+        </mc:Fallback>
+      </mc:AlternateContent>
+      <mc:AlternateContent xmlns:mc="http://schemas.openxmlformats.org/markup-compatibility/2006">
+        <mc:Choice xmlns:a14="http://schemas.microsoft.com/office/drawing/2010/main" Requires="a14">
+          <p:sp>
+            <p:nvSpPr>
+              <p:cNvPr id="16" name="TextBox 15">
+                <a:extLst>
+                  <a:ext uri="{FF2B5EF4-FFF2-40B4-BE49-F238E27FC236}">
+                    <a16:creationId xmlns:a16="http://schemas.microsoft.com/office/drawing/2014/main" id="{179A927F-8D63-6E4F-0E38-3A75C4758247}"/>
+                  </a:ext>
+                </a:extLst>
+              </p:cNvPr>
+              <p:cNvSpPr txBox="1"/>
+              <p:nvPr/>
+            </p:nvSpPr>
+            <p:spPr>
+              <a:xfrm>
+                <a:off x="3106056" y="5162694"/>
+                <a:ext cx="3193143" cy="400110"/>
+              </a:xfrm>
+              <a:prstGeom prst="rect">
+                <a:avLst/>
+              </a:prstGeom>
+              <a:noFill/>
+            </p:spPr>
+            <p:txBody>
+              <a:bodyPr wrap="square">
+                <a:spAutoFit/>
+              </a:bodyPr>
+              <a:lstStyle/>
+              <a:p>
+                <a:pPr algn="just">
+                  <a:lnSpc>
+                    <a:spcPct val="100000"/>
+                  </a:lnSpc>
+                </a:pPr>
+                <a:r>
+                  <a:rPr lang="ko-KR" altLang="en-US" sz="2000" dirty="0"/>
+                  <a:t>위의 전개를 </a:t>
+                </a:r>
+                <a14:m>
+                  <m:oMath xmlns:m="http://schemas.openxmlformats.org/officeDocument/2006/math">
+                    <m:r>
+                      <a:rPr lang="en-US" altLang="ko-KR" sz="2000" i="1">
+                        <a:latin typeface="Cambria Math" panose="02040503050406030204" pitchFamily="18" charset="0"/>
+                      </a:rPr>
+                      <m:t>𝑛</m:t>
+                    </m:r>
+                  </m:oMath>
+                </a14:m>
+                <a:r>
+                  <a:rPr lang="ko-KR" altLang="en-US" sz="2000" dirty="0"/>
+                  <a:t>번 반복</a:t>
+                </a:r>
+              </a:p>
+            </p:txBody>
+          </p:sp>
+        </mc:Choice>
+        <mc:Fallback>
+          <p:sp>
+            <p:nvSpPr>
+              <p:cNvPr id="16" name="TextBox 15">
+                <a:extLst>
+                  <a:ext uri="{FF2B5EF4-FFF2-40B4-BE49-F238E27FC236}">
+                    <a16:creationId xmlns:a16="http://schemas.microsoft.com/office/drawing/2014/main" id="{179A927F-8D63-6E4F-0E38-3A75C4758247}"/>
+                  </a:ext>
+                </a:extLst>
+              </p:cNvPr>
+              <p:cNvSpPr txBox="1">
+                <a:spLocks noRot="1" noChangeAspect="1" noMove="1" noResize="1" noEditPoints="1" noAdjustHandles="1" noChangeArrowheads="1" noChangeShapeType="1" noTextEdit="1"/>
+              </p:cNvSpPr>
+              <p:nvPr/>
+            </p:nvSpPr>
+            <p:spPr>
+              <a:xfrm>
+                <a:off x="3106056" y="5162694"/>
+                <a:ext cx="3193143" cy="400110"/>
+              </a:xfrm>
+              <a:prstGeom prst="rect">
+                <a:avLst/>
+              </a:prstGeom>
+              <a:blipFill>
+                <a:blip r:embed="rId7"/>
+                <a:stretch>
+                  <a:fillRect l="-2103" t="-12121" b="-22727"/>
+                </a:stretch>
+              </a:blipFill>
+            </p:spPr>
+            <p:txBody>
+              <a:bodyPr/>
+              <a:lstStyle/>
+              <a:p>
+                <a:r>
+                  <a:rPr lang="ko-KR" altLang="en-US">
+                    <a:noFill/>
+                  </a:rPr>
+                  <a:t> </a:t>
+                </a:r>
+              </a:p>
+            </p:txBody>
+          </p:sp>
+        </mc:Fallback>
+      </mc:AlternateContent>
+      <p:sp>
+        <p:nvSpPr>
+          <p:cNvPr id="17" name="TextBox 16">
+            <a:extLst>
+              <a:ext uri="{FF2B5EF4-FFF2-40B4-BE49-F238E27FC236}">
+                <a16:creationId xmlns:a16="http://schemas.microsoft.com/office/drawing/2014/main" id="{72C40946-AB55-AE7D-E823-69EACA28D1AC}"/>
+              </a:ext>
+            </a:extLst>
+          </p:cNvPr>
+          <p:cNvSpPr txBox="1"/>
+          <p:nvPr/>
+        </p:nvSpPr>
+        <p:spPr>
+          <a:xfrm>
+            <a:off x="2282526" y="6164938"/>
+            <a:ext cx="5167088" cy="400110"/>
+          </a:xfrm>
+          <a:prstGeom prst="rect">
+            <a:avLst/>
+          </a:prstGeom>
+          <a:noFill/>
+        </p:spPr>
+        <p:txBody>
+          <a:bodyPr wrap="square">
+            <a:spAutoFit/>
+          </a:bodyPr>
+          <a:lstStyle/>
+          <a:p>
+            <a:pPr algn="just">
+              <a:lnSpc>
+                <a:spcPct val="100000"/>
+              </a:lnSpc>
+            </a:pPr>
+            <a:r>
+              <a:rPr lang="ko-KR" altLang="en-US" sz="2000" dirty="0"/>
+              <a:t>지수 이동 평균 </a:t>
+            </a:r>
+            <a:r>
+              <a:rPr lang="en-US" altLang="ko-KR" sz="2000" dirty="0"/>
+              <a:t>(exponential moving average)</a:t>
+            </a:r>
+            <a:endParaRPr lang="ko-KR" altLang="en-US" sz="2000" dirty="0"/>
+          </a:p>
+        </p:txBody>
+      </p:sp>
+      <p:sp>
+        <p:nvSpPr>
+          <p:cNvPr id="18" name="슬라이드 번호 개체 틀 17">
+            <a:extLst>
+              <a:ext uri="{FF2B5EF4-FFF2-40B4-BE49-F238E27FC236}">
+                <a16:creationId xmlns:a16="http://schemas.microsoft.com/office/drawing/2014/main" id="{7E909ACE-28D0-56C3-3568-57C171F8EA5D}"/>
+              </a:ext>
+            </a:extLst>
+          </p:cNvPr>
+          <p:cNvSpPr>
+            <a:spLocks noGrp="1"/>
+          </p:cNvSpPr>
+          <p:nvPr>
+            <p:ph type="sldNum" sz="quarter" idx="12"/>
+          </p:nvPr>
+        </p:nvSpPr>
+        <p:spPr/>
+        <p:txBody>
+          <a:bodyPr/>
+          <a:lstStyle/>
+          <a:p>
+            <a:fld id="{B4844BEB-34CB-469D-8313-83BA6B52212E}" type="slidenum">
+              <a:rPr lang="ko-KR" altLang="en-US" smtClean="0"/>
+              <a:t>23</a:t>
+            </a:fld>
+            <a:endParaRPr lang="ko-KR" altLang="en-US"/>
+          </a:p>
+        </p:txBody>
+      </p:sp>
+    </p:spTree>
+    <p:extLst>
+      <p:ext uri="{BB962C8B-B14F-4D97-AF65-F5344CB8AC3E}">
+        <p14:creationId xmlns:p14="http://schemas.microsoft.com/office/powerpoint/2010/main" val="830642119"/>
+      </p:ext>
+    </p:extLst>
+  </p:cSld>
+  <p:clrMapOvr>
+    <a:masterClrMapping/>
+  </p:clrMapOvr>
+</p:sld>
+</file>
+
+<file path=ppt/slides/slide24.xml><?xml version="1.0" encoding="utf-8"?>
+<p:sld xmlns:a="http://schemas.openxmlformats.org/drawingml/2006/main" xmlns:r="http://schemas.openxmlformats.org/officeDocument/2006/relationships" xmlns:p="http://schemas.openxmlformats.org/presentationml/2006/main">
+  <p:cSld>
+    <p:spTree>
+      <p:nvGrpSpPr>
+        <p:cNvPr id="1" name=""/>
+        <p:cNvGrpSpPr/>
+        <p:nvPr/>
+      </p:nvGrpSpPr>
+      <p:grpSpPr>
+        <a:xfrm>
+          <a:off x="0" y="0"/>
+          <a:ext cx="0" cy="0"/>
+          <a:chOff x="0" y="0"/>
+          <a:chExt cx="0" cy="0"/>
+        </a:xfrm>
+      </p:grpSpPr>
+      <p:sp>
+        <p:nvSpPr>
+          <p:cNvPr id="2" name="제목 1">
+            <a:extLst>
+              <a:ext uri="{FF2B5EF4-FFF2-40B4-BE49-F238E27FC236}">
+                <a16:creationId xmlns:a16="http://schemas.microsoft.com/office/drawing/2014/main" id="{38F215FB-BF1D-03AC-C86C-E2C1911DA057}"/>
+              </a:ext>
+            </a:extLst>
+          </p:cNvPr>
+          <p:cNvSpPr>
+            <a:spLocks noGrp="1"/>
+          </p:cNvSpPr>
+          <p:nvPr>
+            <p:ph type="title"/>
+          </p:nvPr>
+        </p:nvSpPr>
+        <p:spPr/>
+        <p:txBody>
+          <a:bodyPr/>
+          <a:lstStyle/>
+          <a:p>
+            <a:r>
+              <a:rPr lang="ko-KR" altLang="en-US" dirty="0"/>
+              <a:t>학습결과의 편향의 관점에서 </a:t>
+            </a:r>
+          </a:p>
+        </p:txBody>
+      </p:sp>
+      <mc:AlternateContent xmlns:mc="http://schemas.openxmlformats.org/markup-compatibility/2006">
+        <mc:Choice xmlns:a14="http://schemas.microsoft.com/office/drawing/2010/main" Requires="a14">
+          <p:sp>
+            <p:nvSpPr>
+              <p:cNvPr id="3" name="내용 개체 틀 2">
+                <a:extLst>
+                  <a:ext uri="{FF2B5EF4-FFF2-40B4-BE49-F238E27FC236}">
+                    <a16:creationId xmlns:a16="http://schemas.microsoft.com/office/drawing/2014/main" id="{0DA76994-97E3-8621-C99D-95D724D657C9}"/>
+                  </a:ext>
+                </a:extLst>
+              </p:cNvPr>
+              <p:cNvSpPr>
+                <a:spLocks noGrp="1"/>
+              </p:cNvSpPr>
+              <p:nvPr>
+                <p:ph idx="1"/>
+              </p:nvPr>
+            </p:nvSpPr>
+            <p:spPr/>
+            <p:txBody>
+              <a:bodyPr>
+                <a:normAutofit/>
+              </a:bodyPr>
+              <a:lstStyle/>
+              <a:p>
+                <a:pPr>
+                  <a:lnSpc>
+                    <a:spcPct val="100000"/>
+                  </a:lnSpc>
+                </a:pPr>
+                <a:r>
+                  <a:rPr lang="ko-KR" altLang="en-US" sz="2000" dirty="0">
+                    <a:solidFill>
+                      <a:srgbClr val="FF0000"/>
+                    </a:solidFill>
+                  </a:rPr>
+                  <a:t>표본 평균 방식</a:t>
+                </a:r>
+                <a:endParaRPr lang="en-US" altLang="ko-KR" sz="2000" dirty="0">
+                  <a:solidFill>
+                    <a:srgbClr val="FF0000"/>
+                  </a:solidFill>
+                </a:endParaRPr>
+              </a:p>
+              <a:p>
+                <a:pPr>
+                  <a:lnSpc>
+                    <a:spcPct val="100000"/>
+                  </a:lnSpc>
+                </a:pPr>
+                <a:endParaRPr lang="en-US" altLang="ko-KR" sz="2000" dirty="0"/>
+              </a:p>
+              <a:p>
+                <a:pPr>
+                  <a:lnSpc>
+                    <a:spcPct val="100000"/>
+                  </a:lnSpc>
+                </a:pPr>
+                <a:r>
+                  <a:rPr lang="ko-KR" altLang="en-US" sz="2000" dirty="0"/>
+                  <a:t>첫번째 보상</a:t>
+                </a:r>
+                <a:r>
+                  <a:rPr lang="en-US" altLang="ko-KR" sz="2000" dirty="0"/>
+                  <a:t> </a:t>
+                </a:r>
+                <a14:m>
+                  <m:oMath xmlns:m="http://schemas.openxmlformats.org/officeDocument/2006/math">
+                    <m:sSub>
+                      <m:sSubPr>
+                        <m:ctrlPr>
+                          <a:rPr lang="en-US" altLang="ko-KR" sz="2000" i="1">
+                            <a:latin typeface="Cambria Math" panose="02040503050406030204" pitchFamily="18" charset="0"/>
+                          </a:rPr>
+                        </m:ctrlPr>
+                      </m:sSubPr>
+                      <m:e>
+                        <m:r>
+                          <a:rPr lang="en-US" altLang="ko-KR" sz="2000" i="1">
+                            <a:latin typeface="Cambria Math" panose="02040503050406030204" pitchFamily="18" charset="0"/>
+                          </a:rPr>
+                          <m:t>𝑅</m:t>
+                        </m:r>
+                      </m:e>
+                      <m:sub>
+                        <m:r>
+                          <a:rPr lang="en-US" altLang="ko-KR" sz="2000" i="1">
+                            <a:latin typeface="Cambria Math" panose="02040503050406030204" pitchFamily="18" charset="0"/>
+                          </a:rPr>
+                          <m:t>1</m:t>
+                        </m:r>
+                      </m:sub>
+                    </m:sSub>
+                  </m:oMath>
+                </a14:m>
+                <a:r>
+                  <a:rPr lang="ko-KR" altLang="en-US" sz="2000" dirty="0"/>
+                  <a:t>을 받으면</a:t>
+                </a:r>
+                <a:endParaRPr lang="en-US" altLang="ko-KR" sz="2000" dirty="0"/>
+              </a:p>
+              <a:p>
+                <a:pPr>
+                  <a:lnSpc>
+                    <a:spcPct val="100000"/>
+                  </a:lnSpc>
+                </a:pPr>
+                <a:r>
+                  <a:rPr lang="ko-KR" altLang="en-US" sz="2000" dirty="0"/>
+                  <a:t>초기 추정치 </a:t>
+                </a:r>
+                <a14:m>
+                  <m:oMath xmlns:m="http://schemas.openxmlformats.org/officeDocument/2006/math">
+                    <m:sSub>
+                      <m:sSubPr>
+                        <m:ctrlPr>
+                          <a:rPr lang="en-US" altLang="ko-KR" sz="2000" i="1">
+                            <a:latin typeface="Cambria Math" panose="02040503050406030204" pitchFamily="18" charset="0"/>
+                          </a:rPr>
+                        </m:ctrlPr>
+                      </m:sSubPr>
+                      <m:e>
+                        <m:r>
+                          <a:rPr lang="en-US" altLang="ko-KR" sz="2000" i="1">
+                            <a:latin typeface="Cambria Math" panose="02040503050406030204" pitchFamily="18" charset="0"/>
+                          </a:rPr>
+                          <m:t>𝑄</m:t>
+                        </m:r>
+                      </m:e>
+                      <m:sub>
+                        <m:r>
+                          <a:rPr lang="en-US" altLang="ko-KR" sz="2000" i="1">
+                            <a:latin typeface="Cambria Math" panose="02040503050406030204" pitchFamily="18" charset="0"/>
+                          </a:rPr>
+                          <m:t>0</m:t>
+                        </m:r>
+                      </m:sub>
+                    </m:sSub>
+                  </m:oMath>
+                </a14:m>
+                <a:r>
+                  <a:rPr lang="ko-KR" altLang="en-US" sz="2000" dirty="0"/>
+                  <a:t>이 사라짐</a:t>
+                </a:r>
+                <a:endParaRPr lang="en-US" altLang="ko-KR" sz="2000" dirty="0"/>
+              </a:p>
+              <a:p>
+                <a:pPr>
+                  <a:lnSpc>
+                    <a:spcPct val="100000"/>
+                  </a:lnSpc>
+                </a:pPr>
+                <a:r>
+                  <a:rPr lang="ko-KR" altLang="en-US" sz="2000" dirty="0"/>
+                  <a:t>즉 초기 </a:t>
+                </a:r>
+                <a:r>
+                  <a:rPr lang="ko-KR" altLang="en-US" sz="2000" dirty="0" err="1"/>
+                  <a:t>추정값에</a:t>
+                </a:r>
+                <a:r>
+                  <a:rPr lang="ko-KR" altLang="en-US" sz="2000" dirty="0"/>
+                  <a:t> 의한 편향이 </a:t>
+                </a:r>
+                <a:r>
+                  <a:rPr lang="en-US" altLang="ko-KR" sz="2000" dirty="0"/>
+                  <a:t>0</a:t>
+                </a:r>
+                <a:r>
+                  <a:rPr lang="ko-KR" altLang="en-US" sz="2000" dirty="0"/>
+                  <a:t>이며</a:t>
+                </a:r>
+                <a:r>
+                  <a:rPr lang="en-US" altLang="ko-KR" sz="2000" dirty="0"/>
+                  <a:t>, </a:t>
+                </a:r>
+                <a:r>
+                  <a:rPr lang="ko-KR" altLang="en-US" sz="2000" dirty="0"/>
+                  <a:t>오직 관측된 실제 보상들의 평균만 반영됨</a:t>
+                </a:r>
+                <a:endParaRPr lang="en-US" altLang="ko-KR" sz="2000" dirty="0"/>
+              </a:p>
+              <a:p>
+                <a:pPr>
+                  <a:lnSpc>
+                    <a:spcPct val="100000"/>
+                  </a:lnSpc>
+                </a:pPr>
+                <a:endParaRPr lang="en-US" altLang="ko-KR" sz="2000" dirty="0"/>
+              </a:p>
+              <a:p>
+                <a:pPr>
+                  <a:lnSpc>
+                    <a:spcPct val="100000"/>
+                  </a:lnSpc>
+                </a:pPr>
+                <a:r>
+                  <a:rPr lang="ko-KR" altLang="en-US" sz="2000" dirty="0">
+                    <a:solidFill>
+                      <a:srgbClr val="FF0000"/>
+                    </a:solidFill>
+                  </a:rPr>
+                  <a:t>지수 이동 평균 방식</a:t>
+                </a:r>
+                <a:endParaRPr lang="en-US" altLang="ko-KR" sz="2000" dirty="0">
+                  <a:solidFill>
+                    <a:srgbClr val="FF0000"/>
+                  </a:solidFill>
+                </a:endParaRPr>
+              </a:p>
+              <a:p>
+                <a:pPr>
+                  <a:lnSpc>
+                    <a:spcPct val="100000"/>
+                  </a:lnSpc>
+                </a:pPr>
+                <a:endParaRPr lang="en-US" altLang="ko-KR" sz="2000" dirty="0">
+                  <a:solidFill>
+                    <a:srgbClr val="FF0000"/>
+                  </a:solidFill>
+                </a:endParaRPr>
+              </a:p>
+              <a:p>
+                <a:pPr>
+                  <a:lnSpc>
+                    <a:spcPct val="100000"/>
+                  </a:lnSpc>
+                </a:pPr>
+                <a:endParaRPr lang="en-US" altLang="ko-KR" sz="2000" dirty="0">
+                  <a:solidFill>
+                    <a:srgbClr val="FF0000"/>
+                  </a:solidFill>
+                </a:endParaRPr>
+              </a:p>
+              <a:p>
+                <a:pPr>
+                  <a:lnSpc>
+                    <a:spcPct val="100000"/>
+                  </a:lnSpc>
+                </a:pPr>
+                <a:r>
+                  <a:rPr lang="ko-KR" altLang="ko-KR" sz="2000" dirty="0"/>
+                  <a:t>유한한 스텝 </a:t>
+                </a:r>
+                <a14:m>
+                  <m:oMath xmlns:m="http://schemas.openxmlformats.org/officeDocument/2006/math">
+                    <m:r>
+                      <a:rPr lang="ko-KR" altLang="en-US" sz="2000" i="1">
+                        <a:latin typeface="Cambria Math" panose="02040503050406030204" pitchFamily="18" charset="0"/>
+                        <a:cs typeface="+mn-cs"/>
+                      </a:rPr>
+                      <m:t>𝑛</m:t>
+                    </m:r>
+                  </m:oMath>
+                </a14:m>
+                <a:r>
+                  <a:rPr lang="ko-KR" altLang="ko-KR" sz="2000" dirty="0"/>
+                  <a:t>내에서는 </a:t>
+                </a:r>
+                <a14:m>
+                  <m:oMath xmlns:m="http://schemas.openxmlformats.org/officeDocument/2006/math">
+                    <m:sSub>
+                      <m:sSubPr>
+                        <m:ctrlPr>
+                          <a:rPr lang="ko-KR" altLang="en-US" sz="2000" i="1">
+                            <a:latin typeface="Cambria Math" panose="02040503050406030204" pitchFamily="18" charset="0"/>
+                            <a:cs typeface="+mn-cs"/>
+                          </a:rPr>
+                        </m:ctrlPr>
+                      </m:sSubPr>
+                      <m:e>
+                        <m:r>
+                          <a:rPr lang="ko-KR" altLang="en-US" sz="2000" i="1">
+                            <a:latin typeface="Cambria Math" panose="02040503050406030204" pitchFamily="18" charset="0"/>
+                            <a:cs typeface="+mn-cs"/>
+                          </a:rPr>
+                          <m:t>𝑄</m:t>
+                        </m:r>
+                      </m:e>
+                      <m:sub>
+                        <m:r>
+                          <a:rPr lang="en-US" altLang="ko-KR" sz="2000" b="0" i="1" smtClean="0">
+                            <a:latin typeface="Cambria Math" panose="02040503050406030204" pitchFamily="18" charset="0"/>
+                            <a:cs typeface="+mn-cs"/>
+                          </a:rPr>
+                          <m:t>0</m:t>
+                        </m:r>
+                      </m:sub>
+                    </m:sSub>
+                  </m:oMath>
+                </a14:m>
+                <a:r>
+                  <a:rPr lang="ko-KR" altLang="ko-KR" sz="2000" dirty="0"/>
+                  <a:t>의 영향이 지수적으로 감소(</a:t>
+                </a:r>
+                <a:r>
+                  <a:rPr lang="ko-KR" altLang="ko-KR" sz="2000" dirty="0" err="1"/>
+                  <a:t>Exponential</a:t>
+                </a:r>
+                <a:r>
+                  <a:rPr lang="ko-KR" altLang="ko-KR" sz="2000" dirty="0"/>
+                  <a:t> </a:t>
+                </a:r>
+                <a:r>
+                  <a:rPr lang="ko-KR" altLang="ko-KR" sz="2000" dirty="0" err="1"/>
+                  <a:t>Decay</a:t>
+                </a:r>
+                <a:r>
+                  <a:rPr lang="ko-KR" altLang="ko-KR" sz="2000" dirty="0"/>
+                  <a:t>)하</a:t>
+                </a:r>
+                <a:r>
+                  <a:rPr lang="ko-KR" altLang="en-US" sz="2000" dirty="0"/>
+                  <a:t>지만 </a:t>
+                </a:r>
+                <a:r>
+                  <a:rPr lang="ko-KR" altLang="ko-KR" sz="2000" dirty="0"/>
+                  <a:t>잔존</a:t>
+                </a:r>
+                <a:endParaRPr lang="ko-KR" altLang="en-US" sz="2000" dirty="0">
+                  <a:solidFill>
+                    <a:srgbClr val="FF0000"/>
+                  </a:solidFill>
+                </a:endParaRPr>
+              </a:p>
+            </p:txBody>
+          </p:sp>
+        </mc:Choice>
+        <mc:Fallback>
+          <p:sp>
+            <p:nvSpPr>
+              <p:cNvPr id="3" name="내용 개체 틀 2">
+                <a:extLst>
+                  <a:ext uri="{FF2B5EF4-FFF2-40B4-BE49-F238E27FC236}">
+                    <a16:creationId xmlns:a16="http://schemas.microsoft.com/office/drawing/2014/main" id="{0DA76994-97E3-8621-C99D-95D724D657C9}"/>
+                  </a:ext>
+                </a:extLst>
+              </p:cNvPr>
+              <p:cNvSpPr>
+                <a:spLocks noGrp="1" noRot="1" noChangeAspect="1" noMove="1" noResize="1" noEditPoints="1" noAdjustHandles="1" noChangeArrowheads="1" noChangeShapeType="1" noTextEdit="1"/>
+              </p:cNvSpPr>
+              <p:nvPr>
+                <p:ph idx="1"/>
+              </p:nvPr>
+            </p:nvSpPr>
+            <p:spPr>
+              <a:blipFill>
+                <a:blip r:embed="rId2"/>
+                <a:stretch>
+                  <a:fillRect l="-620" t="-577"/>
+                </a:stretch>
+              </a:blipFill>
+            </p:spPr>
+            <p:txBody>
+              <a:bodyPr/>
+              <a:lstStyle/>
+              <a:p>
+                <a:r>
+                  <a:rPr lang="ko-KR" altLang="en-US">
+                    <a:noFill/>
+                  </a:rPr>
+                  <a:t> </a:t>
+                </a:r>
+              </a:p>
+            </p:txBody>
+          </p:sp>
+        </mc:Fallback>
+      </mc:AlternateContent>
+      <mc:AlternateContent xmlns:mc="http://schemas.openxmlformats.org/markup-compatibility/2006">
+        <mc:Choice xmlns:a14="http://schemas.microsoft.com/office/drawing/2010/main" Requires="a14">
+          <p:sp>
+            <p:nvSpPr>
+              <p:cNvPr id="5" name="TextBox 4">
+                <a:extLst>
+                  <a:ext uri="{FF2B5EF4-FFF2-40B4-BE49-F238E27FC236}">
+                    <a16:creationId xmlns:a16="http://schemas.microsoft.com/office/drawing/2014/main" id="{2D9FD961-72EF-F68E-2377-FA477E05DE8C}"/>
+                  </a:ext>
+                </a:extLst>
+              </p:cNvPr>
+              <p:cNvSpPr txBox="1"/>
+              <p:nvPr/>
+            </p:nvSpPr>
+            <p:spPr>
+              <a:xfrm>
+                <a:off x="2080112" y="923805"/>
+                <a:ext cx="3540969" cy="886012"/>
+              </a:xfrm>
+              <a:prstGeom prst="rect">
+                <a:avLst/>
+              </a:prstGeom>
+              <a:noFill/>
+            </p:spPr>
+            <p:txBody>
+              <a:bodyPr wrap="none" lIns="0" tIns="0" rIns="0" bIns="0" rtlCol="0">
+                <a:spAutoFit/>
+              </a:bodyPr>
+              <a:lstStyle/>
+              <a:p>
+                <a:pPr/>
+                <a14:m>
+                  <m:oMathPara xmlns:m="http://schemas.openxmlformats.org/officeDocument/2006/math">
+                    <m:oMath>
+                      <m:sSub>
+                        <m:sSubPr>
+                          <m:ctrlPr>
+                            <a:rPr lang="en-US" altLang="ko-KR" sz="2000" i="1">
+                              <a:latin typeface="Cambria Math" panose="02040503050406030204" pitchFamily="18" charset="0"/>
+                            </a:rPr>
+                          </m:ctrlPr>
+                        </m:sSubPr>
+                        <m:e>
+                          <m:r>
+                            <a:rPr lang="en-US" altLang="ko-KR" sz="2000" i="1">
+                              <a:latin typeface="Cambria Math" panose="02040503050406030204" pitchFamily="18" charset="0"/>
+                            </a:rPr>
+                            <m:t>𝑄</m:t>
+                          </m:r>
+                        </m:e>
+                        <m:sub>
+                          <m:r>
+                            <a:rPr lang="en-US" altLang="ko-KR" sz="2000" i="1">
+                              <a:latin typeface="Cambria Math" panose="02040503050406030204" pitchFamily="18" charset="0"/>
+                            </a:rPr>
+                            <m:t>𝑛</m:t>
+                          </m:r>
+                        </m:sub>
+                      </m:sSub>
+                      <m:r>
+                        <a:rPr lang="en-US" altLang="ko-KR" sz="2000" i="1" smtClean="0">
+                          <a:latin typeface="Cambria Math" panose="02040503050406030204" pitchFamily="18" charset="0"/>
+                        </a:rPr>
+                        <m:t>=</m:t>
+                      </m:r>
+                      <m:sSub>
+                        <m:sSubPr>
+                          <m:ctrlPr>
+                            <a:rPr lang="en-US" altLang="ko-KR" sz="2000" i="1">
+                              <a:latin typeface="Cambria Math" panose="02040503050406030204" pitchFamily="18" charset="0"/>
+                            </a:rPr>
+                          </m:ctrlPr>
+                        </m:sSubPr>
+                        <m:e>
+                          <m:r>
+                            <a:rPr lang="en-US" altLang="ko-KR" sz="2000" i="1">
+                              <a:latin typeface="Cambria Math" panose="02040503050406030204" pitchFamily="18" charset="0"/>
+                            </a:rPr>
+                            <m:t>𝑄</m:t>
+                          </m:r>
+                        </m:e>
+                        <m:sub>
+                          <m:r>
+                            <a:rPr lang="en-US" altLang="ko-KR" sz="2000" i="1">
+                              <a:latin typeface="Cambria Math" panose="02040503050406030204" pitchFamily="18" charset="0"/>
+                            </a:rPr>
+                            <m:t>𝑛</m:t>
+                          </m:r>
+                          <m:r>
+                            <a:rPr lang="en-US" altLang="ko-KR" sz="2000" i="1">
+                              <a:latin typeface="Cambria Math" panose="02040503050406030204" pitchFamily="18" charset="0"/>
+                            </a:rPr>
+                            <m:t>−1</m:t>
+                          </m:r>
+                        </m:sub>
+                      </m:sSub>
+                      <m:r>
+                        <a:rPr lang="en-US" altLang="ko-KR" sz="2000" i="1">
+                          <a:latin typeface="Cambria Math" panose="02040503050406030204" pitchFamily="18" charset="0"/>
+                        </a:rPr>
+                        <m:t>+</m:t>
+                      </m:r>
+                      <m:f>
+                        <m:fPr>
+                          <m:ctrlPr>
+                            <a:rPr lang="en-US" altLang="ko-KR" sz="2000" i="1">
+                              <a:latin typeface="Cambria Math" panose="02040503050406030204" pitchFamily="18" charset="0"/>
+                            </a:rPr>
+                          </m:ctrlPr>
+                        </m:fPr>
+                        <m:num>
+                          <m:r>
+                            <a:rPr lang="en-US" altLang="ko-KR" sz="2000" i="1">
+                              <a:latin typeface="Cambria Math" panose="02040503050406030204" pitchFamily="18" charset="0"/>
+                            </a:rPr>
+                            <m:t>1</m:t>
+                          </m:r>
+                        </m:num>
+                        <m:den>
+                          <m:r>
+                            <a:rPr lang="en-US" altLang="ko-KR" sz="2000" i="1">
+                              <a:latin typeface="Cambria Math" panose="02040503050406030204" pitchFamily="18" charset="0"/>
+                            </a:rPr>
+                            <m:t>𝑛</m:t>
+                          </m:r>
+                        </m:den>
+                      </m:f>
+                      <m:d>
+                        <m:dPr>
+                          <m:ctrlPr>
+                            <a:rPr lang="en-US" altLang="ko-KR" sz="2000" i="1">
+                              <a:latin typeface="Cambria Math" panose="02040503050406030204" pitchFamily="18" charset="0"/>
+                            </a:rPr>
+                          </m:ctrlPr>
+                        </m:dPr>
+                        <m:e>
+                          <m:sSub>
+                            <m:sSubPr>
+                              <m:ctrlPr>
+                                <a:rPr lang="en-US" altLang="ko-KR" sz="2000" i="1">
+                                  <a:latin typeface="Cambria Math" panose="02040503050406030204" pitchFamily="18" charset="0"/>
+                                </a:rPr>
+                              </m:ctrlPr>
+                            </m:sSubPr>
+                            <m:e>
+                              <m:r>
+                                <a:rPr lang="en-US" altLang="ko-KR" sz="2000" i="1">
+                                  <a:latin typeface="Cambria Math" panose="02040503050406030204" pitchFamily="18" charset="0"/>
+                                </a:rPr>
+                                <m:t>𝑅</m:t>
+                              </m:r>
+                            </m:e>
+                            <m:sub>
+                              <m:r>
+                                <a:rPr lang="en-US" altLang="ko-KR" sz="2000" i="1">
+                                  <a:latin typeface="Cambria Math" panose="02040503050406030204" pitchFamily="18" charset="0"/>
+                                </a:rPr>
+                                <m:t>𝑛</m:t>
+                              </m:r>
+                            </m:sub>
+                          </m:sSub>
+                          <m:r>
+                            <a:rPr lang="en-US" altLang="ko-KR" sz="2000" i="1">
+                              <a:latin typeface="Cambria Math" panose="02040503050406030204" pitchFamily="18" charset="0"/>
+                            </a:rPr>
+                            <m:t>−</m:t>
+                          </m:r>
+                          <m:sSub>
+                            <m:sSubPr>
+                              <m:ctrlPr>
+                                <a:rPr lang="en-US" altLang="ko-KR" sz="2000" i="1">
+                                  <a:latin typeface="Cambria Math" panose="02040503050406030204" pitchFamily="18" charset="0"/>
+                                </a:rPr>
+                              </m:ctrlPr>
+                            </m:sSubPr>
+                            <m:e>
+                              <m:r>
+                                <a:rPr lang="en-US" altLang="ko-KR" sz="2000" i="1">
+                                  <a:latin typeface="Cambria Math" panose="02040503050406030204" pitchFamily="18" charset="0"/>
+                                </a:rPr>
+                                <m:t>𝑄</m:t>
+                              </m:r>
+                            </m:e>
+                            <m:sub>
+                              <m:r>
+                                <a:rPr lang="en-US" altLang="ko-KR" sz="2000" i="1">
+                                  <a:latin typeface="Cambria Math" panose="02040503050406030204" pitchFamily="18" charset="0"/>
+                                </a:rPr>
+                                <m:t>𝑛</m:t>
+                              </m:r>
+                              <m:r>
+                                <a:rPr lang="en-US" altLang="ko-KR" sz="2000" i="1">
+                                  <a:latin typeface="Cambria Math" panose="02040503050406030204" pitchFamily="18" charset="0"/>
+                                </a:rPr>
+                                <m:t>−1</m:t>
+                              </m:r>
+                            </m:sub>
+                          </m:sSub>
+                        </m:e>
+                      </m:d>
+                    </m:oMath>
+                  </m:oMathPara>
+                </a14:m>
+                <a:endParaRPr lang="en-US" sz="2000" dirty="0"/>
+              </a:p>
+              <a:p>
+                <a:pPr/>
+                <a:endParaRPr sz="2000" dirty="0"/>
+              </a:p>
+            </p:txBody>
+          </p:sp>
+        </mc:Choice>
+        <mc:Fallback>
+          <p:sp>
+            <p:nvSpPr>
+              <p:cNvPr id="5" name="TextBox 4">
+                <a:extLst>
+                  <a:ext uri="{FF2B5EF4-FFF2-40B4-BE49-F238E27FC236}">
+                    <a16:creationId xmlns:a16="http://schemas.microsoft.com/office/drawing/2014/main" id="{2D9FD961-72EF-F68E-2377-FA477E05DE8C}"/>
+                  </a:ext>
+                </a:extLst>
+              </p:cNvPr>
+              <p:cNvSpPr txBox="1">
+                <a:spLocks noRot="1" noChangeAspect="1" noMove="1" noResize="1" noEditPoints="1" noAdjustHandles="1" noChangeArrowheads="1" noChangeShapeType="1" noTextEdit="1"/>
+              </p:cNvSpPr>
+              <p:nvPr/>
+            </p:nvSpPr>
+            <p:spPr>
+              <a:xfrm>
+                <a:off x="2080112" y="923805"/>
+                <a:ext cx="3540969" cy="886012"/>
+              </a:xfrm>
+              <a:prstGeom prst="rect">
+                <a:avLst/>
+              </a:prstGeom>
+              <a:blipFill>
+                <a:blip r:embed="rId3"/>
+                <a:stretch>
+                  <a:fillRect/>
+                </a:stretch>
+              </a:blipFill>
+            </p:spPr>
+            <p:txBody>
+              <a:bodyPr/>
+              <a:lstStyle/>
+              <a:p>
+                <a:r>
+                  <a:rPr lang="ko-KR" altLang="en-US">
+                    <a:noFill/>
+                  </a:rPr>
+                  <a:t> </a:t>
+                </a:r>
+              </a:p>
+            </p:txBody>
+          </p:sp>
+        </mc:Fallback>
+      </mc:AlternateContent>
+      <mc:AlternateContent xmlns:mc="http://schemas.openxmlformats.org/markup-compatibility/2006">
+        <mc:Choice xmlns:a14="http://schemas.microsoft.com/office/drawing/2010/main" Requires="a14">
+          <p:sp>
+            <p:nvSpPr>
+              <p:cNvPr id="7" name="TextBox 6">
+                <a:extLst>
+                  <a:ext uri="{FF2B5EF4-FFF2-40B4-BE49-F238E27FC236}">
+                    <a16:creationId xmlns:a16="http://schemas.microsoft.com/office/drawing/2014/main" id="{A00AC03A-888E-23FB-6AF0-A58C10EC1A59}"/>
+                  </a:ext>
+                </a:extLst>
+              </p:cNvPr>
+              <p:cNvSpPr txBox="1"/>
+              <p:nvPr/>
+            </p:nvSpPr>
+            <p:spPr>
+              <a:xfrm>
+                <a:off x="2670082" y="1728633"/>
+                <a:ext cx="4619170" cy="668516"/>
+              </a:xfrm>
+              <a:prstGeom prst="rect">
+                <a:avLst/>
+              </a:prstGeom>
+              <a:noFill/>
+            </p:spPr>
+            <p:txBody>
+              <a:bodyPr wrap="square">
+                <a:spAutoFit/>
+              </a:bodyPr>
+              <a:lstStyle/>
+              <a:p>
+                <a:pPr/>
+                <a14:m>
+                  <m:oMathPara xmlns:m="http://schemas.openxmlformats.org/officeDocument/2006/math">
+                    <m:oMath>
+                      <m:sSub>
+                        <m:sSubPr>
+                          <m:ctrlPr>
+                            <a:rPr lang="en-US" altLang="ko-KR" sz="2000" i="1">
+                              <a:latin typeface="Cambria Math" panose="02040503050406030204" pitchFamily="18" charset="0"/>
+                            </a:rPr>
+                          </m:ctrlPr>
+                        </m:sSubPr>
+                        <m:e>
+                          <m:r>
+                            <a:rPr lang="en-US" altLang="ko-KR" sz="2000" i="1">
+                              <a:latin typeface="Cambria Math" panose="02040503050406030204" pitchFamily="18" charset="0"/>
+                            </a:rPr>
+                            <m:t>𝑄</m:t>
+                          </m:r>
+                        </m:e>
+                        <m:sub>
+                          <m:r>
+                            <a:rPr lang="en-US" altLang="ko-KR" sz="2000" b="0" i="1" smtClean="0">
+                              <a:latin typeface="Cambria Math" panose="02040503050406030204" pitchFamily="18" charset="0"/>
+                            </a:rPr>
+                            <m:t>1</m:t>
+                          </m:r>
+                        </m:sub>
+                      </m:sSub>
+                      <m:r>
+                        <a:rPr lang="en-US" altLang="ko-KR" sz="2000" i="1">
+                          <a:latin typeface="Cambria Math" panose="02040503050406030204" pitchFamily="18" charset="0"/>
+                        </a:rPr>
+                        <m:t>=</m:t>
+                      </m:r>
+                      <m:sSub>
+                        <m:sSubPr>
+                          <m:ctrlPr>
+                            <a:rPr lang="en-US" altLang="ko-KR" sz="2000" i="1">
+                              <a:latin typeface="Cambria Math" panose="02040503050406030204" pitchFamily="18" charset="0"/>
+                            </a:rPr>
+                          </m:ctrlPr>
+                        </m:sSubPr>
+                        <m:e>
+                          <m:r>
+                            <a:rPr lang="en-US" altLang="ko-KR" sz="2000" i="1">
+                              <a:latin typeface="Cambria Math" panose="02040503050406030204" pitchFamily="18" charset="0"/>
+                            </a:rPr>
+                            <m:t>𝑄</m:t>
+                          </m:r>
+                        </m:e>
+                        <m:sub>
+                          <m:r>
+                            <a:rPr lang="en-US" altLang="ko-KR" sz="2000" b="0" i="1" smtClean="0">
+                              <a:latin typeface="Cambria Math" panose="02040503050406030204" pitchFamily="18" charset="0"/>
+                            </a:rPr>
+                            <m:t>0</m:t>
+                          </m:r>
+                        </m:sub>
+                      </m:sSub>
+                      <m:r>
+                        <a:rPr lang="en-US" altLang="ko-KR" sz="2000" i="1">
+                          <a:latin typeface="Cambria Math" panose="02040503050406030204" pitchFamily="18" charset="0"/>
+                        </a:rPr>
+                        <m:t>+</m:t>
+                      </m:r>
+                      <m:f>
+                        <m:fPr>
+                          <m:ctrlPr>
+                            <a:rPr lang="en-US" altLang="ko-KR" sz="2000" i="1">
+                              <a:latin typeface="Cambria Math" panose="02040503050406030204" pitchFamily="18" charset="0"/>
+                            </a:rPr>
+                          </m:ctrlPr>
+                        </m:fPr>
+                        <m:num>
+                          <m:r>
+                            <a:rPr lang="en-US" altLang="ko-KR" sz="2000" i="1">
+                              <a:latin typeface="Cambria Math" panose="02040503050406030204" pitchFamily="18" charset="0"/>
+                            </a:rPr>
+                            <m:t>1</m:t>
+                          </m:r>
+                        </m:num>
+                        <m:den>
+                          <m:r>
+                            <a:rPr lang="en-US" altLang="ko-KR" sz="2000" b="0" i="1" smtClean="0">
+                              <a:latin typeface="Cambria Math" panose="02040503050406030204" pitchFamily="18" charset="0"/>
+                            </a:rPr>
+                            <m:t>1</m:t>
+                          </m:r>
+                        </m:den>
+                      </m:f>
+                      <m:d>
+                        <m:dPr>
+                          <m:ctrlPr>
+                            <a:rPr lang="en-US" altLang="ko-KR" sz="2000" i="1">
+                              <a:latin typeface="Cambria Math" panose="02040503050406030204" pitchFamily="18" charset="0"/>
+                            </a:rPr>
+                          </m:ctrlPr>
+                        </m:dPr>
+                        <m:e>
+                          <m:sSub>
+                            <m:sSubPr>
+                              <m:ctrlPr>
+                                <a:rPr lang="en-US" altLang="ko-KR" sz="2000" i="1">
+                                  <a:latin typeface="Cambria Math" panose="02040503050406030204" pitchFamily="18" charset="0"/>
+                                </a:rPr>
+                              </m:ctrlPr>
+                            </m:sSubPr>
+                            <m:e>
+                              <m:r>
+                                <a:rPr lang="en-US" altLang="ko-KR" sz="2000" i="1">
+                                  <a:latin typeface="Cambria Math" panose="02040503050406030204" pitchFamily="18" charset="0"/>
+                                </a:rPr>
+                                <m:t>𝑅</m:t>
+                              </m:r>
+                            </m:e>
+                            <m:sub>
+                              <m:r>
+                                <a:rPr lang="en-US" altLang="ko-KR" sz="2000" b="0" i="1" smtClean="0">
+                                  <a:latin typeface="Cambria Math" panose="02040503050406030204" pitchFamily="18" charset="0"/>
+                                </a:rPr>
+                                <m:t>1</m:t>
+                              </m:r>
+                            </m:sub>
+                          </m:sSub>
+                          <m:r>
+                            <a:rPr lang="en-US" altLang="ko-KR" sz="2000" i="1">
+                              <a:latin typeface="Cambria Math" panose="02040503050406030204" pitchFamily="18" charset="0"/>
+                            </a:rPr>
+                            <m:t>−</m:t>
+                          </m:r>
+                          <m:sSub>
+                            <m:sSubPr>
+                              <m:ctrlPr>
+                                <a:rPr lang="en-US" altLang="ko-KR" sz="2000" i="1">
+                                  <a:latin typeface="Cambria Math" panose="02040503050406030204" pitchFamily="18" charset="0"/>
+                                </a:rPr>
+                              </m:ctrlPr>
+                            </m:sSubPr>
+                            <m:e>
+                              <m:r>
+                                <a:rPr lang="en-US" altLang="ko-KR" sz="2000" i="1">
+                                  <a:latin typeface="Cambria Math" panose="02040503050406030204" pitchFamily="18" charset="0"/>
+                                </a:rPr>
+                                <m:t>𝑄</m:t>
+                              </m:r>
+                            </m:e>
+                            <m:sub>
+                              <m:r>
+                                <a:rPr lang="en-US" altLang="ko-KR" sz="2000" b="0" i="1" smtClean="0">
+                                  <a:latin typeface="Cambria Math" panose="02040503050406030204" pitchFamily="18" charset="0"/>
+                                </a:rPr>
+                                <m:t>0</m:t>
+                              </m:r>
+                            </m:sub>
+                          </m:sSub>
+                        </m:e>
+                      </m:d>
+                      <m:r>
+                        <a:rPr lang="en-US" altLang="ko-KR" sz="2000" b="0" i="1" smtClean="0">
+                          <a:latin typeface="Cambria Math" panose="02040503050406030204" pitchFamily="18" charset="0"/>
+                        </a:rPr>
+                        <m:t>=</m:t>
+                      </m:r>
+                      <m:sSub>
+                        <m:sSubPr>
+                          <m:ctrlPr>
+                            <a:rPr lang="en-US" altLang="ko-KR" sz="2000" i="1">
+                              <a:latin typeface="Cambria Math" panose="02040503050406030204" pitchFamily="18" charset="0"/>
+                            </a:rPr>
+                          </m:ctrlPr>
+                        </m:sSubPr>
+                        <m:e>
+                          <m:r>
+                            <a:rPr lang="en-US" altLang="ko-KR" sz="2000" i="1">
+                              <a:latin typeface="Cambria Math" panose="02040503050406030204" pitchFamily="18" charset="0"/>
+                            </a:rPr>
+                            <m:t>𝑅</m:t>
+                          </m:r>
+                        </m:e>
+                        <m:sub>
+                          <m:r>
+                            <a:rPr lang="en-US" altLang="ko-KR" sz="2000" i="1">
+                              <a:latin typeface="Cambria Math" panose="02040503050406030204" pitchFamily="18" charset="0"/>
+                            </a:rPr>
+                            <m:t>1</m:t>
+                          </m:r>
+                        </m:sub>
+                      </m:sSub>
+                    </m:oMath>
+                  </m:oMathPara>
+                </a14:m>
+                <a:endParaRPr lang="en-US" altLang="ko-KR" sz="2000" dirty="0"/>
+              </a:p>
+            </p:txBody>
+          </p:sp>
+        </mc:Choice>
+        <mc:Fallback>
+          <p:sp>
+            <p:nvSpPr>
+              <p:cNvPr id="7" name="TextBox 6">
+                <a:extLst>
+                  <a:ext uri="{FF2B5EF4-FFF2-40B4-BE49-F238E27FC236}">
+                    <a16:creationId xmlns:a16="http://schemas.microsoft.com/office/drawing/2014/main" id="{A00AC03A-888E-23FB-6AF0-A58C10EC1A59}"/>
+                  </a:ext>
+                </a:extLst>
+              </p:cNvPr>
+              <p:cNvSpPr txBox="1">
+                <a:spLocks noRot="1" noChangeAspect="1" noMove="1" noResize="1" noEditPoints="1" noAdjustHandles="1" noChangeArrowheads="1" noChangeShapeType="1" noTextEdit="1"/>
+              </p:cNvSpPr>
+              <p:nvPr/>
+            </p:nvSpPr>
+            <p:spPr>
+              <a:xfrm>
+                <a:off x="2670082" y="1728633"/>
+                <a:ext cx="4619170" cy="668516"/>
+              </a:xfrm>
+              <a:prstGeom prst="rect">
+                <a:avLst/>
+              </a:prstGeom>
+              <a:blipFill>
+                <a:blip r:embed="rId4"/>
+                <a:stretch>
+                  <a:fillRect/>
+                </a:stretch>
+              </a:blipFill>
+            </p:spPr>
+            <p:txBody>
+              <a:bodyPr/>
+              <a:lstStyle/>
+              <a:p>
+                <a:r>
+                  <a:rPr lang="ko-KR" altLang="en-US">
+                    <a:noFill/>
+                  </a:rPr>
+                  <a:t> </a:t>
+                </a:r>
+              </a:p>
+            </p:txBody>
+          </p:sp>
+        </mc:Fallback>
+      </mc:AlternateContent>
+      <p:pic>
+        <p:nvPicPr>
+          <p:cNvPr id="9" name="그림 8">
+            <a:extLst>
+              <a:ext uri="{FF2B5EF4-FFF2-40B4-BE49-F238E27FC236}">
+                <a16:creationId xmlns:a16="http://schemas.microsoft.com/office/drawing/2014/main" id="{1131B4F1-B704-D9A5-A990-63BF15040949}"/>
+              </a:ext>
+            </a:extLst>
+          </p:cNvPr>
+          <p:cNvPicPr>
+            <a:picLocks noChangeAspect="1"/>
+          </p:cNvPicPr>
+          <p:nvPr/>
+        </p:nvPicPr>
+        <p:blipFill>
+          <a:blip r:embed="rId5">
+            <a:extLst>
+              <a:ext uri="{28A0092B-C50C-407E-A947-70E740481C1C}">
+                <a14:useLocalDpi xmlns:a14="http://schemas.microsoft.com/office/drawing/2010/main" val="0"/>
+              </a:ext>
+            </a:extLst>
+          </a:blip>
+          <a:srcRect l="10177" r="13971" b="3339"/>
+          <a:stretch>
+            <a:fillRect/>
+          </a:stretch>
+        </p:blipFill>
+        <p:spPr>
+          <a:xfrm>
+            <a:off x="791028" y="4460852"/>
+            <a:ext cx="6974114" cy="495777"/>
+          </a:xfrm>
+          <a:prstGeom prst="rect">
+            <a:avLst/>
+          </a:prstGeom>
+        </p:spPr>
+      </p:pic>
+      <p:sp>
+        <p:nvSpPr>
+          <p:cNvPr id="10" name="슬라이드 번호 개체 틀 9">
+            <a:extLst>
+              <a:ext uri="{FF2B5EF4-FFF2-40B4-BE49-F238E27FC236}">
+                <a16:creationId xmlns:a16="http://schemas.microsoft.com/office/drawing/2014/main" id="{382AF315-0AA6-8D70-591E-C023F91CA727}"/>
+              </a:ext>
+            </a:extLst>
+          </p:cNvPr>
+          <p:cNvSpPr>
+            <a:spLocks noGrp="1"/>
+          </p:cNvSpPr>
+          <p:nvPr>
+            <p:ph type="sldNum" sz="quarter" idx="12"/>
+          </p:nvPr>
+        </p:nvSpPr>
+        <p:spPr/>
+        <p:txBody>
+          <a:bodyPr/>
+          <a:lstStyle/>
+          <a:p>
+            <a:fld id="{B4844BEB-34CB-469D-8313-83BA6B52212E}" type="slidenum">
+              <a:rPr lang="ko-KR" altLang="en-US" smtClean="0"/>
+              <a:t>24</a:t>
+            </a:fld>
+            <a:endParaRPr lang="ko-KR" altLang="en-US"/>
+          </a:p>
+        </p:txBody>
+      </p:sp>
+    </p:spTree>
+    <p:extLst>
+      <p:ext uri="{BB962C8B-B14F-4D97-AF65-F5344CB8AC3E}">
+        <p14:creationId xmlns:p14="http://schemas.microsoft.com/office/powerpoint/2010/main" val="1376432636"/>
+      </p:ext>
+    </p:extLst>
+  </p:cSld>
+  <p:clrMapOvr>
+    <a:masterClrMapping/>
+  </p:clrMapOvr>
+</p:sld>
+</file>
+
+<file path=ppt/slides/slide25.xml><?xml version="1.0" encoding="utf-8"?>
+<p:sld xmlns:a="http://schemas.openxmlformats.org/drawingml/2006/main" xmlns:r="http://schemas.openxmlformats.org/officeDocument/2006/relationships" xmlns:p="http://schemas.openxmlformats.org/presentationml/2006/main">
+  <p:cSld>
+    <p:spTree>
+      <p:nvGrpSpPr>
+        <p:cNvPr id="1" name=""/>
+        <p:cNvGrpSpPr/>
+        <p:nvPr/>
+      </p:nvGrpSpPr>
+      <p:grpSpPr>
+        <a:xfrm>
+          <a:off x="0" y="0"/>
+          <a:ext cx="0" cy="0"/>
+          <a:chOff x="0" y="0"/>
+          <a:chExt cx="0" cy="0"/>
+        </a:xfrm>
+      </p:grpSpPr>
+      <p:sp>
+        <p:nvSpPr>
+          <p:cNvPr id="2" name="제목 1">
+            <a:extLst>
+              <a:ext uri="{FF2B5EF4-FFF2-40B4-BE49-F238E27FC236}">
+                <a16:creationId xmlns:a16="http://schemas.microsoft.com/office/drawing/2014/main" id="{D0B97331-FB82-BD42-B6EB-B351B85EA991}"/>
+              </a:ext>
+            </a:extLst>
+          </p:cNvPr>
+          <p:cNvSpPr>
+            <a:spLocks noGrp="1"/>
+          </p:cNvSpPr>
+          <p:nvPr>
+            <p:ph type="title"/>
+          </p:nvPr>
+        </p:nvSpPr>
+        <p:spPr/>
+        <p:txBody>
+          <a:bodyPr/>
+          <a:lstStyle/>
+          <a:p>
+            <a:r>
+              <a:rPr lang="ko-KR" altLang="en-US" dirty="0"/>
+              <a:t>비정상 문제 풀기</a:t>
+            </a:r>
+          </a:p>
+        </p:txBody>
+      </p:sp>
+      <mc:AlternateContent xmlns:mc="http://schemas.openxmlformats.org/markup-compatibility/2006">
+        <mc:Choice xmlns:a14="http://schemas.microsoft.com/office/drawing/2010/main" Requires="a14">
+          <p:sp>
+            <p:nvSpPr>
+              <p:cNvPr id="3" name="내용 개체 틀 2">
+                <a:extLst>
+                  <a:ext uri="{FF2B5EF4-FFF2-40B4-BE49-F238E27FC236}">
+                    <a16:creationId xmlns:a16="http://schemas.microsoft.com/office/drawing/2014/main" id="{40F85333-CBB6-E7BA-4069-D40B3CA27728}"/>
+                  </a:ext>
+                </a:extLst>
+              </p:cNvPr>
+              <p:cNvSpPr>
+                <a:spLocks noGrp="1"/>
+              </p:cNvSpPr>
+              <p:nvPr>
+                <p:ph idx="1"/>
+              </p:nvPr>
+            </p:nvSpPr>
+            <p:spPr/>
+            <p:txBody>
+              <a:bodyPr/>
+              <a:lstStyle/>
+              <a:p>
+                <a:r>
+                  <a:rPr lang="ko-KR" altLang="en-US" dirty="0"/>
+                  <a:t>추정치의 가중치를 </a:t>
+                </a:r>
+                <a:r>
+                  <a:rPr lang="ko-KR" altLang="en-US" dirty="0" err="1"/>
+                  <a:t>고정값</a:t>
+                </a:r>
+                <a:r>
+                  <a:rPr lang="ko-KR" altLang="en-US" dirty="0"/>
+                  <a:t> </a:t>
+                </a:r>
+                <a14:m>
+                  <m:oMath xmlns:m="http://schemas.openxmlformats.org/officeDocument/2006/math">
+                    <m:r>
+                      <a:rPr lang="ko-KR" altLang="en-US" i="1">
+                        <a:latin typeface="Cambria Math" panose="02040503050406030204" pitchFamily="18" charset="0"/>
+                      </a:rPr>
+                      <m:t>𝛼</m:t>
+                    </m:r>
+                  </m:oMath>
+                </a14:m>
+                <a:r>
+                  <a:rPr lang="ko-KR" altLang="en-US" dirty="0"/>
+                  <a:t>로 갱신</a:t>
+                </a:r>
+              </a:p>
+            </p:txBody>
+          </p:sp>
+        </mc:Choice>
+        <mc:Fallback>
+          <p:sp>
+            <p:nvSpPr>
+              <p:cNvPr id="3" name="내용 개체 틀 2">
+                <a:extLst>
+                  <a:ext uri="{FF2B5EF4-FFF2-40B4-BE49-F238E27FC236}">
+                    <a16:creationId xmlns:a16="http://schemas.microsoft.com/office/drawing/2014/main" id="{40F85333-CBB6-E7BA-4069-D40B3CA27728}"/>
+                  </a:ext>
+                </a:extLst>
+              </p:cNvPr>
+              <p:cNvSpPr>
+                <a:spLocks noGrp="1" noRot="1" noChangeAspect="1" noMove="1" noResize="1" noEditPoints="1" noAdjustHandles="1" noChangeArrowheads="1" noChangeShapeType="1" noTextEdit="1"/>
+              </p:cNvSpPr>
+              <p:nvPr>
+                <p:ph idx="1"/>
+              </p:nvPr>
+            </p:nvSpPr>
+            <p:spPr>
+              <a:blipFill>
+                <a:blip r:embed="rId2"/>
+                <a:stretch>
+                  <a:fillRect l="-1240" t="-1963"/>
+                </a:stretch>
+              </a:blipFill>
+            </p:spPr>
+            <p:txBody>
+              <a:bodyPr/>
+              <a:lstStyle/>
+              <a:p>
+                <a:r>
+                  <a:rPr lang="ko-KR" altLang="en-US">
+                    <a:noFill/>
+                  </a:rPr>
+                  <a:t> </a:t>
+                </a:r>
+              </a:p>
+            </p:txBody>
+          </p:sp>
+        </mc:Fallback>
+      </mc:AlternateContent>
+      <p:pic>
+        <p:nvPicPr>
+          <p:cNvPr id="5" name="그림 4">
+            <a:extLst>
+              <a:ext uri="{FF2B5EF4-FFF2-40B4-BE49-F238E27FC236}">
+                <a16:creationId xmlns:a16="http://schemas.microsoft.com/office/drawing/2014/main" id="{9D5C5ACC-A8B3-93BA-960F-1D565BB96329}"/>
+              </a:ext>
+            </a:extLst>
+          </p:cNvPr>
+          <p:cNvPicPr>
+            <a:picLocks noChangeAspect="1"/>
+          </p:cNvPicPr>
+          <p:nvPr/>
+        </p:nvPicPr>
+        <p:blipFill>
+          <a:blip r:embed="rId3"/>
+          <a:stretch>
+            <a:fillRect/>
+          </a:stretch>
+        </p:blipFill>
+        <p:spPr>
+          <a:xfrm>
+            <a:off x="1102434" y="1968433"/>
+            <a:ext cx="6202916" cy="3234938"/>
+          </a:xfrm>
+          <a:prstGeom prst="rect">
+            <a:avLst/>
+          </a:prstGeom>
+        </p:spPr>
+      </p:pic>
+      <p:cxnSp>
+        <p:nvCxnSpPr>
+          <p:cNvPr id="6" name="직선 연결선 5">
+            <a:extLst>
+              <a:ext uri="{FF2B5EF4-FFF2-40B4-BE49-F238E27FC236}">
+                <a16:creationId xmlns:a16="http://schemas.microsoft.com/office/drawing/2014/main" id="{3766A053-5058-D1DA-134D-7BF8A01932FD}"/>
+              </a:ext>
+            </a:extLst>
+          </p:cNvPr>
+          <p:cNvCxnSpPr>
+            <a:cxnSpLocks/>
+          </p:cNvCxnSpPr>
+          <p:nvPr/>
+        </p:nvCxnSpPr>
+        <p:spPr>
+          <a:xfrm>
+            <a:off x="6233886" y="4117643"/>
+            <a:ext cx="1071464" cy="0"/>
+          </a:xfrm>
+          <a:prstGeom prst="line">
+            <a:avLst/>
+          </a:prstGeom>
+          <a:ln w="19050">
+            <a:solidFill>
+              <a:srgbClr val="FF0000"/>
+            </a:solidFill>
+          </a:ln>
+        </p:spPr>
+        <p:style>
+          <a:lnRef idx="1">
+            <a:schemeClr val="accent1"/>
+          </a:lnRef>
+          <a:fillRef idx="0">
+            <a:schemeClr val="accent1"/>
+          </a:fillRef>
+          <a:effectRef idx="0">
+            <a:schemeClr val="accent1"/>
+          </a:effectRef>
+          <a:fontRef idx="minor">
+            <a:schemeClr val="tx1"/>
+          </a:fontRef>
+        </p:style>
+      </p:cxnSp>
+      <p:sp>
+        <p:nvSpPr>
+          <p:cNvPr id="8" name="슬라이드 번호 개체 틀 7">
+            <a:extLst>
+              <a:ext uri="{FF2B5EF4-FFF2-40B4-BE49-F238E27FC236}">
+                <a16:creationId xmlns:a16="http://schemas.microsoft.com/office/drawing/2014/main" id="{6F96B302-0D43-FEDE-0001-9A988B1C028A}"/>
+              </a:ext>
+            </a:extLst>
+          </p:cNvPr>
+          <p:cNvSpPr>
+            <a:spLocks noGrp="1"/>
+          </p:cNvSpPr>
+          <p:nvPr>
+            <p:ph type="sldNum" sz="quarter" idx="12"/>
+          </p:nvPr>
+        </p:nvSpPr>
+        <p:spPr/>
+        <p:txBody>
+          <a:bodyPr/>
+          <a:lstStyle/>
+          <a:p>
+            <a:fld id="{B4844BEB-34CB-469D-8313-83BA6B52212E}" type="slidenum">
+              <a:rPr lang="ko-KR" altLang="en-US" smtClean="0"/>
+              <a:t>25</a:t>
+            </a:fld>
+            <a:endParaRPr lang="ko-KR" altLang="en-US"/>
+          </a:p>
+        </p:txBody>
+      </p:sp>
+    </p:spTree>
+    <p:extLst>
+      <p:ext uri="{BB962C8B-B14F-4D97-AF65-F5344CB8AC3E}">
+        <p14:creationId xmlns:p14="http://schemas.microsoft.com/office/powerpoint/2010/main" val="521979423"/>
+      </p:ext>
+    </p:extLst>
+  </p:cSld>
+  <p:clrMapOvr>
+    <a:masterClrMapping/>
+  </p:clrMapOvr>
+</p:sld>
+</file>
+
+<file path=ppt/slides/slide26.xml><?xml version="1.0" encoding="utf-8"?>
+<p:sld xmlns:a="http://schemas.openxmlformats.org/drawingml/2006/main" xmlns:r="http://schemas.openxmlformats.org/officeDocument/2006/relationships" xmlns:p="http://schemas.openxmlformats.org/presentationml/2006/main">
+  <p:cSld>
+    <p:spTree>
+      <p:nvGrpSpPr>
+        <p:cNvPr id="1" name=""/>
+        <p:cNvGrpSpPr/>
+        <p:nvPr/>
+      </p:nvGrpSpPr>
+      <p:grpSpPr>
+        <a:xfrm>
+          <a:off x="0" y="0"/>
+          <a:ext cx="0" cy="0"/>
+          <a:chOff x="0" y="0"/>
+          <a:chExt cx="0" cy="0"/>
+        </a:xfrm>
+      </p:grpSpPr>
+      <p:sp>
+        <p:nvSpPr>
+          <p:cNvPr id="2" name="제목 1">
+            <a:extLst>
+              <a:ext uri="{FF2B5EF4-FFF2-40B4-BE49-F238E27FC236}">
+                <a16:creationId xmlns:a16="http://schemas.microsoft.com/office/drawing/2014/main" id="{1037300D-696C-FACA-41D2-75ECD462427C}"/>
+              </a:ext>
+            </a:extLst>
+          </p:cNvPr>
+          <p:cNvSpPr>
+            <a:spLocks noGrp="1"/>
+          </p:cNvSpPr>
+          <p:nvPr>
+            <p:ph type="title"/>
+          </p:nvPr>
+        </p:nvSpPr>
+        <p:spPr/>
+        <p:txBody>
+          <a:bodyPr/>
+          <a:lstStyle/>
+          <a:p>
+            <a:r>
+              <a:rPr lang="ko-KR" altLang="en-US" dirty="0"/>
+              <a:t>표본 평균과 지수 이동 평균 비교</a:t>
+            </a:r>
+          </a:p>
+        </p:txBody>
+      </p:sp>
+      <p:sp>
+        <p:nvSpPr>
+          <p:cNvPr id="3" name="내용 개체 틀 2">
+            <a:extLst>
+              <a:ext uri="{FF2B5EF4-FFF2-40B4-BE49-F238E27FC236}">
+                <a16:creationId xmlns:a16="http://schemas.microsoft.com/office/drawing/2014/main" id="{E0536317-CE60-8104-C5C4-C1E49571877D}"/>
+              </a:ext>
+            </a:extLst>
+          </p:cNvPr>
+          <p:cNvSpPr>
+            <a:spLocks noGrp="1"/>
+          </p:cNvSpPr>
+          <p:nvPr>
+            <p:ph idx="1"/>
+          </p:nvPr>
+        </p:nvSpPr>
+        <p:spPr/>
+        <p:txBody>
+          <a:bodyPr/>
+          <a:lstStyle/>
+          <a:p>
+            <a:endParaRPr lang="ko-KR" altLang="en-US"/>
+          </a:p>
+        </p:txBody>
+      </p:sp>
+      <p:pic>
+        <p:nvPicPr>
+          <p:cNvPr id="5" name="그림 4">
+            <a:extLst>
+              <a:ext uri="{FF2B5EF4-FFF2-40B4-BE49-F238E27FC236}">
+                <a16:creationId xmlns:a16="http://schemas.microsoft.com/office/drawing/2014/main" id="{4F7482EF-EB40-EB88-3832-2C60A01C9464}"/>
+              </a:ext>
+            </a:extLst>
+          </p:cNvPr>
+          <p:cNvPicPr>
+            <a:picLocks noChangeAspect="1"/>
+          </p:cNvPicPr>
+          <p:nvPr/>
+        </p:nvPicPr>
+        <p:blipFill>
+          <a:blip r:embed="rId2"/>
+          <a:stretch>
+            <a:fillRect/>
+          </a:stretch>
+        </p:blipFill>
+        <p:spPr>
+          <a:xfrm>
+            <a:off x="1207160" y="1168757"/>
+            <a:ext cx="6599530" cy="5054959"/>
+          </a:xfrm>
+          <a:prstGeom prst="rect">
+            <a:avLst/>
+          </a:prstGeom>
+        </p:spPr>
+      </p:pic>
+      <p:sp>
+        <p:nvSpPr>
+          <p:cNvPr id="6" name="슬라이드 번호 개체 틀 5">
+            <a:extLst>
+              <a:ext uri="{FF2B5EF4-FFF2-40B4-BE49-F238E27FC236}">
+                <a16:creationId xmlns:a16="http://schemas.microsoft.com/office/drawing/2014/main" id="{150F274F-9D39-3E0E-FBEB-0AB3069B7BB8}"/>
+              </a:ext>
+            </a:extLst>
+          </p:cNvPr>
+          <p:cNvSpPr>
+            <a:spLocks noGrp="1"/>
+          </p:cNvSpPr>
+          <p:nvPr>
+            <p:ph type="sldNum" sz="quarter" idx="12"/>
+          </p:nvPr>
+        </p:nvSpPr>
+        <p:spPr/>
+        <p:txBody>
+          <a:bodyPr/>
+          <a:lstStyle/>
+          <a:p>
+            <a:fld id="{B4844BEB-34CB-469D-8313-83BA6B52212E}" type="slidenum">
+              <a:rPr lang="ko-KR" altLang="en-US" smtClean="0"/>
+              <a:t>26</a:t>
+            </a:fld>
+            <a:endParaRPr lang="ko-KR" altLang="en-US"/>
+          </a:p>
+        </p:txBody>
+      </p:sp>
+    </p:spTree>
+    <p:extLst>
+      <p:ext uri="{BB962C8B-B14F-4D97-AF65-F5344CB8AC3E}">
+        <p14:creationId xmlns:p14="http://schemas.microsoft.com/office/powerpoint/2010/main" val="2898362178"/>
       </p:ext>
     </p:extLst>
   </p:cSld>
@@ -8427,14 +13364,43 @@
         </p:blipFill>
         <p:spPr>
           <a:xfrm>
-            <a:off x="2154814" y="1687537"/>
-            <a:ext cx="4724643" cy="1498677"/>
+            <a:off x="1114562" y="1994664"/>
+            <a:ext cx="6914875" cy="2193428"/>
           </a:xfrm>
           <a:prstGeom prst="rect">
             <a:avLst/>
           </a:prstGeom>
         </p:spPr>
       </p:pic>
+      <p:sp>
+        <p:nvSpPr>
+          <p:cNvPr id="4" name="슬라이드 번호 개체 틀 3">
+            <a:extLst>
+              <a:ext uri="{FF2B5EF4-FFF2-40B4-BE49-F238E27FC236}">
+                <a16:creationId xmlns:a16="http://schemas.microsoft.com/office/drawing/2014/main" id="{E24A9600-E4C3-A04C-FA28-6BEB4CAC919E}"/>
+              </a:ext>
+            </a:extLst>
+          </p:cNvPr>
+          <p:cNvSpPr>
+            <a:spLocks noGrp="1"/>
+          </p:cNvSpPr>
+          <p:nvPr>
+            <p:ph type="sldNum" sz="quarter" idx="12"/>
+          </p:nvPr>
+        </p:nvSpPr>
+        <p:spPr/>
+        <p:txBody>
+          <a:bodyPr/>
+          <a:lstStyle/>
+          <a:p>
+            <a:fld id="{B4844BEB-34CB-469D-8313-83BA6B52212E}" type="slidenum">
+              <a:rPr lang="ko-KR" altLang="en-US" smtClean="0"/>
+              <a:t>3</a:t>
+            </a:fld>
+            <a:endParaRPr lang="ko-KR" altLang="en-US"/>
+          </a:p>
+        </p:txBody>
+      </p:sp>
     </p:spTree>
     <p:extLst>
       <p:ext uri="{BB962C8B-B14F-4D97-AF65-F5344CB8AC3E}">
@@ -8551,7 +13517,7 @@
         <p:spPr/>
         <p:txBody>
           <a:bodyPr>
-            <a:normAutofit/>
+            <a:normAutofit lnSpcReduction="10000"/>
           </a:bodyPr>
           <a:lstStyle/>
           <a:p>
@@ -8636,6 +13602,22 @@
               <a:rPr lang="en-US" altLang="ko-KR" dirty="0"/>
               <a:t>Multi-armed bandit problem</a:t>
             </a:r>
+          </a:p>
+          <a:p>
+            <a:pPr lvl="1" algn="just">
+              <a:lnSpc>
+                <a:spcPct val="110000"/>
+              </a:lnSpc>
+            </a:pPr>
+            <a:endParaRPr lang="en-US" altLang="ko-KR" dirty="0"/>
+          </a:p>
+          <a:p>
+            <a:pPr lvl="1" algn="just">
+              <a:lnSpc>
+                <a:spcPct val="110000"/>
+              </a:lnSpc>
+            </a:pPr>
+            <a:endParaRPr lang="en-US" altLang="ko-KR" dirty="0"/>
           </a:p>
           <a:p>
             <a:pPr lvl="1" algn="just">
@@ -8700,20 +13682,104 @@
               </a:ext>
             </a:extLst>
           </a:blip>
+          <a:srcRect t="27295"/>
           <a:stretch>
             <a:fillRect/>
           </a:stretch>
         </p:blipFill>
         <p:spPr>
           <a:xfrm>
-            <a:off x="2815747" y="5253228"/>
-            <a:ext cx="4468457" cy="1237884"/>
+            <a:off x="672840" y="4522187"/>
+            <a:ext cx="4736778" cy="954054"/>
           </a:xfrm>
           <a:prstGeom prst="rect">
             <a:avLst/>
           </a:prstGeom>
         </p:spPr>
       </p:pic>
+      <p:sp>
+        <p:nvSpPr>
+          <p:cNvPr id="5" name="TextBox 4">
+            <a:extLst>
+              <a:ext uri="{FF2B5EF4-FFF2-40B4-BE49-F238E27FC236}">
+                <a16:creationId xmlns:a16="http://schemas.microsoft.com/office/drawing/2014/main" id="{0CEAA22F-0830-D7AC-9041-AD16357C111C}"/>
+              </a:ext>
+            </a:extLst>
+          </p:cNvPr>
+          <p:cNvSpPr txBox="1"/>
+          <p:nvPr/>
+        </p:nvSpPr>
+        <p:spPr>
+          <a:xfrm>
+            <a:off x="5500914" y="4416195"/>
+            <a:ext cx="3280228" cy="830997"/>
+          </a:xfrm>
+          <a:prstGeom prst="rect">
+            <a:avLst/>
+          </a:prstGeom>
+          <a:noFill/>
+        </p:spPr>
+        <p:txBody>
+          <a:bodyPr wrap="square" rtlCol="0">
+            <a:spAutoFit/>
+          </a:bodyPr>
+          <a:lstStyle/>
+          <a:p>
+            <a:pPr marL="171450" indent="-171450" algn="just">
+              <a:buFont typeface="Arial" panose="020B0604020202020204" pitchFamily="34" charset="0"/>
+              <a:buChar char="•"/>
+            </a:pPr>
+            <a:r>
+              <a:rPr lang="ko-KR" altLang="en-US" sz="1200" dirty="0"/>
+              <a:t>에이전트가 어떤 행동을 취하면 환경의 상태가 바뀜</a:t>
+            </a:r>
+            <a:endParaRPr lang="en-US" altLang="ko-KR" sz="1200" dirty="0"/>
+          </a:p>
+          <a:p>
+            <a:pPr marL="171450" indent="-171450" algn="just">
+              <a:buFont typeface="Arial" panose="020B0604020202020204" pitchFamily="34" charset="0"/>
+              <a:buChar char="•"/>
+            </a:pPr>
+            <a:r>
+              <a:rPr lang="ko-KR" altLang="en-US" sz="1200" dirty="0" err="1"/>
+              <a:t>밴디트</a:t>
+            </a:r>
+            <a:r>
+              <a:rPr lang="ko-KR" altLang="en-US" sz="1200" dirty="0"/>
+              <a:t> 문제에서는 슬롯머신들의 확률 성정에 변화가 없음</a:t>
+            </a:r>
+          </a:p>
+        </p:txBody>
+      </p:sp>
+      <p:sp>
+        <p:nvSpPr>
+          <p:cNvPr id="7" name="슬라이드 번호 개체 틀 6">
+            <a:extLst>
+              <a:ext uri="{FF2B5EF4-FFF2-40B4-BE49-F238E27FC236}">
+                <a16:creationId xmlns:a16="http://schemas.microsoft.com/office/drawing/2014/main" id="{38AB44F0-AAF0-E24D-276B-22F20DFBD6F2}"/>
+              </a:ext>
+            </a:extLst>
+          </p:cNvPr>
+          <p:cNvSpPr>
+            <a:spLocks noGrp="1"/>
+          </p:cNvSpPr>
+          <p:nvPr>
+            <p:ph type="sldNum" sz="quarter" idx="12"/>
+          </p:nvPr>
+        </p:nvSpPr>
+        <p:spPr/>
+        <p:txBody>
+          <a:bodyPr/>
+          <a:lstStyle/>
+          <a:p>
+            <a:fld id="{B4844BEB-34CB-469D-8313-83BA6B52212E}" type="slidenum">
+              <a:rPr lang="ko-KR" altLang="en-US" smtClean="0"/>
+              <a:t>4</a:t>
+            </a:fld>
+            <a:endParaRPr lang="ko-KR" altLang="en-US"/>
+          </a:p>
+        </p:txBody>
+      </p:sp>
     </p:spTree>
     <p:extLst>
       <p:ext uri="{BB962C8B-B14F-4D97-AF65-F5344CB8AC3E}">
@@ -8777,8 +13843,8 @@
           </a:p>
         </p:txBody>
       </p:sp>
-      <mc:AlternateContent xmlns:mc="http://schemas.openxmlformats.org/markup-compatibility/2006" xmlns:a14="http://schemas.microsoft.com/office/drawing/2010/main">
-        <mc:Choice Requires="a14">
+      <mc:AlternateContent xmlns:mc="http://schemas.openxmlformats.org/markup-compatibility/2006">
+        <mc:Choice xmlns:a14="http://schemas.microsoft.com/office/drawing/2010/main" Requires="a14">
           <p:sp>
             <p:nvSpPr>
               <p:cNvPr id="3" name="내용 개체 틀 2">
@@ -9031,7 +14097,7 @@
                     <m:d>
                       <m:dPr>
                         <m:ctrlPr>
-                          <a:rPr lang="en-US" altLang="ko-KR" sz="1800" b="0" i="1" smtClean="0">
+                          <a:rPr lang="en-US" altLang="ko-KR" sz="1800" i="1">
                             <a:latin typeface="Cambria Math" panose="02040503050406030204" pitchFamily="18" charset="0"/>
                             <a:ea typeface="Cambria Math" panose="02040503050406030204" pitchFamily="18" charset="0"/>
                           </a:rPr>
@@ -9296,7 +14362,7 @@
             </p:txBody>
           </p:sp>
         </mc:Choice>
-        <mc:Fallback xmlns="">
+        <mc:Fallback>
           <p:sp>
             <p:nvSpPr>
               <p:cNvPr id="3" name="내용 개체 틀 2">
@@ -9372,6 +14438,71 @@
           </a:prstGeom>
         </p:spPr>
       </p:pic>
+      <p:sp>
+        <p:nvSpPr>
+          <p:cNvPr id="5" name="TextBox 4">
+            <a:extLst>
+              <a:ext uri="{FF2B5EF4-FFF2-40B4-BE49-F238E27FC236}">
+                <a16:creationId xmlns:a16="http://schemas.microsoft.com/office/drawing/2014/main" id="{C5068C99-4A31-2FD3-8935-8A79A7D0CE1D}"/>
+              </a:ext>
+            </a:extLst>
+          </p:cNvPr>
+          <p:cNvSpPr txBox="1"/>
+          <p:nvPr/>
+        </p:nvSpPr>
+        <p:spPr>
+          <a:xfrm>
+            <a:off x="3071268" y="2940614"/>
+            <a:ext cx="3999738" cy="261610"/>
+          </a:xfrm>
+          <a:prstGeom prst="rect">
+            <a:avLst/>
+          </a:prstGeom>
+          <a:noFill/>
+        </p:spPr>
+        <p:txBody>
+          <a:bodyPr wrap="square" rtlCol="0">
+            <a:spAutoFit/>
+          </a:bodyPr>
+          <a:lstStyle/>
+          <a:p>
+            <a:pPr algn="just"/>
+            <a:r>
+              <a:rPr lang="ko-KR" altLang="en-US" sz="1100" i="1" dirty="0"/>
+              <a:t>보통을 이런 확률분포를 플레이어가 알 수 없음</a:t>
+            </a:r>
+          </a:p>
+        </p:txBody>
+      </p:sp>
+      <p:sp>
+        <p:nvSpPr>
+          <p:cNvPr id="6" name="슬라이드 번호 개체 틀 5">
+            <a:extLst>
+              <a:ext uri="{FF2B5EF4-FFF2-40B4-BE49-F238E27FC236}">
+                <a16:creationId xmlns:a16="http://schemas.microsoft.com/office/drawing/2014/main" id="{97FBA875-37AD-ABA4-DCA3-7D7A2465BD71}"/>
+              </a:ext>
+            </a:extLst>
+          </p:cNvPr>
+          <p:cNvSpPr>
+            <a:spLocks noGrp="1"/>
+          </p:cNvSpPr>
+          <p:nvPr>
+            <p:ph type="sldNum" sz="quarter" idx="12"/>
+          </p:nvPr>
+        </p:nvSpPr>
+        <p:spPr/>
+        <p:txBody>
+          <a:bodyPr/>
+          <a:lstStyle/>
+          <a:p>
+            <a:fld id="{B4844BEB-34CB-469D-8313-83BA6B52212E}" type="slidenum">
+              <a:rPr lang="ko-KR" altLang="en-US" smtClean="0"/>
+              <a:t>5</a:t>
+            </a:fld>
+            <a:endParaRPr lang="ko-KR" altLang="en-US"/>
+          </a:p>
+        </p:txBody>
+      </p:sp>
     </p:spTree>
     <p:extLst>
       <p:ext uri="{BB962C8B-B14F-4D97-AF65-F5344CB8AC3E}">
@@ -9430,8 +14561,8 @@
           </a:p>
         </p:txBody>
       </p:sp>
-      <mc:AlternateContent xmlns:mc="http://schemas.openxmlformats.org/markup-compatibility/2006" xmlns:a14="http://schemas.microsoft.com/office/drawing/2010/main">
-        <mc:Choice Requires="a14">
+      <mc:AlternateContent xmlns:mc="http://schemas.openxmlformats.org/markup-compatibility/2006">
+        <mc:Choice xmlns:a14="http://schemas.microsoft.com/office/drawing/2010/main" Requires="a14">
           <p:sp>
             <p:nvSpPr>
               <p:cNvPr id="3" name="내용 개체 틀 2">
@@ -9723,10 +14854,22 @@
                 </a14:m>
                 <a:r>
                   <a:rPr lang="ko-KR" altLang="en-US" sz="1800" dirty="0"/>
-                  <a:t> 행동 가치</a:t>
-                </a:r>
-                <a:r>
-                  <a:rPr lang="en-US" altLang="ko-KR" sz="1800" dirty="0"/>
+                  <a:t> </a:t>
+                </a:r>
+                <a:r>
+                  <a:rPr lang="ko-KR" altLang="en-US" sz="1800" dirty="0">
+                    <a:solidFill>
+                      <a:srgbClr val="7030A0"/>
+                    </a:solidFill>
+                  </a:rPr>
+                  <a:t>행동 가치</a:t>
+                </a:r>
+                <a:r>
+                  <a:rPr lang="en-US" altLang="ko-KR" sz="1800" dirty="0">
+                    <a:solidFill>
+                      <a:srgbClr val="7030A0"/>
+                    </a:solidFill>
+                  </a:rPr>
                   <a:t>(action value) </a:t>
                 </a:r>
                 <a:r>
@@ -9741,6 +14884,40 @@
                   <a:rPr lang="en-US" altLang="ko-KR" sz="1800" dirty="0"/>
                   <a:t>(expectation)</a:t>
                 </a:r>
+              </a:p>
+              <a:p>
+                <a:pPr lvl="1" algn="just">
+                  <a:lnSpc>
+                    <a:spcPct val="100000"/>
+                  </a:lnSpc>
+                </a:pPr>
+                <a:r>
+                  <a:rPr lang="en-US" altLang="ko-KR" sz="1400" b="0" dirty="0">
+                    <a:latin typeface="Cambria Math" panose="02040503050406030204" pitchFamily="18" charset="0"/>
+                  </a:rPr>
+                  <a:t>Q</a:t>
+                </a:r>
+                <a:r>
+                  <a:rPr lang="ko-KR" altLang="en-US" sz="1400" b="0" dirty="0">
+                    <a:latin typeface="Cambria Math" panose="02040503050406030204" pitchFamily="18" charset="0"/>
+                  </a:rPr>
+                  <a:t>는 </a:t>
+                </a:r>
+                <a:r>
+                  <a:rPr lang="en-US" altLang="ko-KR" sz="1400" b="0" dirty="0">
+                    <a:latin typeface="Cambria Math" panose="02040503050406030204" pitchFamily="18" charset="0"/>
+                  </a:rPr>
+                  <a:t>Quality</a:t>
+                </a:r>
+                <a:r>
+                  <a:rPr lang="ko-KR" altLang="en-US" sz="1400" b="0" dirty="0">
+                    <a:latin typeface="Cambria Math" panose="02040503050406030204" pitchFamily="18" charset="0"/>
+                  </a:rPr>
+                  <a:t>의 머리글자</a:t>
+                </a:r>
+                <a:endParaRPr lang="en-US" altLang="ko-KR" sz="1400" b="0" dirty="0">
+                  <a:latin typeface="Cambria Math" panose="02040503050406030204" pitchFamily="18" charset="0"/>
+                </a:endParaRPr>
               </a:p>
               <a:p>
                 <a:pPr lvl="1" algn="just">
@@ -9786,6 +14963,144 @@
                 <a:endParaRPr lang="en-US" altLang="ko-KR" sz="1400" dirty="0"/>
               </a:p>
               <a:p>
+                <a:pPr lvl="1" algn="just">
+                  <a:lnSpc>
+                    <a:spcPct val="100000"/>
+                  </a:lnSpc>
+                </a:pPr>
+                <a14:m>
+                  <m:oMath xmlns:m="http://schemas.openxmlformats.org/officeDocument/2006/math">
+                    <m:r>
+                      <a:rPr lang="en-US" altLang="ko-KR" sz="1400" i="1">
+                        <a:latin typeface="Cambria Math" panose="02040503050406030204" pitchFamily="18" charset="0"/>
+                      </a:rPr>
+                      <m:t>𝑎</m:t>
+                    </m:r>
+                  </m:oMath>
+                </a14:m>
+                <a:r>
+                  <a:rPr lang="en-US" altLang="ko-KR" sz="1400" dirty="0"/>
+                  <a:t> </a:t>
+                </a:r>
+                <a:r>
+                  <a:rPr lang="ko-KR" altLang="en-US" sz="1400" dirty="0"/>
+                  <a:t>행동을 선택했을 때의 보상 </a:t>
+                </a:r>
+                <a:r>
+                  <a:rPr lang="ko-KR" altLang="en-US" sz="1400" dirty="0" err="1"/>
+                  <a:t>기댓값</a:t>
+                </a:r>
+                <a:r>
+                  <a:rPr lang="ko-KR" altLang="en-US" sz="1400" dirty="0"/>
+                  <a:t> </a:t>
+                </a:r>
+                <a:r>
+                  <a:rPr lang="en-US" altLang="ko-KR" sz="1400" dirty="0"/>
+                  <a:t>: </a:t>
+                </a:r>
+                <a14:m>
+                  <m:oMath xmlns:m="http://schemas.openxmlformats.org/officeDocument/2006/math">
+                    <m:r>
+                      <a:rPr lang="ko-KR" altLang="en-US" sz="1400" i="1">
+                        <a:latin typeface="Cambria Math" panose="02040503050406030204" pitchFamily="18" charset="0"/>
+                      </a:rPr>
+                      <m:t>𝔼</m:t>
+                    </m:r>
+                    <m:r>
+                      <a:rPr lang="en-US" altLang="ko-KR" sz="1400" i="1">
+                        <a:latin typeface="Cambria Math" panose="02040503050406030204" pitchFamily="18" charset="0"/>
+                      </a:rPr>
+                      <m:t>[</m:t>
+                    </m:r>
+                    <m:r>
+                      <a:rPr lang="en-US" altLang="ko-KR" sz="1400" i="1">
+                        <a:latin typeface="Cambria Math" panose="02040503050406030204" pitchFamily="18" charset="0"/>
+                      </a:rPr>
+                      <m:t>𝑅</m:t>
+                    </m:r>
+                    <m:r>
+                      <a:rPr lang="en-US" altLang="ko-KR" sz="1400" i="1">
+                        <a:latin typeface="Cambria Math" panose="02040503050406030204" pitchFamily="18" charset="0"/>
+                      </a:rPr>
+                      <m:t>|</m:t>
+                    </m:r>
+                    <m:r>
+                      <a:rPr lang="en-US" altLang="ko-KR" sz="1400" b="0" i="1" smtClean="0">
+                        <a:latin typeface="Cambria Math" panose="02040503050406030204" pitchFamily="18" charset="0"/>
+                      </a:rPr>
+                      <m:t>𝐴</m:t>
+                    </m:r>
+                    <m:r>
+                      <a:rPr lang="en-US" altLang="ko-KR" sz="1400" b="0" i="1" smtClean="0">
+                        <a:latin typeface="Cambria Math" panose="02040503050406030204" pitchFamily="18" charset="0"/>
+                      </a:rPr>
+                      <m:t>=</m:t>
+                    </m:r>
+                    <m:r>
+                      <a:rPr lang="en-US" altLang="ko-KR" sz="1400" b="0" i="1" smtClean="0">
+                        <a:latin typeface="Cambria Math" panose="02040503050406030204" pitchFamily="18" charset="0"/>
+                      </a:rPr>
+                      <m:t>𝑎</m:t>
+                    </m:r>
+                    <m:r>
+                      <a:rPr lang="en-US" altLang="ko-KR" sz="1400" i="1">
+                        <a:latin typeface="Cambria Math" panose="02040503050406030204" pitchFamily="18" charset="0"/>
+                      </a:rPr>
+                      <m:t>]</m:t>
+                    </m:r>
+                  </m:oMath>
+                </a14:m>
+                <a:r>
+                  <a:rPr lang="en-US" altLang="ko-KR" sz="1400" dirty="0"/>
+                  <a:t> </a:t>
+                </a:r>
+                <a:r>
+                  <a:rPr lang="ko-KR" altLang="en-US" sz="1400" dirty="0"/>
+                  <a:t>또는 </a:t>
+                </a:r>
+                <a14:m>
+                  <m:oMath xmlns:m="http://schemas.openxmlformats.org/officeDocument/2006/math">
+                    <m:r>
+                      <a:rPr lang="ko-KR" altLang="en-US" sz="1400" i="1">
+                        <a:latin typeface="Cambria Math" panose="02040503050406030204" pitchFamily="18" charset="0"/>
+                      </a:rPr>
+                      <m:t>𝔼</m:t>
+                    </m:r>
+                    <m:r>
+                      <a:rPr lang="en-US" altLang="ko-KR" sz="1400" i="1">
+                        <a:latin typeface="Cambria Math" panose="02040503050406030204" pitchFamily="18" charset="0"/>
+                      </a:rPr>
+                      <m:t>[</m:t>
+                    </m:r>
+                    <m:r>
+                      <a:rPr lang="en-US" altLang="ko-KR" sz="1400" i="1">
+                        <a:latin typeface="Cambria Math" panose="02040503050406030204" pitchFamily="18" charset="0"/>
+                      </a:rPr>
+                      <m:t>𝑅</m:t>
+                    </m:r>
+                    <m:r>
+                      <a:rPr lang="en-US" altLang="ko-KR" sz="1400" i="1">
+                        <a:latin typeface="Cambria Math" panose="02040503050406030204" pitchFamily="18" charset="0"/>
+                      </a:rPr>
+                      <m:t>|</m:t>
+                    </m:r>
+                    <m:r>
+                      <a:rPr lang="en-US" altLang="ko-KR" sz="1400" b="0" i="1" smtClean="0">
+                        <a:latin typeface="Cambria Math" panose="02040503050406030204" pitchFamily="18" charset="0"/>
+                      </a:rPr>
+                      <m:t>𝑎</m:t>
+                    </m:r>
+                    <m:r>
+                      <a:rPr lang="en-US" altLang="ko-KR" sz="1400" i="1">
+                        <a:latin typeface="Cambria Math" panose="02040503050406030204" pitchFamily="18" charset="0"/>
+                      </a:rPr>
+                      <m:t>]</m:t>
+                    </m:r>
+                  </m:oMath>
+                </a14:m>
+                <a:endParaRPr lang="en-US" altLang="ko-KR" sz="1400" dirty="0"/>
+              </a:p>
+              <a:p>
                 <a:pPr algn="just">
                   <a:lnSpc>
                     <a:spcPct val="100000"/>
@@ -9796,7 +15111,7 @@
             </p:txBody>
           </p:sp>
         </mc:Choice>
-        <mc:Fallback xmlns="">
+        <mc:Fallback>
           <p:sp>
             <p:nvSpPr>
               <p:cNvPr id="3" name="내용 개체 틀 2">
@@ -9836,6 +15151,35 @@
           </p:sp>
         </mc:Fallback>
       </mc:AlternateContent>
+      <p:sp>
+        <p:nvSpPr>
+          <p:cNvPr id="4" name="슬라이드 번호 개체 틀 3">
+            <a:extLst>
+              <a:ext uri="{FF2B5EF4-FFF2-40B4-BE49-F238E27FC236}">
+                <a16:creationId xmlns:a16="http://schemas.microsoft.com/office/drawing/2014/main" id="{B7AD2F58-7B48-5F59-51FE-6D374D521AB3}"/>
+              </a:ext>
+            </a:extLst>
+          </p:cNvPr>
+          <p:cNvSpPr>
+            <a:spLocks noGrp="1"/>
+          </p:cNvSpPr>
+          <p:nvPr>
+            <p:ph type="sldNum" sz="quarter" idx="12"/>
+          </p:nvPr>
+        </p:nvSpPr>
+        <p:spPr/>
+        <p:txBody>
+          <a:bodyPr/>
+          <a:lstStyle/>
+          <a:p>
+            <a:fld id="{B4844BEB-34CB-469D-8313-83BA6B52212E}" type="slidenum">
+              <a:rPr lang="ko-KR" altLang="en-US" smtClean="0"/>
+              <a:t>6</a:t>
+            </a:fld>
+            <a:endParaRPr lang="ko-KR" altLang="en-US"/>
+          </a:p>
+        </p:txBody>
+      </p:sp>
     </p:spTree>
     <p:extLst>
       <p:ext uri="{BB962C8B-B14F-4D97-AF65-F5344CB8AC3E}">
@@ -10035,6 +15379,35 @@
               <a:rPr lang="ko-KR" altLang="en-US" dirty="0"/>
               <a:t>개는 단서일 뿐이고 이 보상을 단서로 삼아 플레이어 스스로 추론하고 판단해야 함</a:t>
             </a:r>
+          </a:p>
+        </p:txBody>
+      </p:sp>
+      <p:sp>
+        <p:nvSpPr>
+          <p:cNvPr id="4" name="슬라이드 번호 개체 틀 3">
+            <a:extLst>
+              <a:ext uri="{FF2B5EF4-FFF2-40B4-BE49-F238E27FC236}">
+                <a16:creationId xmlns:a16="http://schemas.microsoft.com/office/drawing/2014/main" id="{E974A0E8-538A-66AA-C2AC-87504EF5C326}"/>
+              </a:ext>
+            </a:extLst>
+          </p:cNvPr>
+          <p:cNvSpPr>
+            <a:spLocks noGrp="1"/>
+          </p:cNvSpPr>
+          <p:nvPr>
+            <p:ph type="sldNum" sz="quarter" idx="12"/>
+          </p:nvPr>
+        </p:nvSpPr>
+        <p:spPr/>
+        <p:txBody>
+          <a:bodyPr/>
+          <a:lstStyle/>
+          <a:p>
+            <a:fld id="{B4844BEB-34CB-469D-8313-83BA6B52212E}" type="slidenum">
+              <a:rPr lang="ko-KR" altLang="en-US" smtClean="0"/>
+              <a:t>7</a:t>
+            </a:fld>
+            <a:endParaRPr lang="ko-KR" altLang="en-US"/>
           </a:p>
         </p:txBody>
       </p:sp>
@@ -10237,7 +15610,7 @@
                     <m:f>
                       <m:fPr>
                         <m:ctrlPr>
-                          <a:rPr lang="ko-KR" altLang="en-US" b="0" i="1" smtClean="0">
+                          <a:rPr lang="en-US" altLang="ko-KR" b="0" i="1" smtClean="0">
                             <a:latin typeface="Cambria Math" panose="02040503050406030204" pitchFamily="18" charset="0"/>
                           </a:rPr>
                         </m:ctrlPr>
@@ -10334,7 +15707,7 @@
                     <m:d>
                       <m:dPr>
                         <m:ctrlPr>
-                          <a:rPr lang="en-US" altLang="ko-KR" i="1" smtClean="0">
+                          <a:rPr lang="en-US" altLang="ko-KR" b="0" i="1" smtClean="0">
                             <a:latin typeface="Cambria Math" panose="02040503050406030204" pitchFamily="18" charset="0"/>
                           </a:rPr>
                         </m:ctrlPr>
@@ -10357,7 +15730,7 @@
                     <m:f>
                       <m:fPr>
                         <m:ctrlPr>
-                          <a:rPr lang="ko-KR" altLang="en-US" i="1">
+                          <a:rPr lang="en-US" altLang="ko-KR" b="0" i="1" smtClean="0">
                             <a:latin typeface="Cambria Math" panose="02040503050406030204" pitchFamily="18" charset="0"/>
                           </a:rPr>
                         </m:ctrlPr>
@@ -10529,7 +15902,7 @@
                 <a:ext cx="8850201" cy="3563296"/>
               </a:xfrm>
               <a:blipFill>
-                <a:blip r:embed="rId2"/>
+                <a:blip r:embed="rId3"/>
                 <a:stretch>
                   <a:fillRect l="-1102" r="-1240"/>
                 </a:stretch>
@@ -10565,7 +15938,7 @@
           <p:nvPr/>
         </p:nvPicPr>
         <p:blipFill>
-          <a:blip r:embed="rId3">
+          <a:blip r:embed="rId4">
             <a:extLst>
               <a:ext uri="{28A0092B-C50C-407E-A947-70E740481C1C}">
                 <a14:useLocalDpi xmlns:a14="http://schemas.microsoft.com/office/drawing/2010/main" val="0"/>
@@ -10586,6 +15959,70 @@
           </a:prstGeom>
         </p:spPr>
       </p:pic>
+      <p:sp>
+        <p:nvSpPr>
+          <p:cNvPr id="4" name="TextBox 3">
+            <a:extLst>
+              <a:ext uri="{FF2B5EF4-FFF2-40B4-BE49-F238E27FC236}">
+                <a16:creationId xmlns:a16="http://schemas.microsoft.com/office/drawing/2014/main" id="{E9055C16-D5A0-E5CA-1C7D-AC1A85F83A4A}"/>
+              </a:ext>
+            </a:extLst>
+          </p:cNvPr>
+          <p:cNvSpPr txBox="1"/>
+          <p:nvPr/>
+        </p:nvSpPr>
+        <p:spPr>
+          <a:xfrm>
+            <a:off x="6372880" y="1877662"/>
+            <a:ext cx="1906291" cy="369332"/>
+          </a:xfrm>
+          <a:prstGeom prst="rect">
+            <a:avLst/>
+          </a:prstGeom>
+          <a:noFill/>
+        </p:spPr>
+        <p:txBody>
+          <a:bodyPr wrap="none" rtlCol="0">
+            <a:spAutoFit/>
+          </a:bodyPr>
+          <a:lstStyle/>
+          <a:p>
+            <a:r>
+              <a:rPr lang="ko-KR" altLang="en-US"/>
+              <a:t>얻은 코인의 개수</a:t>
+            </a:r>
+          </a:p>
+        </p:txBody>
+      </p:sp>
+      <p:sp>
+        <p:nvSpPr>
+          <p:cNvPr id="5" name="슬라이드 번호 개체 틀 4">
+            <a:extLst>
+              <a:ext uri="{FF2B5EF4-FFF2-40B4-BE49-F238E27FC236}">
+                <a16:creationId xmlns:a16="http://schemas.microsoft.com/office/drawing/2014/main" id="{AC03668E-4972-B80A-AABE-D281F445F49B}"/>
+              </a:ext>
+            </a:extLst>
+          </p:cNvPr>
+          <p:cNvSpPr>
+            <a:spLocks noGrp="1"/>
+          </p:cNvSpPr>
+          <p:nvPr>
+            <p:ph type="sldNum" sz="quarter" idx="12"/>
+          </p:nvPr>
+        </p:nvSpPr>
+        <p:spPr/>
+        <p:txBody>
+          <a:bodyPr/>
+          <a:lstStyle/>
+          <a:p>
+            <a:fld id="{B4844BEB-34CB-469D-8313-83BA6B52212E}" type="slidenum">
+              <a:rPr lang="ko-KR" altLang="en-US" smtClean="0"/>
+              <a:t>8</a:t>
+            </a:fld>
+            <a:endParaRPr lang="ko-KR" altLang="en-US"/>
+          </a:p>
+        </p:txBody>
+      </p:sp>
     </p:spTree>
     <p:extLst>
       <p:ext uri="{BB962C8B-B14F-4D97-AF65-F5344CB8AC3E}">
@@ -10819,14 +16256,11 @@
                 <a:pPr/>
                 <a14:m>
                   <m:oMathPara xmlns:m="http://schemas.openxmlformats.org/officeDocument/2006/math">
-                    <m:oMathParaPr>
-                      <m:jc m:val="centerGroup"/>
-                    </m:oMathParaPr>
-                    <m:oMath xmlns:m="http://schemas.openxmlformats.org/officeDocument/2006/math">
+                    <m:oMath>
                       <m:sSub>
                         <m:sSubPr>
                           <m:ctrlPr>
-                            <a:rPr lang="en-US" altLang="ko-KR" i="1" smtClean="0">
+                            <a:rPr lang="en-US" altLang="ko-KR" b="0" i="1" smtClean="0">
                               <a:latin typeface="Cambria Math" panose="02040503050406030204" pitchFamily="18" charset="0"/>
                             </a:rPr>
                           </m:ctrlPr>
@@ -10857,7 +16291,7 @@
                       <m:f>
                         <m:fPr>
                           <m:ctrlPr>
-                            <a:rPr lang="ko-KR" altLang="en-US" i="1">
+                            <a:rPr lang="en-US" altLang="ko-KR" i="1" smtClean="0">
                               <a:latin typeface="Cambria Math" panose="02040503050406030204" pitchFamily="18" charset="0"/>
                             </a:rPr>
                           </m:ctrlPr>
@@ -10866,7 +16300,7 @@
                           <m:sSub>
                             <m:sSubPr>
                               <m:ctrlPr>
-                                <a:rPr lang="en-US" altLang="ko-KR" i="1" smtClean="0">
+                                <a:rPr lang="en-US" altLang="ko-KR" b="0" i="1" smtClean="0">
                                   <a:latin typeface="Cambria Math" panose="02040503050406030204" pitchFamily="18" charset="0"/>
                                 </a:rPr>
                               </m:ctrlPr>
@@ -11146,7 +16580,7 @@
                     <m:sSub>
                       <m:sSubPr>
                         <m:ctrlPr>
-                          <a:rPr lang="en-US" altLang="ko-KR" sz="1600" i="1" smtClean="0">
+                          <a:rPr lang="en-US" altLang="ko-KR" sz="1600" i="1">
                             <a:latin typeface="Cambria Math" panose="02040503050406030204" pitchFamily="18" charset="0"/>
                           </a:rPr>
                         </m:ctrlPr>
@@ -11231,6 +16665,35 @@
           </p:sp>
         </mc:Fallback>
       </mc:AlternateContent>
+      <p:sp>
+        <p:nvSpPr>
+          <p:cNvPr id="4" name="슬라이드 번호 개체 틀 3">
+            <a:extLst>
+              <a:ext uri="{FF2B5EF4-FFF2-40B4-BE49-F238E27FC236}">
+                <a16:creationId xmlns:a16="http://schemas.microsoft.com/office/drawing/2014/main" id="{4462FE50-733A-9E8A-3937-F03F0E643869}"/>
+              </a:ext>
+            </a:extLst>
+          </p:cNvPr>
+          <p:cNvSpPr>
+            <a:spLocks noGrp="1"/>
+          </p:cNvSpPr>
+          <p:nvPr>
+            <p:ph type="sldNum" sz="quarter" idx="12"/>
+          </p:nvPr>
+        </p:nvSpPr>
+        <p:spPr/>
+        <p:txBody>
+          <a:bodyPr/>
+          <a:lstStyle/>
+          <a:p>
+            <a:fld id="{B4844BEB-34CB-469D-8313-83BA6B52212E}" type="slidenum">
+              <a:rPr lang="ko-KR" altLang="en-US" smtClean="0"/>
+              <a:t>9</a:t>
+            </a:fld>
+            <a:endParaRPr lang="ko-KR" altLang="en-US"/>
+          </a:p>
+        </p:txBody>
+      </p:sp>
     </p:spTree>
     <p:extLst>
       <p:ext uri="{BB962C8B-B14F-4D97-AF65-F5344CB8AC3E}">
